--- a/a7/packages/A7 Unit 3 - Exponents and Scientific Notation/Slides/A7 3.02  Slides.pptx
+++ b/a7/packages/A7 Unit 3 - Exponents and Scientific Notation/Slides/A7 3.02  Slides.pptx
@@ -38,6 +38,7 @@
     <p:sldId id="286" r:id="rId37"/>
     <p:sldId id="287" r:id="rId38"/>
     <p:sldId id="288" r:id="rId39"/>
+    <p:sldId id="289" r:id="rId40"/>
   </p:sldIdLst>
   <p:sldSz cx="12191969" cy="6858000" type="screen4x3"/>
   <p:notesSz cx="6858000" cy="9144000"/>
@@ -6419,9 +6420,44 @@
           </a:p>
         </p:txBody>
       </p:sp>
+      <p:sp>
+        <p:nvSpPr>
+          <p:cNvPr id="9" name="TextBox 8"/>
+          <p:cNvSpPr txBox="1"/>
+          <p:nvPr/>
+        </p:nvSpPr>
+        <p:spPr>
+          <a:xfrm>
+            <a:off x="1625092" y="2171700"/>
+            <a:ext cx="3129280" cy="457200"/>
+          </a:xfrm>
+          <a:prstGeom prst="rect">
+            <a:avLst/>
+          </a:prstGeom>
+          <a:noFill/>
+        </p:spPr>
+        <p:txBody>
+          <a:bodyPr wrap="none" lIns="45720" rIns="45720" tIns="18288" bIns="18288" anchor="ctr">
+            <a:spAutoFit/>
+          </a:bodyPr>
+          <a:lstStyle/>
+          <a:p>
+            <a:pPr algn="l"/>
+            <a:r>
+              <a:rPr sz="2600" b="0" i="0">
+                <a:solidFill>
+                  <a:srgbClr val="1A1A1A"/>
+                </a:solidFill>
+                <a:latin typeface="Century Schoolbook"/>
+              </a:rPr>
+              <a:t>A server stores  </a:t>
+            </a:r>
+          </a:p>
+        </p:txBody>
+      </p:sp>
       <p:pic>
         <p:nvPicPr>
-          <p:cNvPr id="9" name="Picture 8" descr="020f12a59a6eb9d7.png"/>
+          <p:cNvPr id="10" name="Picture 9" descr="6211579d9db5cb0f.png"/>
           <p:cNvPicPr>
             <a:picLocks noChangeAspect="1"/>
           </p:cNvPicPr>
@@ -6435,8 +6471,8 @@
         </p:blipFill>
         <p:spPr>
           <a:xfrm>
-            <a:off x="5916168" y="2194560"/>
-            <a:ext cx="329184" cy="762000"/>
+            <a:off x="4617212" y="2228088"/>
+            <a:ext cx="323088" cy="344424"/>
           </a:xfrm>
           <a:prstGeom prst="rect">
             <a:avLst/>
@@ -6445,7 +6481,171 @@
       </p:pic>
       <p:sp>
         <p:nvSpPr>
-          <p:cNvPr id="10" name="TextBox 9"/>
+          <p:cNvPr id="11" name="TextBox 10"/>
+          <p:cNvSpPr txBox="1"/>
+          <p:nvPr/>
+        </p:nvSpPr>
+        <p:spPr>
+          <a:xfrm>
+            <a:off x="4940300" y="2171700"/>
+            <a:ext cx="2270760" cy="457200"/>
+          </a:xfrm>
+          <a:prstGeom prst="rect">
+            <a:avLst/>
+          </a:prstGeom>
+          <a:noFill/>
+        </p:spPr>
+        <p:txBody>
+          <a:bodyPr wrap="none" lIns="45720" rIns="45720" tIns="18288" bIns="18288" anchor="ctr">
+            <a:spAutoFit/>
+          </a:bodyPr>
+          <a:lstStyle/>
+          <a:p>
+            <a:pPr algn="l"/>
+            <a:r>
+              <a:rPr sz="2600" b="0" i="0">
+                <a:solidFill>
+                  <a:srgbClr val="1A1A1A"/>
+                </a:solidFill>
+                <a:latin typeface="Century Schoolbook"/>
+              </a:rPr>
+              <a:t>  files in  </a:t>
+            </a:r>
+          </a:p>
+        </p:txBody>
+      </p:sp>
+      <p:pic>
+        <p:nvPicPr>
+          <p:cNvPr id="12" name="Picture 11" descr="849ea0a036ce867d.png"/>
+          <p:cNvPicPr>
+            <a:picLocks noChangeAspect="1"/>
+          </p:cNvPicPr>
+          <p:nvPr/>
+        </p:nvPicPr>
+        <p:blipFill>
+          <a:blip r:embed="rId3"/>
+          <a:stretch>
+            <a:fillRect/>
+          </a:stretch>
+        </p:blipFill>
+        <p:spPr>
+          <a:xfrm>
+            <a:off x="7073900" y="2228088"/>
+            <a:ext cx="298704" cy="344424"/>
+          </a:xfrm>
+          <a:prstGeom prst="rect">
+            <a:avLst/>
+          </a:prstGeom>
+        </p:spPr>
+      </p:pic>
+      <p:sp>
+        <p:nvSpPr>
+          <p:cNvPr id="13" name="TextBox 12"/>
+          <p:cNvSpPr txBox="1"/>
+          <p:nvPr/>
+        </p:nvSpPr>
+        <p:spPr>
+          <a:xfrm>
+            <a:off x="7372604" y="2171700"/>
+            <a:ext cx="3300984" cy="457200"/>
+          </a:xfrm>
+          <a:prstGeom prst="rect">
+            <a:avLst/>
+          </a:prstGeom>
+          <a:noFill/>
+        </p:spPr>
+        <p:txBody>
+          <a:bodyPr wrap="none" lIns="45720" rIns="45720" tIns="18288" bIns="18288" anchor="ctr">
+            <a:spAutoFit/>
+          </a:bodyPr>
+          <a:lstStyle/>
+          <a:p>
+            <a:pPr algn="l"/>
+            <a:r>
+              <a:rPr sz="2600" b="0" i="0">
+                <a:solidFill>
+                  <a:srgbClr val="1A1A1A"/>
+                </a:solidFill>
+                <a:latin typeface="Century Schoolbook"/>
+              </a:rPr>
+              <a:t>  folders, evenly.</a:t>
+            </a:r>
+          </a:p>
+        </p:txBody>
+      </p:sp>
+      <p:sp>
+        <p:nvSpPr>
+          <p:cNvPr id="14" name="TextBox 13"/>
+          <p:cNvSpPr txBox="1"/>
+          <p:nvPr/>
+        </p:nvSpPr>
+        <p:spPr>
+          <a:xfrm>
+            <a:off x="777240" y="2880360"/>
+            <a:ext cx="10607040" cy="465151"/>
+          </a:xfrm>
+          <a:prstGeom prst="rect">
+            <a:avLst/>
+          </a:prstGeom>
+          <a:noFill/>
+        </p:spPr>
+        <p:txBody>
+          <a:bodyPr wrap="square" lIns="45720" rIns="45720" tIns="18288" bIns="18288" anchor="t">
+            <a:spAutoFit/>
+          </a:bodyPr>
+          <a:lstStyle/>
+          <a:p>
+            <a:pPr algn="ctr"/>
+            <a:r>
+              <a:rPr sz="2600" b="0" i="0">
+                <a:solidFill>
+                  <a:srgbClr val="1A1A1A"/>
+                </a:solidFill>
+                <a:latin typeface="Century Schoolbook"/>
+              </a:rPr>
+              <a:t>It has been running for 30 days.</a:t>
+            </a:r>
+          </a:p>
+        </p:txBody>
+      </p:sp>
+      <p:sp>
+        <p:nvSpPr>
+          <p:cNvPr id="15" name="TextBox 14"/>
+          <p:cNvSpPr txBox="1"/>
+          <p:nvPr/>
+        </p:nvSpPr>
+        <p:spPr>
+          <a:xfrm>
+            <a:off x="777240" y="3455239"/>
+            <a:ext cx="10607040" cy="465151"/>
+          </a:xfrm>
+          <a:prstGeom prst="rect">
+            <a:avLst/>
+          </a:prstGeom>
+          <a:noFill/>
+        </p:spPr>
+        <p:txBody>
+          <a:bodyPr wrap="square" lIns="45720" rIns="45720" tIns="18288" bIns="18288" anchor="t">
+            <a:spAutoFit/>
+          </a:bodyPr>
+          <a:lstStyle/>
+          <a:p>
+            <a:pPr algn="ctr"/>
+            <a:r>
+              <a:rPr sz="2600" b="0" i="0">
+                <a:solidFill>
+                  <a:srgbClr val="1A1A1A"/>
+                </a:solidFill>
+                <a:latin typeface="Century Schoolbook"/>
+              </a:rPr>
+              <a:t>How many files are in each folder?</a:t>
+            </a:r>
+          </a:p>
+        </p:txBody>
+      </p:sp>
+      <p:sp>
+        <p:nvSpPr>
+          <p:cNvPr id="16" name="TextBox 15"/>
           <p:cNvSpPr txBox="1"/>
           <p:nvPr/>
         </p:nvSpPr>
@@ -6480,7 +6680,7 @@
       </p:sp>
       <p:sp>
         <p:nvSpPr>
-          <p:cNvPr id="11" name="TextBox 10"/>
+          <p:cNvPr id="17" name="TextBox 16"/>
           <p:cNvSpPr txBox="1"/>
           <p:nvPr/>
         </p:nvSpPr>
@@ -6776,9 +6976,44 @@
           </a:p>
         </p:txBody>
       </p:sp>
+      <p:sp>
+        <p:nvSpPr>
+          <p:cNvPr id="9" name="TextBox 8"/>
+          <p:cNvSpPr txBox="1"/>
+          <p:nvPr/>
+        </p:nvSpPr>
+        <p:spPr>
+          <a:xfrm>
+            <a:off x="1625092" y="2080260"/>
+            <a:ext cx="3129280" cy="457200"/>
+          </a:xfrm>
+          <a:prstGeom prst="rect">
+            <a:avLst/>
+          </a:prstGeom>
+          <a:noFill/>
+        </p:spPr>
+        <p:txBody>
+          <a:bodyPr wrap="none" lIns="45720" rIns="45720" tIns="18288" bIns="18288" anchor="ctr">
+            <a:spAutoFit/>
+          </a:bodyPr>
+          <a:lstStyle/>
+          <a:p>
+            <a:pPr algn="l"/>
+            <a:r>
+              <a:rPr sz="2600" b="0" i="0">
+                <a:solidFill>
+                  <a:srgbClr val="1A1A1A"/>
+                </a:solidFill>
+                <a:latin typeface="Century Schoolbook"/>
+              </a:rPr>
+              <a:t>A server stores  </a:t>
+            </a:r>
+          </a:p>
+        </p:txBody>
+      </p:sp>
       <p:pic>
         <p:nvPicPr>
-          <p:cNvPr id="9" name="Picture 8" descr="020f12a59a6eb9d7.png"/>
+          <p:cNvPr id="10" name="Picture 9" descr="6211579d9db5cb0f.png"/>
           <p:cNvPicPr>
             <a:picLocks noChangeAspect="1"/>
           </p:cNvPicPr>
@@ -6792,8 +7027,8 @@
         </p:blipFill>
         <p:spPr>
           <a:xfrm>
-            <a:off x="5916168" y="2103120"/>
-            <a:ext cx="329184" cy="762000"/>
+            <a:off x="4617212" y="2136648"/>
+            <a:ext cx="323088" cy="344424"/>
           </a:xfrm>
           <a:prstGeom prst="rect">
             <a:avLst/>
@@ -6802,13 +7037,177 @@
       </p:pic>
       <p:sp>
         <p:nvSpPr>
-          <p:cNvPr id="10" name="TextBox 9"/>
-          <p:cNvSpPr txBox="1"/>
-          <p:nvPr/>
-        </p:nvSpPr>
-        <p:spPr>
-          <a:xfrm>
-            <a:off x="1828800" y="3139440"/>
+          <p:cNvPr id="11" name="TextBox 10"/>
+          <p:cNvSpPr txBox="1"/>
+          <p:nvPr/>
+        </p:nvSpPr>
+        <p:spPr>
+          <a:xfrm>
+            <a:off x="4940300" y="2080260"/>
+            <a:ext cx="2270760" cy="457200"/>
+          </a:xfrm>
+          <a:prstGeom prst="rect">
+            <a:avLst/>
+          </a:prstGeom>
+          <a:noFill/>
+        </p:spPr>
+        <p:txBody>
+          <a:bodyPr wrap="none" lIns="45720" rIns="45720" tIns="18288" bIns="18288" anchor="ctr">
+            <a:spAutoFit/>
+          </a:bodyPr>
+          <a:lstStyle/>
+          <a:p>
+            <a:pPr algn="l"/>
+            <a:r>
+              <a:rPr sz="2600" b="0" i="0">
+                <a:solidFill>
+                  <a:srgbClr val="1A1A1A"/>
+                </a:solidFill>
+                <a:latin typeface="Century Schoolbook"/>
+              </a:rPr>
+              <a:t>  files in  </a:t>
+            </a:r>
+          </a:p>
+        </p:txBody>
+      </p:sp>
+      <p:pic>
+        <p:nvPicPr>
+          <p:cNvPr id="12" name="Picture 11" descr="849ea0a036ce867d.png"/>
+          <p:cNvPicPr>
+            <a:picLocks noChangeAspect="1"/>
+          </p:cNvPicPr>
+          <p:nvPr/>
+        </p:nvPicPr>
+        <p:blipFill>
+          <a:blip r:embed="rId3"/>
+          <a:stretch>
+            <a:fillRect/>
+          </a:stretch>
+        </p:blipFill>
+        <p:spPr>
+          <a:xfrm>
+            <a:off x="7073900" y="2136648"/>
+            <a:ext cx="298704" cy="344424"/>
+          </a:xfrm>
+          <a:prstGeom prst="rect">
+            <a:avLst/>
+          </a:prstGeom>
+        </p:spPr>
+      </p:pic>
+      <p:sp>
+        <p:nvSpPr>
+          <p:cNvPr id="13" name="TextBox 12"/>
+          <p:cNvSpPr txBox="1"/>
+          <p:nvPr/>
+        </p:nvSpPr>
+        <p:spPr>
+          <a:xfrm>
+            <a:off x="7372604" y="2080260"/>
+            <a:ext cx="3300984" cy="457200"/>
+          </a:xfrm>
+          <a:prstGeom prst="rect">
+            <a:avLst/>
+          </a:prstGeom>
+          <a:noFill/>
+        </p:spPr>
+        <p:txBody>
+          <a:bodyPr wrap="none" lIns="45720" rIns="45720" tIns="18288" bIns="18288" anchor="ctr">
+            <a:spAutoFit/>
+          </a:bodyPr>
+          <a:lstStyle/>
+          <a:p>
+            <a:pPr algn="l"/>
+            <a:r>
+              <a:rPr sz="2600" b="0" i="0">
+                <a:solidFill>
+                  <a:srgbClr val="1A1A1A"/>
+                </a:solidFill>
+                <a:latin typeface="Century Schoolbook"/>
+              </a:rPr>
+              <a:t>  folders, evenly.</a:t>
+            </a:r>
+          </a:p>
+        </p:txBody>
+      </p:sp>
+      <p:sp>
+        <p:nvSpPr>
+          <p:cNvPr id="14" name="TextBox 13"/>
+          <p:cNvSpPr txBox="1"/>
+          <p:nvPr/>
+        </p:nvSpPr>
+        <p:spPr>
+          <a:xfrm>
+            <a:off x="777240" y="2788920"/>
+            <a:ext cx="10607040" cy="465151"/>
+          </a:xfrm>
+          <a:prstGeom prst="rect">
+            <a:avLst/>
+          </a:prstGeom>
+          <a:noFill/>
+        </p:spPr>
+        <p:txBody>
+          <a:bodyPr wrap="square" lIns="45720" rIns="45720" tIns="18288" bIns="18288" anchor="t">
+            <a:spAutoFit/>
+          </a:bodyPr>
+          <a:lstStyle/>
+          <a:p>
+            <a:pPr algn="ctr"/>
+            <a:r>
+              <a:rPr sz="2600" b="0" i="0">
+                <a:solidFill>
+                  <a:srgbClr val="1A1A1A"/>
+                </a:solidFill>
+                <a:latin typeface="Century Schoolbook"/>
+              </a:rPr>
+              <a:t>It has been running for 30 days.</a:t>
+            </a:r>
+          </a:p>
+        </p:txBody>
+      </p:sp>
+      <p:sp>
+        <p:nvSpPr>
+          <p:cNvPr id="15" name="TextBox 14"/>
+          <p:cNvSpPr txBox="1"/>
+          <p:nvPr/>
+        </p:nvSpPr>
+        <p:spPr>
+          <a:xfrm>
+            <a:off x="777240" y="3363799"/>
+            <a:ext cx="10607040" cy="465151"/>
+          </a:xfrm>
+          <a:prstGeom prst="rect">
+            <a:avLst/>
+          </a:prstGeom>
+          <a:noFill/>
+        </p:spPr>
+        <p:txBody>
+          <a:bodyPr wrap="square" lIns="45720" rIns="45720" tIns="18288" bIns="18288" anchor="t">
+            <a:spAutoFit/>
+          </a:bodyPr>
+          <a:lstStyle/>
+          <a:p>
+            <a:pPr algn="ctr"/>
+            <a:r>
+              <a:rPr sz="2600" b="0" i="0">
+                <a:solidFill>
+                  <a:srgbClr val="1A1A1A"/>
+                </a:solidFill>
+                <a:latin typeface="Century Schoolbook"/>
+              </a:rPr>
+              <a:t>How many files are in each folder?</a:t>
+            </a:r>
+          </a:p>
+        </p:txBody>
+      </p:sp>
+      <p:sp>
+        <p:nvSpPr>
+          <p:cNvPr id="16" name="TextBox 15"/>
+          <p:cNvSpPr txBox="1"/>
+          <p:nvPr/>
+        </p:nvSpPr>
+        <p:spPr>
+          <a:xfrm>
+            <a:off x="1828800" y="3984398"/>
             <a:ext cx="8503920" cy="548640"/>
           </a:xfrm>
           <a:prstGeom prst="rect">
@@ -6839,6 +7238,42 @@
                 </a:solidFill>
                 <a:latin typeface="Century Schoolbook"/>
               </a:rPr>
+              <a:t>4</a:t>
+            </a:r>
+            <a:r>
+              <a:rPr sz="2400" b="0" i="0">
+                <a:solidFill>
+                  <a:srgbClr val="6B6B6B"/>
+                </a:solidFill>
+                <a:latin typeface="Century Schoolbook"/>
+              </a:rPr>
+              <a:t> ÷ 8</a:t>
+            </a:r>
+            <a:r>
+              <a:rPr sz="2400" b="0" i="0" baseline="30000">
+                <a:solidFill>
+                  <a:srgbClr val="6B6B6B"/>
+                </a:solidFill>
+                <a:latin typeface="Century Schoolbook"/>
+              </a:rPr>
+              <a:t>1</a:t>
+            </a:r>
+            <a:r>
+              <a:rPr sz="2400" b="0" i="0">
+                <a:solidFill>
+                  <a:srgbClr val="6B6B6B"/>
+                </a:solidFill>
+                <a:latin typeface="Century Schoolbook"/>
+              </a:rPr>
+              <a:t> = 8</a:t>
+            </a:r>
+            <a:r>
+              <a:rPr sz="2400" b="0" i="0" baseline="30000">
+                <a:solidFill>
+                  <a:srgbClr val="6B6B6B"/>
+                </a:solidFill>
+                <a:latin typeface="Century Schoolbook"/>
+              </a:rPr>
               <a:t>3</a:t>
             </a:r>
           </a:p>
@@ -6846,13 +7281,13 @@
       </p:sp>
       <p:sp>
         <p:nvSpPr>
-          <p:cNvPr id="11" name="TextBox 10"/>
-          <p:cNvSpPr txBox="1"/>
-          <p:nvPr/>
-        </p:nvSpPr>
-        <p:spPr>
-          <a:xfrm>
-            <a:off x="777240" y="4663440"/>
+          <p:cNvPr id="17" name="TextBox 16"/>
+          <p:cNvSpPr txBox="1"/>
+          <p:nvPr/>
+        </p:nvSpPr>
+        <p:spPr>
+          <a:xfrm>
+            <a:off x="777240" y="4715918"/>
             <a:ext cx="10607040" cy="548640"/>
           </a:xfrm>
           <a:prstGeom prst="rect">
@@ -14261,7 +14696,7 @@
                 </a:solidFill>
                 <a:latin typeface="Century Schoolbook"/>
               </a:rPr>
-              <a:t>IXL</a:t>
+              <a:t>Independent Set</a:t>
             </a:r>
           </a:p>
         </p:txBody>
@@ -14366,7 +14801,7 @@
                 </a:solidFill>
                 <a:latin typeface="Century Schoolbook"/>
               </a:rPr>
-              <a:t>Last five minutes.</a:t>
+              <a:t>Six questions. On your own, in silence.</a:t>
             </a:r>
           </a:p>
         </p:txBody>
@@ -14484,6 +14919,479 @@
         </p:nvSpPr>
         <p:spPr>
           <a:xfrm>
+            <a:off x="960120" y="2011680"/>
+            <a:ext cx="548640" cy="356616"/>
+          </a:xfrm>
+          <a:prstGeom prst="rect">
+            <a:avLst/>
+          </a:prstGeom>
+          <a:noFill/>
+        </p:spPr>
+        <p:txBody>
+          <a:bodyPr wrap="square" lIns="45720" rIns="45720" tIns="18288" bIns="18288" anchor="t">
+            <a:spAutoFit/>
+          </a:bodyPr>
+          <a:lstStyle/>
+          <a:p>
+            <a:pPr algn="l"/>
+            <a:r>
+              <a:rPr sz="2100" b="1" i="0">
+                <a:solidFill>
+                  <a:srgbClr val="0B5394"/>
+                </a:solidFill>
+                <a:latin typeface="Century Schoolbook"/>
+              </a:rPr>
+              <a:t>1.</a:t>
+            </a:r>
+          </a:p>
+        </p:txBody>
+      </p:sp>
+      <p:sp>
+        <p:nvSpPr>
+          <p:cNvPr id="10" name="TextBox 9"/>
+          <p:cNvSpPr txBox="1"/>
+          <p:nvPr/>
+        </p:nvSpPr>
+        <p:spPr>
+          <a:xfrm>
+            <a:off x="1554480" y="2011680"/>
+            <a:ext cx="9829800" cy="411480"/>
+          </a:xfrm>
+          <a:prstGeom prst="rect">
+            <a:avLst/>
+          </a:prstGeom>
+          <a:noFill/>
+        </p:spPr>
+        <p:txBody>
+          <a:bodyPr wrap="square" lIns="45720" rIns="45720" tIns="18288" bIns="18288" anchor="t">
+            <a:spAutoFit/>
+          </a:bodyPr>
+          <a:lstStyle/>
+          <a:p>
+            <a:pPr algn="l"/>
+            <a:r>
+              <a:rPr sz="2100" b="0" i="0">
+                <a:solidFill>
+                  <a:srgbClr val="1A1A1A"/>
+                </a:solidFill>
+                <a:latin typeface="Century Schoolbook"/>
+              </a:rPr>
+              <a:t>Six questions. Work down the page.</a:t>
+            </a:r>
+          </a:p>
+        </p:txBody>
+      </p:sp>
+      <p:sp>
+        <p:nvSpPr>
+          <p:cNvPr id="11" name="TextBox 10"/>
+          <p:cNvSpPr txBox="1"/>
+          <p:nvPr/>
+        </p:nvSpPr>
+        <p:spPr>
+          <a:xfrm>
+            <a:off x="960120" y="2551176"/>
+            <a:ext cx="548640" cy="356616"/>
+          </a:xfrm>
+          <a:prstGeom prst="rect">
+            <a:avLst/>
+          </a:prstGeom>
+          <a:noFill/>
+        </p:spPr>
+        <p:txBody>
+          <a:bodyPr wrap="square" lIns="45720" rIns="45720" tIns="18288" bIns="18288" anchor="t">
+            <a:spAutoFit/>
+          </a:bodyPr>
+          <a:lstStyle/>
+          <a:p>
+            <a:pPr algn="l"/>
+            <a:r>
+              <a:rPr sz="2100" b="1" i="0">
+                <a:solidFill>
+                  <a:srgbClr val="0B5394"/>
+                </a:solidFill>
+                <a:latin typeface="Century Schoolbook"/>
+              </a:rPr>
+              <a:t>2.</a:t>
+            </a:r>
+          </a:p>
+        </p:txBody>
+      </p:sp>
+      <p:sp>
+        <p:nvSpPr>
+          <p:cNvPr id="12" name="TextBox 11"/>
+          <p:cNvSpPr txBox="1"/>
+          <p:nvPr/>
+        </p:nvSpPr>
+        <p:spPr>
+          <a:xfrm>
+            <a:off x="1554480" y="2551176"/>
+            <a:ext cx="9829800" cy="411480"/>
+          </a:xfrm>
+          <a:prstGeom prst="rect">
+            <a:avLst/>
+          </a:prstGeom>
+          <a:noFill/>
+        </p:spPr>
+        <p:txBody>
+          <a:bodyPr wrap="square" lIns="45720" rIns="45720" tIns="18288" bIns="18288" anchor="t">
+            <a:spAutoFit/>
+          </a:bodyPr>
+          <a:lstStyle/>
+          <a:p>
+            <a:pPr algn="l"/>
+            <a:r>
+              <a:rPr sz="2100" b="0" i="0">
+                <a:solidFill>
+                  <a:srgbClr val="1A1A1A"/>
+                </a:solidFill>
+                <a:latin typeface="Century Schoolbook"/>
+              </a:rPr>
+              <a:t>Show the step that does the work, not just the answer.</a:t>
+            </a:r>
+          </a:p>
+        </p:txBody>
+      </p:sp>
+      <p:sp>
+        <p:nvSpPr>
+          <p:cNvPr id="13" name="TextBox 12"/>
+          <p:cNvSpPr txBox="1"/>
+          <p:nvPr/>
+        </p:nvSpPr>
+        <p:spPr>
+          <a:xfrm>
+            <a:off x="960120" y="3090672"/>
+            <a:ext cx="548640" cy="356616"/>
+          </a:xfrm>
+          <a:prstGeom prst="rect">
+            <a:avLst/>
+          </a:prstGeom>
+          <a:noFill/>
+        </p:spPr>
+        <p:txBody>
+          <a:bodyPr wrap="square" lIns="45720" rIns="45720" tIns="18288" bIns="18288" anchor="t">
+            <a:spAutoFit/>
+          </a:bodyPr>
+          <a:lstStyle/>
+          <a:p>
+            <a:pPr algn="l"/>
+            <a:r>
+              <a:rPr sz="2100" b="1" i="0">
+                <a:solidFill>
+                  <a:srgbClr val="0B5394"/>
+                </a:solidFill>
+                <a:latin typeface="Century Schoolbook"/>
+              </a:rPr>
+              <a:t>3.</a:t>
+            </a:r>
+          </a:p>
+        </p:txBody>
+      </p:sp>
+      <p:sp>
+        <p:nvSpPr>
+          <p:cNvPr id="14" name="TextBox 13"/>
+          <p:cNvSpPr txBox="1"/>
+          <p:nvPr/>
+        </p:nvSpPr>
+        <p:spPr>
+          <a:xfrm>
+            <a:off x="1554480" y="3090672"/>
+            <a:ext cx="9829800" cy="411480"/>
+          </a:xfrm>
+          <a:prstGeom prst="rect">
+            <a:avLst/>
+          </a:prstGeom>
+          <a:noFill/>
+        </p:spPr>
+        <p:txBody>
+          <a:bodyPr wrap="square" lIns="45720" rIns="45720" tIns="18288" bIns="18288" anchor="t">
+            <a:spAutoFit/>
+          </a:bodyPr>
+          <a:lstStyle/>
+          <a:p>
+            <a:pPr algn="l"/>
+            <a:r>
+              <a:rPr sz="2100" b="0" i="0">
+                <a:solidFill>
+                  <a:srgbClr val="1A1A1A"/>
+                </a:solidFill>
+                <a:latin typeface="Century Schoolbook"/>
+              </a:rPr>
+              <a:t>Silence until the six minutes are up.</a:t>
+            </a:r>
+          </a:p>
+        </p:txBody>
+      </p:sp>
+    </p:spTree>
+  </p:cSld>
+  <p:clrMapOvr>
+    <a:masterClrMapping/>
+  </p:clrMapOvr>
+</p:sld>
+</file>
+
+<file path=ppt/slides/slide34.xml><?xml version="1.0" encoding="utf-8"?>
+<p:sld xmlns:a="http://schemas.openxmlformats.org/drawingml/2006/main" xmlns:p="http://schemas.openxmlformats.org/presentationml/2006/main" xmlns:r="http://schemas.openxmlformats.org/officeDocument/2006/relationships">
+  <p:cSld>
+    <p:spTree>
+      <p:nvGrpSpPr>
+        <p:cNvPr id="1" name=""/>
+        <p:cNvGrpSpPr/>
+        <p:nvPr/>
+      </p:nvGrpSpPr>
+      <p:grpSpPr/>
+      <p:sp>
+        <p:nvSpPr>
+          <p:cNvPr id="2" name="TextBox 1"/>
+          <p:cNvSpPr txBox="1"/>
+          <p:nvPr/>
+        </p:nvSpPr>
+        <p:spPr>
+          <a:xfrm>
+            <a:off x="777240" y="365760"/>
+            <a:ext cx="10607040" cy="640080"/>
+          </a:xfrm>
+          <a:prstGeom prst="rect">
+            <a:avLst/>
+          </a:prstGeom>
+          <a:noFill/>
+        </p:spPr>
+        <p:txBody>
+          <a:bodyPr wrap="square" lIns="45720" rIns="45720" tIns="18288" bIns="18288" anchor="t">
+            <a:spAutoFit/>
+          </a:bodyPr>
+          <a:lstStyle/>
+          <a:p>
+            <a:pPr algn="l"/>
+            <a:r>
+              <a:rPr sz="3600" b="1" i="0">
+                <a:solidFill>
+                  <a:srgbClr val="1A1A1A"/>
+                </a:solidFill>
+                <a:latin typeface="Century Schoolbook"/>
+              </a:rPr>
+              <a:t>IXL</a:t>
+            </a:r>
+          </a:p>
+        </p:txBody>
+      </p:sp>
+      <p:cxnSp>
+        <p:nvCxnSpPr>
+          <p:cNvPr id="3" name="Connector 2"/>
+          <p:cNvCxnSpPr/>
+          <p:nvPr/>
+        </p:nvCxnSpPr>
+        <p:spPr>
+          <a:xfrm>
+            <a:off x="777240" y="1097280"/>
+            <a:ext cx="10607040" cy="0"/>
+          </a:xfrm>
+          <a:prstGeom prst="line">
+            <a:avLst/>
+          </a:prstGeom>
+          <a:ln w="19050">
+            <a:solidFill>
+              <a:srgbClr val="1A1A1A"/>
+            </a:solidFill>
+          </a:ln>
+        </p:spPr>
+        <p:style>
+          <a:lnRef idx="2">
+            <a:schemeClr val="accent1"/>
+          </a:lnRef>
+          <a:fillRef idx="0">
+            <a:schemeClr val="accent1"/>
+          </a:fillRef>
+          <a:effectRef idx="1">
+            <a:schemeClr val="accent1"/>
+          </a:effectRef>
+          <a:fontRef idx="minor">
+            <a:schemeClr val="tx1"/>
+          </a:fontRef>
+        </p:style>
+      </p:cxnSp>
+      <p:cxnSp>
+        <p:nvCxnSpPr>
+          <p:cNvPr id="4" name="Connector 3"/>
+          <p:cNvCxnSpPr/>
+          <p:nvPr/>
+        </p:nvCxnSpPr>
+        <p:spPr>
+          <a:xfrm>
+            <a:off x="777240" y="1179576"/>
+            <a:ext cx="10607040" cy="0"/>
+          </a:xfrm>
+          <a:prstGeom prst="line">
+            <a:avLst/>
+          </a:prstGeom>
+          <a:ln w="9525">
+            <a:solidFill>
+              <a:srgbClr val="1A1A1A"/>
+            </a:solidFill>
+          </a:ln>
+        </p:spPr>
+        <p:style>
+          <a:lnRef idx="2">
+            <a:schemeClr val="accent1"/>
+          </a:lnRef>
+          <a:fillRef idx="0">
+            <a:schemeClr val="accent1"/>
+          </a:fillRef>
+          <a:effectRef idx="1">
+            <a:schemeClr val="accent1"/>
+          </a:effectRef>
+          <a:fontRef idx="minor">
+            <a:schemeClr val="tx1"/>
+          </a:fontRef>
+        </p:style>
+      </p:cxnSp>
+      <p:sp>
+        <p:nvSpPr>
+          <p:cNvPr id="5" name="TextBox 4"/>
+          <p:cNvSpPr txBox="1"/>
+          <p:nvPr/>
+        </p:nvSpPr>
+        <p:spPr>
+          <a:xfrm>
+            <a:off x="777240" y="1261872"/>
+            <a:ext cx="10607040" cy="310896"/>
+          </a:xfrm>
+          <a:prstGeom prst="rect">
+            <a:avLst/>
+          </a:prstGeom>
+          <a:noFill/>
+        </p:spPr>
+        <p:txBody>
+          <a:bodyPr wrap="square" lIns="45720" rIns="45720" tIns="18288" bIns="18288" anchor="t">
+            <a:spAutoFit/>
+          </a:bodyPr>
+          <a:lstStyle/>
+          <a:p>
+            <a:pPr algn="l"/>
+            <a:r>
+              <a:rPr sz="1700" b="0" i="1">
+                <a:solidFill>
+                  <a:srgbClr val="6B6B6B"/>
+                </a:solidFill>
+                <a:latin typeface="Century Schoolbook"/>
+              </a:rPr>
+              <a:t>Last five minutes.</a:t>
+            </a:r>
+          </a:p>
+        </p:txBody>
+      </p:sp>
+      <p:cxnSp>
+        <p:nvCxnSpPr>
+          <p:cNvPr id="6" name="Connector 5"/>
+          <p:cNvCxnSpPr/>
+          <p:nvPr/>
+        </p:nvCxnSpPr>
+        <p:spPr>
+          <a:xfrm>
+            <a:off x="777240" y="6199632"/>
+            <a:ext cx="10607040" cy="0"/>
+          </a:xfrm>
+          <a:prstGeom prst="line">
+            <a:avLst/>
+          </a:prstGeom>
+          <a:ln w="9525">
+            <a:solidFill>
+              <a:srgbClr val="6B6B6B"/>
+            </a:solidFill>
+          </a:ln>
+        </p:spPr>
+        <p:style>
+          <a:lnRef idx="2">
+            <a:schemeClr val="accent1"/>
+          </a:lnRef>
+          <a:fillRef idx="0">
+            <a:schemeClr val="accent1"/>
+          </a:fillRef>
+          <a:effectRef idx="1">
+            <a:schemeClr val="accent1"/>
+          </a:effectRef>
+          <a:fontRef idx="minor">
+            <a:schemeClr val="tx1"/>
+          </a:fontRef>
+        </p:style>
+      </p:cxnSp>
+      <p:sp>
+        <p:nvSpPr>
+          <p:cNvPr id="7" name="TextBox 6"/>
+          <p:cNvSpPr txBox="1"/>
+          <p:nvPr/>
+        </p:nvSpPr>
+        <p:spPr>
+          <a:xfrm>
+            <a:off x="777240" y="6272784"/>
+            <a:ext cx="9692640" cy="274320"/>
+          </a:xfrm>
+          <a:prstGeom prst="rect">
+            <a:avLst/>
+          </a:prstGeom>
+          <a:noFill/>
+        </p:spPr>
+        <p:txBody>
+          <a:bodyPr wrap="square" lIns="45720" rIns="45720" tIns="18288" bIns="18288" anchor="t">
+            <a:spAutoFit/>
+          </a:bodyPr>
+          <a:lstStyle/>
+          <a:p>
+            <a:pPr algn="l"/>
+            <a:r>
+              <a:rPr sz="1100" b="0" i="1">
+                <a:solidFill>
+                  <a:srgbClr val="6B6B6B"/>
+                </a:solidFill>
+                <a:latin typeface="Century Schoolbook"/>
+              </a:rPr>
+              <a:t>Grade 7 Accelerated · Unit 3 · Lesson 2 — Quotient Laws of Exponents</a:t>
+            </a:r>
+          </a:p>
+        </p:txBody>
+      </p:sp>
+      <p:sp>
+        <p:nvSpPr>
+          <p:cNvPr id="8" name="TextBox 7"/>
+          <p:cNvSpPr txBox="1"/>
+          <p:nvPr/>
+        </p:nvSpPr>
+        <p:spPr>
+          <a:xfrm>
+            <a:off x="10744200" y="6272784"/>
+            <a:ext cx="640080" cy="274320"/>
+          </a:xfrm>
+          <a:prstGeom prst="rect">
+            <a:avLst/>
+          </a:prstGeom>
+          <a:noFill/>
+        </p:spPr>
+        <p:txBody>
+          <a:bodyPr wrap="square" lIns="45720" rIns="45720" tIns="18288" bIns="18288" anchor="t">
+            <a:spAutoFit/>
+          </a:bodyPr>
+          <a:lstStyle/>
+          <a:p>
+            <a:pPr algn="r"/>
+            <a:r>
+              <a:rPr sz="1100" b="0" i="0">
+                <a:solidFill>
+                  <a:srgbClr val="6B6B6B"/>
+                </a:solidFill>
+                <a:latin typeface="Century Schoolbook"/>
+              </a:rPr>
+              <a:t>34</a:t>
+            </a:r>
+          </a:p>
+        </p:txBody>
+      </p:sp>
+      <p:sp>
+        <p:nvSpPr>
+          <p:cNvPr id="9" name="TextBox 8"/>
+          <p:cNvSpPr txBox="1"/>
+          <p:nvPr/>
+        </p:nvSpPr>
+        <p:spPr>
+          <a:xfrm>
             <a:off x="960120" y="1828800"/>
             <a:ext cx="548640" cy="356616"/>
           </a:xfrm>
@@ -14681,7 +15589,7 @@
                 </a:solidFill>
                 <a:latin typeface="Century Schoolbook"/>
               </a:rPr>
-              <a:t>Stop at a SmartScore of 67 on each skill. Whatever you do not finish is tonight's practice.</a:t>
+              <a:t>Every skill listed is required, to a SmartScore of 67. Due at the start of the next class.</a:t>
             </a:r>
           </a:p>
         </p:txBody>
@@ -14716,7 +15624,7 @@
                 </a:solidFill>
                 <a:latin typeface="Century Schoolbook"/>
               </a:rPr>
-              <a:t>Today's skills</a:t>
+              <a:t>Today's skills — all required</a:t>
             </a:r>
           </a:p>
         </p:txBody>

--- a/a7/packages/A7 Unit 3 - Exponents and Scientific Notation/Slides/A7 3.02  Slides.pptx
+++ b/a7/packages/A7 Unit 3 - Exponents and Scientific Notation/Slides/A7 3.02  Slides.pptx
@@ -15694,7 +15694,7 @@
                 </a:solidFill>
                 <a:latin typeface="Century Schoolbook"/>
               </a:rPr>
-              <a:t>Optional: Division with exponents — XNC</a:t>
+              <a:t>Division with exponents — XNC</a:t>
             </a:r>
           </a:p>
         </p:txBody>
@@ -15729,7 +15729,7 @@
                 </a:solidFill>
                 <a:latin typeface="Century Schoolbook"/>
               </a:rPr>
-              <a:t>Optional: Identify equivalent expressions involving whole-number exponents — KBE</a:t>
+              <a:t>Identify equivalent expressions involving whole-number exponents — KBE</a:t>
             </a:r>
           </a:p>
         </p:txBody>

--- a/a7/packages/A7 Unit 3 - Exponents and Scientific Notation/Slides/A7 3.02  Slides.pptx
+++ b/a7/packages/A7 Unit 3 - Exponents and Scientific Notation/Slides/A7 3.02  Slides.pptx
@@ -3817,7 +3817,7 @@
       </p:sp>
       <p:pic>
         <p:nvPicPr>
-          <p:cNvPr id="9" name="Picture 8" descr="fbf374ea10315fc9.png"/>
+          <p:cNvPr id="9" name="Picture 8" descr="309fc1c6c87d6fce.png"/>
           <p:cNvPicPr>
             <a:picLocks noChangeAspect="1"/>
           </p:cNvPicPr>
@@ -3831,8 +3831,8 @@
         </p:blipFill>
         <p:spPr>
           <a:xfrm>
-            <a:off x="5916168" y="2194560"/>
-            <a:ext cx="329184" cy="765048"/>
+            <a:off x="5847588" y="2194560"/>
+            <a:ext cx="466344" cy="1021080"/>
           </a:xfrm>
           <a:prstGeom prst="rect">
             <a:avLst/>
@@ -3847,7 +3847,7 @@
         </p:nvSpPr>
         <p:spPr>
           <a:xfrm>
-            <a:off x="777240" y="3279648"/>
+            <a:off x="777240" y="3535680"/>
             <a:ext cx="10607040" cy="429370"/>
           </a:xfrm>
           <a:prstGeom prst="rect">
@@ -4201,7 +4201,7 @@
       </p:sp>
       <p:pic>
         <p:nvPicPr>
-          <p:cNvPr id="9" name="Picture 8" descr="dba29c9c870dd3f2.png"/>
+          <p:cNvPr id="9" name="Picture 8" descr="b43cc8ad2e0eadb2.png"/>
           <p:cNvPicPr>
             <a:picLocks noChangeAspect="1"/>
           </p:cNvPicPr>
@@ -4215,8 +4215,8 @@
         </p:blipFill>
         <p:spPr>
           <a:xfrm>
-            <a:off x="5637275" y="2103120"/>
-            <a:ext cx="886968" cy="524256"/>
+            <a:off x="5532120" y="2103120"/>
+            <a:ext cx="1097280" cy="688848"/>
           </a:xfrm>
           <a:prstGeom prst="rect">
             <a:avLst/>
@@ -4231,7 +4231,7 @@
         </p:nvSpPr>
         <p:spPr>
           <a:xfrm>
-            <a:off x="777240" y="3130296"/>
+            <a:off x="777240" y="3294888"/>
             <a:ext cx="10607040" cy="429370"/>
           </a:xfrm>
           <a:prstGeom prst="rect">
@@ -4523,7 +4523,7 @@
       </p:sp>
       <p:pic>
         <p:nvPicPr>
-          <p:cNvPr id="9" name="Picture 8" descr="510481b23c58f84f.png"/>
+          <p:cNvPr id="9" name="Picture 8" descr="b2abf76e10bb59cd.png"/>
           <p:cNvPicPr>
             <a:picLocks noChangeAspect="1"/>
           </p:cNvPicPr>
@@ -4538,7 +4538,7 @@
         <p:spPr>
           <a:xfrm>
             <a:off x="1828800" y="1920240"/>
-            <a:ext cx="3011424" cy="606552"/>
+            <a:ext cx="3761232" cy="813816"/>
           </a:xfrm>
           <a:prstGeom prst="rect">
             <a:avLst/>
@@ -4553,8 +4553,8 @@
         </p:nvSpPr>
         <p:spPr>
           <a:xfrm>
-            <a:off x="5297424" y="1994916"/>
-            <a:ext cx="6086856" cy="502920"/>
+            <a:off x="6047232" y="2098548"/>
+            <a:ext cx="5337047" cy="502920"/>
           </a:xfrm>
           <a:prstGeom prst="rect">
             <a:avLst/>
@@ -4582,7 +4582,7 @@
       </p:sp>
       <p:pic>
         <p:nvPicPr>
-          <p:cNvPr id="11" name="Picture 10" descr="f2b05189d9a75b7b.png"/>
+          <p:cNvPr id="11" name="Picture 10" descr="3f31fbcf3f4e439b.png"/>
           <p:cNvPicPr>
             <a:picLocks noChangeAspect="1"/>
           </p:cNvPicPr>
@@ -4596,8 +4596,8 @@
         </p:blipFill>
         <p:spPr>
           <a:xfrm>
-            <a:off x="1828800" y="2801112"/>
-            <a:ext cx="3148584" cy="524256"/>
+            <a:off x="1828800" y="3008376"/>
+            <a:ext cx="3483864" cy="691896"/>
           </a:xfrm>
           <a:prstGeom prst="rect">
             <a:avLst/>
@@ -4612,8 +4612,8 @@
         </p:nvSpPr>
         <p:spPr>
           <a:xfrm>
-            <a:off x="5434584" y="2834640"/>
-            <a:ext cx="5949695" cy="502920"/>
+            <a:off x="5769864" y="3125724"/>
+            <a:ext cx="5614415" cy="502920"/>
           </a:xfrm>
           <a:prstGeom prst="rect">
             <a:avLst/>
@@ -4673,7 +4673,7 @@
         </p:blipFill>
         <p:spPr>
           <a:xfrm>
-            <a:off x="1828800" y="3599688"/>
+            <a:off x="1828800" y="3974592"/>
             <a:ext cx="3444240" cy="411480"/>
           </a:xfrm>
           <a:prstGeom prst="rect">
@@ -4689,7 +4689,7 @@
         </p:nvSpPr>
         <p:spPr>
           <a:xfrm>
-            <a:off x="5730240" y="3576828"/>
+            <a:off x="5730240" y="3951731"/>
             <a:ext cx="5654039" cy="502920"/>
           </a:xfrm>
           <a:prstGeom prst="rect">
@@ -4724,7 +4724,7 @@
         </p:nvSpPr>
         <p:spPr>
           <a:xfrm>
-            <a:off x="777240" y="4572000"/>
+            <a:off x="777240" y="4843272"/>
             <a:ext cx="10607040" cy="548640"/>
           </a:xfrm>
           <a:prstGeom prst="rect">
@@ -5016,7 +5016,7 @@
       </p:sp>
       <p:pic>
         <p:nvPicPr>
-          <p:cNvPr id="9" name="Picture 8" descr="f1e17a107cd8b6c1.png"/>
+          <p:cNvPr id="9" name="Picture 8" descr="e60d4cb6647beeea.png"/>
           <p:cNvPicPr>
             <a:picLocks noChangeAspect="1"/>
           </p:cNvPicPr>
@@ -5030,8 +5030,8 @@
         </p:blipFill>
         <p:spPr>
           <a:xfrm>
-            <a:off x="5670804" y="2194560"/>
-            <a:ext cx="819912" cy="643128"/>
+            <a:off x="5597651" y="2194560"/>
+            <a:ext cx="966216" cy="853440"/>
           </a:xfrm>
           <a:prstGeom prst="rect">
             <a:avLst/>
@@ -5303,7 +5303,7 @@
       </p:sp>
       <p:pic>
         <p:nvPicPr>
-          <p:cNvPr id="9" name="Picture 8" descr="f1e17a107cd8b6c1.png"/>
+          <p:cNvPr id="9" name="Picture 8" descr="e60d4cb6647beeea.png"/>
           <p:cNvPicPr>
             <a:picLocks noChangeAspect="1"/>
           </p:cNvPicPr>
@@ -5317,8 +5317,8 @@
         </p:blipFill>
         <p:spPr>
           <a:xfrm>
-            <a:off x="5670804" y="2194560"/>
-            <a:ext cx="819912" cy="643128"/>
+            <a:off x="5597651" y="2194560"/>
+            <a:ext cx="966216" cy="853440"/>
           </a:xfrm>
           <a:prstGeom prst="rect">
             <a:avLst/>
@@ -5333,7 +5333,7 @@
         </p:nvSpPr>
         <p:spPr>
           <a:xfrm>
-            <a:off x="777240" y="3157728"/>
+            <a:off x="777240" y="3368040"/>
             <a:ext cx="10607040" cy="429370"/>
           </a:xfrm>
           <a:prstGeom prst="rect">
@@ -5368,7 +5368,7 @@
         </p:nvSpPr>
         <p:spPr>
           <a:xfrm>
-            <a:off x="4940808" y="4533900"/>
+            <a:off x="4864607" y="4639056"/>
             <a:ext cx="1920240" cy="548640"/>
           </a:xfrm>
           <a:prstGeom prst="rect">
@@ -5397,7 +5397,7 @@
       </p:sp>
       <p:pic>
         <p:nvPicPr>
-          <p:cNvPr id="12" name="Picture 11" descr="04234a344fb41871.png"/>
+          <p:cNvPr id="12" name="Picture 11" descr="78fdb0141a7d8d23.png"/>
           <p:cNvPicPr>
             <a:picLocks noChangeAspect="1"/>
           </p:cNvPicPr>
@@ -5411,8 +5411,8 @@
         </p:blipFill>
         <p:spPr>
           <a:xfrm>
-            <a:off x="6861048" y="4480560"/>
-            <a:ext cx="359664" cy="655320"/>
+            <a:off x="6784848" y="4480560"/>
+            <a:ext cx="512064" cy="865632"/>
           </a:xfrm>
           <a:prstGeom prst="rect">
             <a:avLst/>
@@ -5684,7 +5684,7 @@
       </p:sp>
       <p:pic>
         <p:nvPicPr>
-          <p:cNvPr id="9" name="Picture 8" descr="b55195a39995f5ed.png"/>
+          <p:cNvPr id="9" name="Picture 8" descr="858f7499cc3aa9e8.png"/>
           <p:cNvPicPr>
             <a:picLocks noChangeAspect="1"/>
           </p:cNvPicPr>
@@ -5698,8 +5698,8 @@
         </p:blipFill>
         <p:spPr>
           <a:xfrm>
-            <a:off x="5827776" y="2194560"/>
-            <a:ext cx="505968" cy="765048"/>
+            <a:off x="5721095" y="2194560"/>
+            <a:ext cx="719328" cy="1014984"/>
           </a:xfrm>
           <a:prstGeom prst="rect">
             <a:avLst/>
@@ -6041,7 +6041,7 @@
       </p:sp>
       <p:pic>
         <p:nvPicPr>
-          <p:cNvPr id="9" name="Picture 8" descr="b55195a39995f5ed.png"/>
+          <p:cNvPr id="9" name="Picture 8" descr="858f7499cc3aa9e8.png"/>
           <p:cNvPicPr>
             <a:picLocks noChangeAspect="1"/>
           </p:cNvPicPr>
@@ -6055,8 +6055,8 @@
         </p:blipFill>
         <p:spPr>
           <a:xfrm>
-            <a:off x="5827776" y="2103120"/>
-            <a:ext cx="505968" cy="765048"/>
+            <a:off x="5721095" y="2103120"/>
+            <a:ext cx="719328" cy="1014984"/>
           </a:xfrm>
           <a:prstGeom prst="rect">
             <a:avLst/>
@@ -6071,7 +6071,7 @@
         </p:nvSpPr>
         <p:spPr>
           <a:xfrm>
-            <a:off x="1828800" y="3142488"/>
+            <a:off x="1828800" y="3392424"/>
             <a:ext cx="8503920" cy="548640"/>
           </a:xfrm>
           <a:prstGeom prst="rect">
@@ -6428,8 +6428,8 @@
         </p:nvSpPr>
         <p:spPr>
           <a:xfrm>
-            <a:off x="1625092" y="2171700"/>
-            <a:ext cx="3129280" cy="457200"/>
+            <a:off x="2330736" y="2171700"/>
+            <a:ext cx="2826883" cy="457200"/>
           </a:xfrm>
           <a:prstGeom prst="rect">
             <a:avLst/>
@@ -6438,7 +6438,7 @@
         </p:spPr>
         <p:txBody>
           <a:bodyPr wrap="none" lIns="45720" rIns="45720" tIns="18288" bIns="18288" anchor="ctr">
-            <a:spAutoFit/>
+            <a:noAutofit/>
           </a:bodyPr>
           <a:lstStyle/>
           <a:p>
@@ -6471,7 +6471,7 @@
         </p:blipFill>
         <p:spPr>
           <a:xfrm>
-            <a:off x="4617212" y="2228088"/>
+            <a:off x="5020459" y="2228088"/>
             <a:ext cx="323088" cy="344424"/>
           </a:xfrm>
           <a:prstGeom prst="rect">
@@ -6487,8 +6487,8 @@
         </p:nvSpPr>
         <p:spPr>
           <a:xfrm>
-            <a:off x="4940300" y="2171700"/>
-            <a:ext cx="2270760" cy="457200"/>
+            <a:off x="5343547" y="2171700"/>
+            <a:ext cx="1682087" cy="457200"/>
           </a:xfrm>
           <a:prstGeom prst="rect">
             <a:avLst/>
@@ -6497,7 +6497,7 @@
         </p:spPr>
         <p:txBody>
           <a:bodyPr wrap="none" lIns="45720" rIns="45720" tIns="18288" bIns="18288" anchor="ctr">
-            <a:spAutoFit/>
+            <a:noAutofit/>
           </a:bodyPr>
           <a:lstStyle/>
           <a:p>
@@ -6530,7 +6530,7 @@
         </p:blipFill>
         <p:spPr>
           <a:xfrm>
-            <a:off x="7073900" y="2228088"/>
+            <a:off x="6888474" y="2228088"/>
             <a:ext cx="298704" cy="344424"/>
           </a:xfrm>
           <a:prstGeom prst="rect">
@@ -6546,8 +6546,8 @@
         </p:nvSpPr>
         <p:spPr>
           <a:xfrm>
-            <a:off x="7372604" y="2171700"/>
-            <a:ext cx="3300984" cy="457200"/>
+            <a:off x="7187178" y="2171700"/>
+            <a:ext cx="2780765" cy="457200"/>
           </a:xfrm>
           <a:prstGeom prst="rect">
             <a:avLst/>
@@ -6556,7 +6556,7 @@
         </p:spPr>
         <p:txBody>
           <a:bodyPr wrap="none" lIns="45720" rIns="45720" tIns="18288" bIns="18288" anchor="ctr">
-            <a:spAutoFit/>
+            <a:noAutofit/>
           </a:bodyPr>
           <a:lstStyle/>
           <a:p>
@@ -6984,8 +6984,8 @@
         </p:nvSpPr>
         <p:spPr>
           <a:xfrm>
-            <a:off x="1625092" y="2080260"/>
-            <a:ext cx="3129280" cy="457200"/>
+            <a:off x="2330736" y="2080260"/>
+            <a:ext cx="2826883" cy="457200"/>
           </a:xfrm>
           <a:prstGeom prst="rect">
             <a:avLst/>
@@ -6994,7 +6994,7 @@
         </p:spPr>
         <p:txBody>
           <a:bodyPr wrap="none" lIns="45720" rIns="45720" tIns="18288" bIns="18288" anchor="ctr">
-            <a:spAutoFit/>
+            <a:noAutofit/>
           </a:bodyPr>
           <a:lstStyle/>
           <a:p>
@@ -7027,7 +7027,7 @@
         </p:blipFill>
         <p:spPr>
           <a:xfrm>
-            <a:off x="4617212" y="2136648"/>
+            <a:off x="5020459" y="2136648"/>
             <a:ext cx="323088" cy="344424"/>
           </a:xfrm>
           <a:prstGeom prst="rect">
@@ -7043,8 +7043,8 @@
         </p:nvSpPr>
         <p:spPr>
           <a:xfrm>
-            <a:off x="4940300" y="2080260"/>
-            <a:ext cx="2270760" cy="457200"/>
+            <a:off x="5343547" y="2080260"/>
+            <a:ext cx="1682087" cy="457200"/>
           </a:xfrm>
           <a:prstGeom prst="rect">
             <a:avLst/>
@@ -7053,7 +7053,7 @@
         </p:spPr>
         <p:txBody>
           <a:bodyPr wrap="none" lIns="45720" rIns="45720" tIns="18288" bIns="18288" anchor="ctr">
-            <a:spAutoFit/>
+            <a:noAutofit/>
           </a:bodyPr>
           <a:lstStyle/>
           <a:p>
@@ -7086,7 +7086,7 @@
         </p:blipFill>
         <p:spPr>
           <a:xfrm>
-            <a:off x="7073900" y="2136648"/>
+            <a:off x="6888474" y="2136648"/>
             <a:ext cx="298704" cy="344424"/>
           </a:xfrm>
           <a:prstGeom prst="rect">
@@ -7102,8 +7102,8 @@
         </p:nvSpPr>
         <p:spPr>
           <a:xfrm>
-            <a:off x="7372604" y="2080260"/>
-            <a:ext cx="3300984" cy="457200"/>
+            <a:off x="7187178" y="2080260"/>
+            <a:ext cx="2780765" cy="457200"/>
           </a:xfrm>
           <a:prstGeom prst="rect">
             <a:avLst/>
@@ -7112,7 +7112,7 @@
         </p:spPr>
         <p:txBody>
           <a:bodyPr wrap="none" lIns="45720" rIns="45720" tIns="18288" bIns="18288" anchor="ctr">
-            <a:spAutoFit/>
+            <a:noAutofit/>
           </a:bodyPr>
           <a:lstStyle/>
           <a:p>
@@ -7579,7 +7579,7 @@
       </p:sp>
       <p:pic>
         <p:nvPicPr>
-          <p:cNvPr id="9" name="Picture 8" descr="816c40e48004bbd3.png"/>
+          <p:cNvPr id="9" name="Picture 8" descr="1252d608a87976a6.png"/>
           <p:cNvPicPr>
             <a:picLocks noChangeAspect="1"/>
           </p:cNvPicPr>
@@ -7593,8 +7593,8 @@
         </p:blipFill>
         <p:spPr>
           <a:xfrm>
-            <a:off x="5676900" y="2194560"/>
-            <a:ext cx="807720" cy="886968"/>
+            <a:off x="5504688" y="2194560"/>
+            <a:ext cx="1152144" cy="1197864"/>
           </a:xfrm>
           <a:prstGeom prst="rect">
             <a:avLst/>
@@ -7943,7 +7943,7 @@
         <p:spPr>
           <a:xfrm>
             <a:off x="1874519" y="1760220"/>
-            <a:ext cx="4159504" cy="457200"/>
+            <a:ext cx="3698600" cy="457200"/>
           </a:xfrm>
           <a:prstGeom prst="rect">
             <a:avLst/>
@@ -7952,7 +7952,7 @@
         </p:spPr>
         <p:txBody>
           <a:bodyPr wrap="none" lIns="45720" rIns="45720" tIns="18288" bIns="18288" anchor="ctr">
-            <a:spAutoFit/>
+            <a:noAutofit/>
           </a:bodyPr>
           <a:lstStyle/>
           <a:p>
@@ -7985,7 +7985,7 @@
         </p:blipFill>
         <p:spPr>
           <a:xfrm>
-            <a:off x="5896864" y="1848611"/>
+            <a:off x="5435960" y="1848611"/>
             <a:ext cx="746760" cy="280416"/>
           </a:xfrm>
           <a:prstGeom prst="rect">
@@ -8002,7 +8002,7 @@
         <p:spPr>
           <a:xfrm>
             <a:off x="1874519" y="2372868"/>
-            <a:ext cx="969771" cy="457200"/>
+            <a:ext cx="726811" cy="457200"/>
           </a:xfrm>
           <a:prstGeom prst="rect">
             <a:avLst/>
@@ -8011,7 +8011,7 @@
         </p:spPr>
         <p:txBody>
           <a:bodyPr wrap="none" lIns="45720" rIns="45720" tIns="18288" bIns="18288" anchor="ctr">
-            <a:spAutoFit/>
+            <a:noAutofit/>
           </a:bodyPr>
           <a:lstStyle/>
           <a:p>
@@ -8044,7 +8044,7 @@
         </p:blipFill>
         <p:spPr>
           <a:xfrm>
-            <a:off x="2707132" y="2397252"/>
+            <a:off x="2464171" y="2397252"/>
             <a:ext cx="914400" cy="408432"/>
           </a:xfrm>
           <a:prstGeom prst="rect">
@@ -8061,7 +8061,7 @@
         <p:spPr>
           <a:xfrm>
             <a:off x="1874519" y="2985516"/>
-            <a:ext cx="2033015" cy="457200"/>
+            <a:ext cx="1652008" cy="457200"/>
           </a:xfrm>
           <a:prstGeom prst="rect">
             <a:avLst/>
@@ -8070,7 +8070,7 @@
         </p:spPr>
         <p:txBody>
           <a:bodyPr wrap="none" lIns="45720" rIns="45720" tIns="18288" bIns="18288" anchor="ctr">
-            <a:spAutoFit/>
+            <a:noAutofit/>
           </a:bodyPr>
           <a:lstStyle/>
           <a:p>
@@ -8103,7 +8103,7 @@
         </p:blipFill>
         <p:spPr>
           <a:xfrm>
-            <a:off x="3770375" y="3093720"/>
+            <a:off x="3389368" y="3093720"/>
             <a:ext cx="1405128" cy="240791"/>
           </a:xfrm>
           <a:prstGeom prst="rect">
@@ -8119,8 +8119,8 @@
         </p:nvSpPr>
         <p:spPr>
           <a:xfrm>
-            <a:off x="1874519" y="3607308"/>
-            <a:ext cx="2488692" cy="457200"/>
+            <a:off x="1874519" y="3677412"/>
+            <a:ext cx="2099724" cy="457200"/>
           </a:xfrm>
           <a:prstGeom prst="rect">
             <a:avLst/>
@@ -8129,7 +8129,7 @@
         </p:spPr>
         <p:txBody>
           <a:bodyPr wrap="none" lIns="45720" rIns="45720" tIns="18288" bIns="18288" anchor="ctr">
-            <a:spAutoFit/>
+            <a:noAutofit/>
           </a:bodyPr>
           <a:lstStyle/>
           <a:p>
@@ -8148,7 +8148,7 @@
       </p:sp>
       <p:pic>
         <p:nvPicPr>
-          <p:cNvPr id="16" name="Picture 15" descr="05d454f83d6cc4c8.png"/>
+          <p:cNvPr id="16" name="Picture 15" descr="18ea63a1522c269c.png"/>
           <p:cNvPicPr>
             <a:picLocks noChangeAspect="1"/>
           </p:cNvPicPr>
@@ -8162,8 +8162,8 @@
         </p:blipFill>
         <p:spPr>
           <a:xfrm>
-            <a:off x="4226051" y="3621024"/>
-            <a:ext cx="618744" cy="429768"/>
+            <a:off x="3837084" y="3621024"/>
+            <a:ext cx="880872" cy="569976"/>
           </a:xfrm>
           <a:prstGeom prst="rect">
             <a:avLst/>
@@ -8435,7 +8435,7 @@
       </p:sp>
       <p:pic>
         <p:nvPicPr>
-          <p:cNvPr id="9" name="Picture 8" descr="816c40e48004bbd3.png"/>
+          <p:cNvPr id="9" name="Picture 8" descr="1252d608a87976a6.png"/>
           <p:cNvPicPr>
             <a:picLocks noChangeAspect="1"/>
           </p:cNvPicPr>
@@ -8449,8 +8449,8 @@
         </p:blipFill>
         <p:spPr>
           <a:xfrm>
-            <a:off x="5676900" y="2103120"/>
-            <a:ext cx="807720" cy="886968"/>
+            <a:off x="5504688" y="2103120"/>
+            <a:ext cx="1152144" cy="1197864"/>
           </a:xfrm>
           <a:prstGeom prst="rect">
             <a:avLst/>
@@ -8465,7 +8465,7 @@
         </p:nvSpPr>
         <p:spPr>
           <a:xfrm>
-            <a:off x="1828800" y="3264407"/>
+            <a:off x="1828800" y="3575303"/>
             <a:ext cx="8503920" cy="548640"/>
           </a:xfrm>
           <a:prstGeom prst="rect">
@@ -8801,7 +8801,7 @@
       </p:sp>
       <p:pic>
         <p:nvPicPr>
-          <p:cNvPr id="9" name="Picture 8" descr="0fbed3cfbfe873f1.png"/>
+          <p:cNvPr id="9" name="Picture 8" descr="615f3e719211e489.png"/>
           <p:cNvPicPr>
             <a:picLocks noChangeAspect="1"/>
           </p:cNvPicPr>
@@ -8815,8 +8815,8 @@
         </p:blipFill>
         <p:spPr>
           <a:xfrm>
-            <a:off x="5542787" y="2194560"/>
-            <a:ext cx="1075944" cy="658368"/>
+            <a:off x="5414771" y="2194560"/>
+            <a:ext cx="1331976" cy="871728"/>
           </a:xfrm>
           <a:prstGeom prst="rect">
             <a:avLst/>
@@ -9158,7 +9158,7 @@
       </p:sp>
       <p:pic>
         <p:nvPicPr>
-          <p:cNvPr id="9" name="Picture 8" descr="0fbed3cfbfe873f1.png"/>
+          <p:cNvPr id="9" name="Picture 8" descr="615f3e719211e489.png"/>
           <p:cNvPicPr>
             <a:picLocks noChangeAspect="1"/>
           </p:cNvPicPr>
@@ -9172,8 +9172,8 @@
         </p:blipFill>
         <p:spPr>
           <a:xfrm>
-            <a:off x="5542787" y="2103120"/>
-            <a:ext cx="1075944" cy="658368"/>
+            <a:off x="5414771" y="2103120"/>
+            <a:ext cx="1331976" cy="871728"/>
           </a:xfrm>
           <a:prstGeom prst="rect">
             <a:avLst/>
@@ -9188,7 +9188,7 @@
         </p:nvSpPr>
         <p:spPr>
           <a:xfrm>
-            <a:off x="1828800" y="3035807"/>
+            <a:off x="1828800" y="3249167"/>
             <a:ext cx="8503920" cy="548640"/>
           </a:xfrm>
           <a:prstGeom prst="rect">
@@ -9223,7 +9223,7 @@
         </p:nvSpPr>
         <p:spPr>
           <a:xfrm>
-            <a:off x="4716780" y="4794504"/>
+            <a:off x="4544568" y="4933188"/>
             <a:ext cx="1920240" cy="548640"/>
           </a:xfrm>
           <a:prstGeom prst="rect">
@@ -9252,7 +9252,7 @@
       </p:sp>
       <p:pic>
         <p:nvPicPr>
-          <p:cNvPr id="12" name="Picture 11" descr="8c39e005e4d06ba4.png"/>
+          <p:cNvPr id="12" name="Picture 11" descr="a55647924d788565.png"/>
           <p:cNvPicPr>
             <a:picLocks noChangeAspect="1"/>
           </p:cNvPicPr>
@@ -9266,8 +9266,8 @@
         </p:blipFill>
         <p:spPr>
           <a:xfrm>
-            <a:off x="6637020" y="4663440"/>
-            <a:ext cx="807720" cy="810768"/>
+            <a:off x="6464808" y="4663440"/>
+            <a:ext cx="1152144" cy="1088136"/>
           </a:xfrm>
           <a:prstGeom prst="rect">
             <a:avLst/>
@@ -10605,7 +10605,7 @@
       </p:sp>
       <p:pic>
         <p:nvPicPr>
-          <p:cNvPr id="9" name="Picture 8" descr="634c4efb1266f5d6.png"/>
+          <p:cNvPr id="9" name="Picture 8" descr="ad177fa159bf9adb.png"/>
           <p:cNvPicPr>
             <a:picLocks noChangeAspect="1"/>
           </p:cNvPicPr>
@@ -10619,8 +10619,8 @@
         </p:blipFill>
         <p:spPr>
           <a:xfrm>
-            <a:off x="5916168" y="2194560"/>
-            <a:ext cx="329184" cy="752856"/>
+            <a:off x="5847588" y="2194560"/>
+            <a:ext cx="466344" cy="1002792"/>
           </a:xfrm>
           <a:prstGeom prst="rect">
             <a:avLst/>
@@ -10635,7 +10635,7 @@
         </p:nvSpPr>
         <p:spPr>
           <a:xfrm>
-            <a:off x="777240" y="3176016"/>
+            <a:off x="777240" y="3425952"/>
             <a:ext cx="10607040" cy="465151"/>
           </a:xfrm>
           <a:prstGeom prst="rect">
@@ -10670,7 +10670,7 @@
         </p:nvSpPr>
         <p:spPr>
           <a:xfrm>
-            <a:off x="1874519" y="3842335"/>
+            <a:off x="1874519" y="4092271"/>
             <a:ext cx="4572000" cy="548640"/>
           </a:xfrm>
           <a:prstGeom prst="rect">
@@ -10723,7 +10723,7 @@
         </p:nvSpPr>
         <p:spPr>
           <a:xfrm>
-            <a:off x="6629400" y="3842335"/>
+            <a:off x="6629400" y="4092271"/>
             <a:ext cx="4572000" cy="548640"/>
           </a:xfrm>
           <a:prstGeom prst="rect">
@@ -10776,7 +10776,7 @@
         </p:nvSpPr>
         <p:spPr>
           <a:xfrm>
-            <a:off x="1874519" y="4528135"/>
+            <a:off x="1874519" y="4778071"/>
             <a:ext cx="4572000" cy="548640"/>
           </a:xfrm>
           <a:prstGeom prst="rect">
@@ -10829,7 +10829,7 @@
         </p:nvSpPr>
         <p:spPr>
           <a:xfrm>
-            <a:off x="6629400" y="4528135"/>
+            <a:off x="6629400" y="4778071"/>
             <a:ext cx="4572000" cy="548640"/>
           </a:xfrm>
           <a:prstGeom prst="rect">
@@ -10882,7 +10882,7 @@
         </p:nvSpPr>
         <p:spPr>
           <a:xfrm>
-            <a:off x="777240" y="5533975"/>
+            <a:off x="777240" y="5687568"/>
             <a:ext cx="10607040" cy="457200"/>
           </a:xfrm>
           <a:prstGeom prst="rect">
@@ -11174,7 +11174,7 @@
       </p:sp>
       <p:pic>
         <p:nvPicPr>
-          <p:cNvPr id="9" name="Picture 8" descr="634c4efb1266f5d6.png"/>
+          <p:cNvPr id="9" name="Picture 8" descr="ad177fa159bf9adb.png"/>
           <p:cNvPicPr>
             <a:picLocks noChangeAspect="1"/>
           </p:cNvPicPr>
@@ -11188,8 +11188,8 @@
         </p:blipFill>
         <p:spPr>
           <a:xfrm>
-            <a:off x="5916168" y="2103120"/>
-            <a:ext cx="329184" cy="752856"/>
+            <a:off x="5847588" y="2103120"/>
+            <a:ext cx="466344" cy="1002792"/>
           </a:xfrm>
           <a:prstGeom prst="rect">
             <a:avLst/>
@@ -11204,7 +11204,7 @@
         </p:nvSpPr>
         <p:spPr>
           <a:xfrm>
-            <a:off x="777240" y="3084575"/>
+            <a:off x="777240" y="3334512"/>
             <a:ext cx="10607040" cy="465151"/>
           </a:xfrm>
           <a:prstGeom prst="rect">
@@ -11239,7 +11239,7 @@
         </p:nvSpPr>
         <p:spPr>
           <a:xfrm>
-            <a:off x="1874519" y="3750895"/>
+            <a:off x="1874519" y="4000831"/>
             <a:ext cx="4572000" cy="548640"/>
           </a:xfrm>
           <a:prstGeom prst="rect">
@@ -11292,7 +11292,7 @@
         </p:nvSpPr>
         <p:spPr>
           <a:xfrm>
-            <a:off x="6629400" y="3750895"/>
+            <a:off x="6629400" y="4000831"/>
             <a:ext cx="4572000" cy="548640"/>
           </a:xfrm>
           <a:prstGeom prst="rect">
@@ -11345,7 +11345,7 @@
         </p:nvSpPr>
         <p:spPr>
           <a:xfrm>
-            <a:off x="1874519" y="4436695"/>
+            <a:off x="1874519" y="4686631"/>
             <a:ext cx="4572000" cy="548640"/>
           </a:xfrm>
           <a:prstGeom prst="rect">
@@ -11398,7 +11398,7 @@
         </p:nvSpPr>
         <p:spPr>
           <a:xfrm>
-            <a:off x="6629400" y="4436695"/>
+            <a:off x="6629400" y="4686631"/>
             <a:ext cx="4572000" cy="548640"/>
           </a:xfrm>
           <a:prstGeom prst="rect">
@@ -11451,7 +11451,7 @@
         </p:nvSpPr>
         <p:spPr>
           <a:xfrm>
-            <a:off x="777240" y="5442535"/>
+            <a:off x="777240" y="5632704"/>
             <a:ext cx="10607040" cy="548640"/>
           </a:xfrm>
           <a:prstGeom prst="rect">
@@ -11752,7 +11752,7 @@
       </p:sp>
       <p:pic>
         <p:nvPicPr>
-          <p:cNvPr id="9" name="Picture 8" descr="4813f5720ac562e8.png"/>
+          <p:cNvPr id="9" name="Picture 8" descr="7fd8a7336ddfafc1.png"/>
           <p:cNvPicPr>
             <a:picLocks noChangeAspect="1"/>
           </p:cNvPicPr>
@@ -11766,8 +11766,8 @@
         </p:blipFill>
         <p:spPr>
           <a:xfrm>
-            <a:off x="5783579" y="2194560"/>
-            <a:ext cx="594360" cy="768096"/>
+            <a:off x="5657088" y="2194560"/>
+            <a:ext cx="847344" cy="1021080"/>
           </a:xfrm>
           <a:prstGeom prst="rect">
             <a:avLst/>
@@ -12109,7 +12109,7 @@
       </p:sp>
       <p:pic>
         <p:nvPicPr>
-          <p:cNvPr id="9" name="Picture 8" descr="4813f5720ac562e8.png"/>
+          <p:cNvPr id="9" name="Picture 8" descr="7fd8a7336ddfafc1.png"/>
           <p:cNvPicPr>
             <a:picLocks noChangeAspect="1"/>
           </p:cNvPicPr>
@@ -12123,8 +12123,8 @@
         </p:blipFill>
         <p:spPr>
           <a:xfrm>
-            <a:off x="5783579" y="2103120"/>
-            <a:ext cx="594360" cy="768096"/>
+            <a:off x="5657088" y="2103120"/>
+            <a:ext cx="847344" cy="1021080"/>
           </a:xfrm>
           <a:prstGeom prst="rect">
             <a:avLst/>
@@ -12139,7 +12139,7 @@
         </p:nvSpPr>
         <p:spPr>
           <a:xfrm>
-            <a:off x="1828800" y="3145535"/>
+            <a:off x="1828800" y="3398519"/>
             <a:ext cx="8503920" cy="548640"/>
           </a:xfrm>
           <a:prstGeom prst="rect">
@@ -12475,7 +12475,7 @@
       </p:sp>
       <p:pic>
         <p:nvPicPr>
-          <p:cNvPr id="9" name="Picture 8" descr="643aab6f036f1c61.png"/>
+          <p:cNvPr id="9" name="Picture 8" descr="41e42a07b25976eb.png"/>
           <p:cNvPicPr>
             <a:picLocks noChangeAspect="1"/>
           </p:cNvPicPr>
@@ -12489,8 +12489,8 @@
         </p:blipFill>
         <p:spPr>
           <a:xfrm>
-            <a:off x="5573268" y="2194560"/>
-            <a:ext cx="1014984" cy="652272"/>
+            <a:off x="5460491" y="2194560"/>
+            <a:ext cx="1240536" cy="859536"/>
           </a:xfrm>
           <a:prstGeom prst="rect">
             <a:avLst/>
@@ -12839,7 +12839,7 @@
         <p:spPr>
           <a:xfrm>
             <a:off x="1874519" y="1760220"/>
-            <a:ext cx="4159504" cy="457200"/>
+            <a:ext cx="3698600" cy="457200"/>
           </a:xfrm>
           <a:prstGeom prst="rect">
             <a:avLst/>
@@ -12848,7 +12848,7 @@
         </p:spPr>
         <p:txBody>
           <a:bodyPr wrap="none" lIns="45720" rIns="45720" tIns="18288" bIns="18288" anchor="ctr">
-            <a:spAutoFit/>
+            <a:noAutofit/>
           </a:bodyPr>
           <a:lstStyle/>
           <a:p>
@@ -12881,7 +12881,7 @@
         </p:blipFill>
         <p:spPr>
           <a:xfrm>
-            <a:off x="5896864" y="1848611"/>
+            <a:off x="5435960" y="1848611"/>
             <a:ext cx="746760" cy="280416"/>
           </a:xfrm>
           <a:prstGeom prst="rect">
@@ -12905,7 +12905,7 @@
         </p:blipFill>
         <p:spPr>
           <a:xfrm>
-            <a:off x="7192263" y="1848611"/>
+            <a:off x="6731360" y="1848611"/>
             <a:ext cx="259080" cy="280416"/>
           </a:xfrm>
           <a:prstGeom prst="rect">
@@ -12922,7 +12922,7 @@
         <p:spPr>
           <a:xfrm>
             <a:off x="1874519" y="2372868"/>
-            <a:ext cx="969771" cy="457200"/>
+            <a:ext cx="726811" cy="457200"/>
           </a:xfrm>
           <a:prstGeom prst="rect">
             <a:avLst/>
@@ -12931,7 +12931,7 @@
         </p:spPr>
         <p:txBody>
           <a:bodyPr wrap="none" lIns="45720" rIns="45720" tIns="18288" bIns="18288" anchor="ctr">
-            <a:spAutoFit/>
+            <a:noAutofit/>
           </a:bodyPr>
           <a:lstStyle/>
           <a:p>
@@ -12964,7 +12964,7 @@
         </p:blipFill>
         <p:spPr>
           <a:xfrm>
-            <a:off x="2707132" y="2397252"/>
+            <a:off x="2464171" y="2397252"/>
             <a:ext cx="914400" cy="408432"/>
           </a:xfrm>
           <a:prstGeom prst="rect">
@@ -12980,8 +12980,8 @@
         </p:nvSpPr>
         <p:spPr>
           <a:xfrm>
-            <a:off x="4170171" y="2372868"/>
-            <a:ext cx="549148" cy="457200"/>
+            <a:off x="3927211" y="2372868"/>
+            <a:ext cx="575679" cy="457200"/>
           </a:xfrm>
           <a:prstGeom prst="rect">
             <a:avLst/>
@@ -12990,7 +12990,7 @@
         </p:spPr>
         <p:txBody>
           <a:bodyPr wrap="none" lIns="45720" rIns="45720" tIns="18288" bIns="18288" anchor="ctr">
-            <a:spAutoFit/>
+            <a:noAutofit/>
           </a:bodyPr>
           <a:lstStyle/>
           <a:p>
@@ -13016,7 +13016,7 @@
         <p:spPr>
           <a:xfrm>
             <a:off x="1874519" y="2985516"/>
-            <a:ext cx="2033015" cy="457200"/>
+            <a:ext cx="1652008" cy="457200"/>
           </a:xfrm>
           <a:prstGeom prst="rect">
             <a:avLst/>
@@ -13025,7 +13025,7 @@
         </p:spPr>
         <p:txBody>
           <a:bodyPr wrap="none" lIns="45720" rIns="45720" tIns="18288" bIns="18288" anchor="ctr">
-            <a:spAutoFit/>
+            <a:noAutofit/>
           </a:bodyPr>
           <a:lstStyle/>
           <a:p>
@@ -13058,7 +13058,7 @@
         </p:blipFill>
         <p:spPr>
           <a:xfrm>
-            <a:off x="3770375" y="3093720"/>
+            <a:off x="3389368" y="3093720"/>
             <a:ext cx="1405128" cy="240791"/>
           </a:xfrm>
           <a:prstGeom prst="rect">
@@ -13074,8 +13074,8 @@
         </p:nvSpPr>
         <p:spPr>
           <a:xfrm>
-            <a:off x="5724144" y="2985516"/>
-            <a:ext cx="1057402" cy="457200"/>
+            <a:off x="5343136" y="2985516"/>
+            <a:ext cx="942623" cy="457200"/>
           </a:xfrm>
           <a:prstGeom prst="rect">
             <a:avLst/>
@@ -13084,7 +13084,7 @@
         </p:spPr>
         <p:txBody>
           <a:bodyPr wrap="none" lIns="45720" rIns="45720" tIns="18288" bIns="18288" anchor="ctr">
-            <a:spAutoFit/>
+            <a:noAutofit/>
           </a:bodyPr>
           <a:lstStyle/>
           <a:p>
@@ -13109,8 +13109,8 @@
         </p:nvSpPr>
         <p:spPr>
           <a:xfrm>
-            <a:off x="1874519" y="3607308"/>
-            <a:ext cx="2488692" cy="457200"/>
+            <a:off x="1874519" y="3677412"/>
+            <a:ext cx="2099724" cy="457200"/>
           </a:xfrm>
           <a:prstGeom prst="rect">
             <a:avLst/>
@@ -13119,7 +13119,7 @@
         </p:spPr>
         <p:txBody>
           <a:bodyPr wrap="none" lIns="45720" rIns="45720" tIns="18288" bIns="18288" anchor="ctr">
-            <a:spAutoFit/>
+            <a:noAutofit/>
           </a:bodyPr>
           <a:lstStyle/>
           <a:p>
@@ -13138,7 +13138,7 @@
       </p:sp>
       <p:pic>
         <p:nvPicPr>
-          <p:cNvPr id="19" name="Picture 18" descr="05d454f83d6cc4c8.png"/>
+          <p:cNvPr id="19" name="Picture 18" descr="18ea63a1522c269c.png"/>
           <p:cNvPicPr>
             <a:picLocks noChangeAspect="1"/>
           </p:cNvPicPr>
@@ -13152,8 +13152,8 @@
         </p:blipFill>
         <p:spPr>
           <a:xfrm>
-            <a:off x="4226051" y="3621024"/>
-            <a:ext cx="618744" cy="429768"/>
+            <a:off x="3837084" y="3621024"/>
+            <a:ext cx="880872" cy="569976"/>
           </a:xfrm>
           <a:prstGeom prst="rect">
             <a:avLst/>
@@ -13168,8 +13168,8 @@
         </p:nvSpPr>
         <p:spPr>
           <a:xfrm>
-            <a:off x="5393436" y="3598164"/>
-            <a:ext cx="379729" cy="457200"/>
+            <a:off x="5266596" y="3598164"/>
+            <a:ext cx="388052" cy="457200"/>
           </a:xfrm>
           <a:prstGeom prst="rect">
             <a:avLst/>
@@ -13178,7 +13178,7 @@
         </p:spPr>
         <p:txBody>
           <a:bodyPr wrap="none" lIns="45720" rIns="45720" tIns="18288" bIns="18288" anchor="ctr">
-            <a:spAutoFit/>
+            <a:noAutofit/>
           </a:bodyPr>
           <a:lstStyle/>
           <a:p>
@@ -13460,7 +13460,7 @@
       </p:sp>
       <p:pic>
         <p:nvPicPr>
-          <p:cNvPr id="9" name="Picture 8" descr="643aab6f036f1c61.png"/>
+          <p:cNvPr id="9" name="Picture 8" descr="41e42a07b25976eb.png"/>
           <p:cNvPicPr>
             <a:picLocks noChangeAspect="1"/>
           </p:cNvPicPr>
@@ -13474,8 +13474,8 @@
         </p:blipFill>
         <p:spPr>
           <a:xfrm>
-            <a:off x="5573268" y="2103120"/>
-            <a:ext cx="1014984" cy="652272"/>
+            <a:off x="5460491" y="2103120"/>
+            <a:ext cx="1240536" cy="859536"/>
           </a:xfrm>
           <a:prstGeom prst="rect">
             <a:avLst/>
@@ -13490,7 +13490,7 @@
         </p:nvSpPr>
         <p:spPr>
           <a:xfrm>
-            <a:off x="1828800" y="3029711"/>
+            <a:off x="1828800" y="3236975"/>
             <a:ext cx="8503920" cy="548640"/>
           </a:xfrm>
           <a:prstGeom prst="rect">
@@ -13823,8 +13823,8 @@
         </p:nvSpPr>
         <p:spPr>
           <a:xfrm>
-            <a:off x="940815" y="2264664"/>
-            <a:ext cx="3129280" cy="457200"/>
+            <a:off x="1146338" y="2366772"/>
+            <a:ext cx="3088445" cy="457200"/>
           </a:xfrm>
           <a:prstGeom prst="rect">
             <a:avLst/>
@@ -13833,7 +13833,7 @@
         </p:spPr>
         <p:txBody>
           <a:bodyPr wrap="none" lIns="45720" rIns="45720" tIns="18288" bIns="18288" anchor="ctr">
-            <a:spAutoFit/>
+            <a:noAutofit/>
           </a:bodyPr>
           <a:lstStyle/>
           <a:p>
@@ -13852,7 +13852,7 @@
       </p:sp>
       <p:pic>
         <p:nvPicPr>
-          <p:cNvPr id="10" name="Picture 9" descr="72a47e68e9719c90.png"/>
+          <p:cNvPr id="10" name="Picture 9" descr="62ec99fb62ba2937.png"/>
           <p:cNvPicPr>
             <a:picLocks noChangeAspect="1"/>
           </p:cNvPicPr>
@@ -13866,8 +13866,8 @@
         </p:blipFill>
         <p:spPr>
           <a:xfrm>
-            <a:off x="3932936" y="2194560"/>
-            <a:ext cx="1453896" cy="597408"/>
+            <a:off x="4097624" y="2194560"/>
+            <a:ext cx="1627632" cy="801624"/>
           </a:xfrm>
           <a:prstGeom prst="rect">
             <a:avLst/>
@@ -13882,8 +13882,8 @@
         </p:nvSpPr>
         <p:spPr>
           <a:xfrm>
-            <a:off x="5386832" y="2264664"/>
-            <a:ext cx="4674616" cy="457200"/>
+            <a:off x="5725256" y="2366772"/>
+            <a:ext cx="4095361" cy="457200"/>
           </a:xfrm>
           <a:prstGeom prst="rect">
             <a:avLst/>
@@ -13892,7 +13892,7 @@
         </p:spPr>
         <p:txBody>
           <a:bodyPr wrap="none" lIns="45720" rIns="45720" tIns="18288" bIns="18288" anchor="ctr">
-            <a:spAutoFit/>
+            <a:noAutofit/>
           </a:bodyPr>
           <a:lstStyle/>
           <a:p>
@@ -13911,7 +13911,7 @@
       </p:sp>
       <p:pic>
         <p:nvPicPr>
-          <p:cNvPr id="12" name="Picture 11" descr="940ad82cc09b11ca.png"/>
+          <p:cNvPr id="12" name="Picture 11" descr="814e799b3c3f0420.png"/>
           <p:cNvPicPr>
             <a:picLocks noChangeAspect="1"/>
           </p:cNvPicPr>
@@ -13925,8 +13925,8 @@
         </p:blipFill>
         <p:spPr>
           <a:xfrm>
-            <a:off x="9924288" y="2194560"/>
-            <a:ext cx="1051560" cy="597408"/>
+            <a:off x="9683457" y="2194560"/>
+            <a:ext cx="1161288" cy="801624"/>
           </a:xfrm>
           <a:prstGeom prst="rect">
             <a:avLst/>
@@ -13941,8 +13941,8 @@
         </p:nvSpPr>
         <p:spPr>
           <a:xfrm>
-            <a:off x="10975848" y="2264664"/>
-            <a:ext cx="382016" cy="457200"/>
+            <a:off x="10844745" y="2366772"/>
+            <a:ext cx="307595" cy="457200"/>
           </a:xfrm>
           <a:prstGeom prst="rect">
             <a:avLst/>
@@ -13951,7 +13951,7 @@
         </p:spPr>
         <p:txBody>
           <a:bodyPr wrap="none" lIns="45720" rIns="45720" tIns="18288" bIns="18288" anchor="ctr">
-            <a:spAutoFit/>
+            <a:noAutofit/>
           </a:bodyPr>
           <a:lstStyle/>
           <a:p>
@@ -13976,7 +13976,7 @@
         </p:nvSpPr>
         <p:spPr>
           <a:xfrm>
-            <a:off x="777240" y="3066287"/>
+            <a:off x="777240" y="3270503"/>
             <a:ext cx="10607040" cy="465151"/>
           </a:xfrm>
           <a:prstGeom prst="rect">
@@ -14362,8 +14362,8 @@
         </p:nvSpPr>
         <p:spPr>
           <a:xfrm>
-            <a:off x="940815" y="2173224"/>
-            <a:ext cx="3129280" cy="457200"/>
+            <a:off x="1146338" y="2275332"/>
+            <a:ext cx="3088445" cy="457200"/>
           </a:xfrm>
           <a:prstGeom prst="rect">
             <a:avLst/>
@@ -14372,7 +14372,7 @@
         </p:spPr>
         <p:txBody>
           <a:bodyPr wrap="none" lIns="45720" rIns="45720" tIns="18288" bIns="18288" anchor="ctr">
-            <a:spAutoFit/>
+            <a:noAutofit/>
           </a:bodyPr>
           <a:lstStyle/>
           <a:p>
@@ -14391,7 +14391,7 @@
       </p:sp>
       <p:pic>
         <p:nvPicPr>
-          <p:cNvPr id="10" name="Picture 9" descr="72a47e68e9719c90.png"/>
+          <p:cNvPr id="10" name="Picture 9" descr="62ec99fb62ba2937.png"/>
           <p:cNvPicPr>
             <a:picLocks noChangeAspect="1"/>
           </p:cNvPicPr>
@@ -14405,8 +14405,8 @@
         </p:blipFill>
         <p:spPr>
           <a:xfrm>
-            <a:off x="3932936" y="2103120"/>
-            <a:ext cx="1453896" cy="597408"/>
+            <a:off x="4097624" y="2103120"/>
+            <a:ext cx="1627632" cy="801624"/>
           </a:xfrm>
           <a:prstGeom prst="rect">
             <a:avLst/>
@@ -14421,8 +14421,8 @@
         </p:nvSpPr>
         <p:spPr>
           <a:xfrm>
-            <a:off x="5386832" y="2173224"/>
-            <a:ext cx="4674616" cy="457200"/>
+            <a:off x="5725256" y="2275332"/>
+            <a:ext cx="4095361" cy="457200"/>
           </a:xfrm>
           <a:prstGeom prst="rect">
             <a:avLst/>
@@ -14431,7 +14431,7 @@
         </p:spPr>
         <p:txBody>
           <a:bodyPr wrap="none" lIns="45720" rIns="45720" tIns="18288" bIns="18288" anchor="ctr">
-            <a:spAutoFit/>
+            <a:noAutofit/>
           </a:bodyPr>
           <a:lstStyle/>
           <a:p>
@@ -14450,7 +14450,7 @@
       </p:sp>
       <p:pic>
         <p:nvPicPr>
-          <p:cNvPr id="12" name="Picture 11" descr="940ad82cc09b11ca.png"/>
+          <p:cNvPr id="12" name="Picture 11" descr="814e799b3c3f0420.png"/>
           <p:cNvPicPr>
             <a:picLocks noChangeAspect="1"/>
           </p:cNvPicPr>
@@ -14464,8 +14464,8 @@
         </p:blipFill>
         <p:spPr>
           <a:xfrm>
-            <a:off x="9924288" y="2103120"/>
-            <a:ext cx="1051560" cy="597408"/>
+            <a:off x="9683457" y="2103120"/>
+            <a:ext cx="1161288" cy="801624"/>
           </a:xfrm>
           <a:prstGeom prst="rect">
             <a:avLst/>
@@ -14480,8 +14480,8 @@
         </p:nvSpPr>
         <p:spPr>
           <a:xfrm>
-            <a:off x="10975848" y="2173224"/>
-            <a:ext cx="382016" cy="457200"/>
+            <a:off x="10844745" y="2275332"/>
+            <a:ext cx="307595" cy="457200"/>
           </a:xfrm>
           <a:prstGeom prst="rect">
             <a:avLst/>
@@ -14490,7 +14490,7 @@
         </p:spPr>
         <p:txBody>
           <a:bodyPr wrap="none" lIns="45720" rIns="45720" tIns="18288" bIns="18288" anchor="ctr">
-            <a:spAutoFit/>
+            <a:noAutofit/>
           </a:bodyPr>
           <a:lstStyle/>
           <a:p>
@@ -14515,7 +14515,7 @@
         </p:nvSpPr>
         <p:spPr>
           <a:xfrm>
-            <a:off x="777240" y="2974847"/>
+            <a:off x="777240" y="3179064"/>
             <a:ext cx="10607040" cy="465151"/>
           </a:xfrm>
           <a:prstGeom prst="rect">
@@ -14550,7 +14550,7 @@
         </p:nvSpPr>
         <p:spPr>
           <a:xfrm>
-            <a:off x="1828800" y="3595447"/>
+            <a:off x="1828800" y="3799663"/>
             <a:ext cx="8503920" cy="548640"/>
           </a:xfrm>
           <a:prstGeom prst="rect">
@@ -16069,7 +16069,7 @@
       </p:cxnSp>
       <p:pic>
         <p:nvPicPr>
-          <p:cNvPr id="11" name="Picture 10" descr="adbd5a264bd05025.png"/>
+          <p:cNvPr id="11" name="Picture 10" descr="2af4721831e6626f.png"/>
           <p:cNvPicPr>
             <a:picLocks noChangeAspect="1"/>
           </p:cNvPicPr>
@@ -16083,8 +16083,8 @@
         </p:blipFill>
         <p:spPr>
           <a:xfrm>
-            <a:off x="3765804" y="2340864"/>
-            <a:ext cx="4629912" cy="603504"/>
+            <a:off x="3352800" y="2340864"/>
+            <a:ext cx="5455920" cy="813816"/>
           </a:xfrm>
           <a:prstGeom prst="rect">
             <a:avLst/>
@@ -16099,8 +16099,8 @@
         </p:nvSpPr>
         <p:spPr>
           <a:xfrm>
-            <a:off x="987552" y="3290316"/>
-            <a:ext cx="3768089" cy="457200"/>
+            <a:off x="987552" y="3581400"/>
+            <a:ext cx="3534479" cy="457200"/>
           </a:xfrm>
           <a:prstGeom prst="rect">
             <a:avLst/>
@@ -16109,7 +16109,7 @@
         </p:spPr>
         <p:txBody>
           <a:bodyPr wrap="none" lIns="45720" rIns="45720" tIns="18288" bIns="18288" anchor="ctr">
-            <a:spAutoFit/>
+            <a:noAutofit/>
           </a:bodyPr>
           <a:lstStyle/>
           <a:p>
@@ -16128,7 +16128,7 @@
       </p:sp>
       <p:pic>
         <p:nvPicPr>
-          <p:cNvPr id="13" name="Picture 12" descr="6199fc84ad6bb947.png"/>
+          <p:cNvPr id="13" name="Picture 12" descr="c7bc6a26eec98598.png"/>
           <p:cNvPicPr>
             <a:picLocks noChangeAspect="1"/>
           </p:cNvPicPr>
@@ -16142,8 +16142,8 @@
         </p:blipFill>
         <p:spPr>
           <a:xfrm>
-            <a:off x="4618482" y="3264408"/>
-            <a:ext cx="1612392" cy="509016"/>
+            <a:off x="4384871" y="3474720"/>
+            <a:ext cx="1746504" cy="670560"/>
           </a:xfrm>
           <a:prstGeom prst="rect">
             <a:avLst/>
@@ -16158,8 +16158,8 @@
         </p:nvSpPr>
         <p:spPr>
           <a:xfrm>
-            <a:off x="6230874" y="3290316"/>
-            <a:ext cx="887983" cy="457200"/>
+            <a:off x="6131375" y="3581400"/>
+            <a:ext cx="597344" cy="457200"/>
           </a:xfrm>
           <a:prstGeom prst="rect">
             <a:avLst/>
@@ -16168,7 +16168,7 @@
         </p:spPr>
         <p:txBody>
           <a:bodyPr wrap="none" lIns="45720" rIns="45720" tIns="18288" bIns="18288" anchor="ctr">
-            <a:spAutoFit/>
+            <a:noAutofit/>
           </a:bodyPr>
           <a:lstStyle/>
           <a:p>
@@ -16201,7 +16201,7 @@
         </p:blipFill>
         <p:spPr>
           <a:xfrm>
-            <a:off x="6981698" y="3349752"/>
+            <a:off x="6591559" y="3640836"/>
             <a:ext cx="786384" cy="338328"/>
           </a:xfrm>
           <a:prstGeom prst="rect">
@@ -16217,8 +16217,8 @@
         </p:nvSpPr>
         <p:spPr>
           <a:xfrm>
-            <a:off x="7768082" y="3290316"/>
-            <a:ext cx="379729" cy="457200"/>
+            <a:off x="7377943" y="3581400"/>
+            <a:ext cx="330733" cy="457200"/>
           </a:xfrm>
           <a:prstGeom prst="rect">
             <a:avLst/>
@@ -16227,7 +16227,7 @@
         </p:spPr>
         <p:txBody>
           <a:bodyPr wrap="none" lIns="45720" rIns="45720" tIns="18288" bIns="18288" anchor="ctr">
-            <a:spAutoFit/>
+            <a:noAutofit/>
           </a:bodyPr>
           <a:lstStyle/>
           <a:p>
@@ -16252,8 +16252,8 @@
         </p:nvSpPr>
         <p:spPr>
           <a:xfrm>
-            <a:off x="987552" y="4102607"/>
-            <a:ext cx="3248152" cy="457200"/>
+            <a:off x="987552" y="4579620"/>
+            <a:ext cx="3088445" cy="457200"/>
           </a:xfrm>
           <a:prstGeom prst="rect">
             <a:avLst/>
@@ -16262,7 +16262,7 @@
         </p:spPr>
         <p:txBody>
           <a:bodyPr wrap="none" lIns="45720" rIns="45720" tIns="18288" bIns="18288" anchor="ctr">
-            <a:spAutoFit/>
+            <a:noAutofit/>
           </a:bodyPr>
           <a:lstStyle/>
           <a:p>
@@ -16281,7 +16281,7 @@
       </p:sp>
       <p:pic>
         <p:nvPicPr>
-          <p:cNvPr id="18" name="Picture 17" descr="3dc1c73e651199d0.png"/>
+          <p:cNvPr id="18" name="Picture 17" descr="3eb7fb5dc9071c18.png"/>
           <p:cNvPicPr>
             <a:picLocks noChangeAspect="1"/>
           </p:cNvPicPr>
@@ -16295,8 +16295,8 @@
         </p:blipFill>
         <p:spPr>
           <a:xfrm>
-            <a:off x="4098544" y="4029455"/>
-            <a:ext cx="3203448" cy="603504"/>
+            <a:off x="3938837" y="4401312"/>
+            <a:ext cx="3617976" cy="813816"/>
           </a:xfrm>
           <a:prstGeom prst="rect">
             <a:avLst/>
@@ -16603,7 +16603,7 @@
       </p:cxnSp>
       <p:pic>
         <p:nvPicPr>
-          <p:cNvPr id="10" name="Picture 9" descr="d4cff797e1564f9c.png"/>
+          <p:cNvPr id="10" name="Picture 9" descr="def758e4f359f543.png"/>
           <p:cNvPicPr>
             <a:picLocks noChangeAspect="1"/>
           </p:cNvPicPr>
@@ -16617,8 +16617,8 @@
         </p:blipFill>
         <p:spPr>
           <a:xfrm>
-            <a:off x="3511296" y="2340864"/>
-            <a:ext cx="5138928" cy="603504"/>
+            <a:off x="2900172" y="2340864"/>
+            <a:ext cx="6361176" cy="813816"/>
           </a:xfrm>
           <a:prstGeom prst="rect">
             <a:avLst/>
@@ -16633,8 +16633,8 @@
         </p:nvSpPr>
         <p:spPr>
           <a:xfrm>
-            <a:off x="987552" y="3293364"/>
-            <a:ext cx="3937508" cy="457200"/>
+            <a:off x="987552" y="3587496"/>
+            <a:ext cx="3613463" cy="457200"/>
           </a:xfrm>
           <a:prstGeom prst="rect">
             <a:avLst/>
@@ -16643,7 +16643,7 @@
         </p:spPr>
         <p:txBody>
           <a:bodyPr wrap="none" lIns="45720" rIns="45720" tIns="18288" bIns="18288" anchor="ctr">
-            <a:spAutoFit/>
+            <a:noAutofit/>
           </a:bodyPr>
           <a:lstStyle/>
           <a:p>
@@ -16662,7 +16662,7 @@
       </p:sp>
       <p:pic>
         <p:nvPicPr>
-          <p:cNvPr id="12" name="Picture 11" descr="c7d38784274c8869.png"/>
+          <p:cNvPr id="12" name="Picture 11" descr="5b18a1628e69d3d2.png"/>
           <p:cNvPicPr>
             <a:picLocks noChangeAspect="1"/>
           </p:cNvPicPr>
@@ -16676,8 +16676,8 @@
         </p:blipFill>
         <p:spPr>
           <a:xfrm>
-            <a:off x="4787900" y="3264408"/>
-            <a:ext cx="1450848" cy="515112"/>
+            <a:off x="4463855" y="3474720"/>
+            <a:ext cx="1700784" cy="682752"/>
           </a:xfrm>
           <a:prstGeom prst="rect">
             <a:avLst/>
@@ -16692,8 +16692,8 @@
         </p:nvSpPr>
         <p:spPr>
           <a:xfrm>
-            <a:off x="6238748" y="3293364"/>
-            <a:ext cx="887983" cy="457200"/>
+            <a:off x="6164639" y="3587496"/>
+            <a:ext cx="597344" cy="457200"/>
           </a:xfrm>
           <a:prstGeom prst="rect">
             <a:avLst/>
@@ -16702,7 +16702,7 @@
         </p:spPr>
         <p:txBody>
           <a:bodyPr wrap="none" lIns="45720" rIns="45720" tIns="18288" bIns="18288" anchor="ctr">
-            <a:spAutoFit/>
+            <a:noAutofit/>
           </a:bodyPr>
           <a:lstStyle/>
           <a:p>
@@ -16735,7 +16735,7 @@
         </p:blipFill>
         <p:spPr>
           <a:xfrm>
-            <a:off x="6989571" y="3351276"/>
+            <a:off x="6624824" y="3645407"/>
             <a:ext cx="783336" cy="341376"/>
           </a:xfrm>
           <a:prstGeom prst="rect">
@@ -16751,8 +16751,8 @@
         </p:nvSpPr>
         <p:spPr>
           <a:xfrm>
-            <a:off x="7772908" y="3293364"/>
-            <a:ext cx="379729" cy="457200"/>
+            <a:off x="7408160" y="3587496"/>
+            <a:ext cx="330733" cy="457200"/>
           </a:xfrm>
           <a:prstGeom prst="rect">
             <a:avLst/>
@@ -16761,7 +16761,7 @@
         </p:spPr>
         <p:txBody>
           <a:bodyPr wrap="none" lIns="45720" rIns="45720" tIns="18288" bIns="18288" anchor="ctr">
-            <a:spAutoFit/>
+            <a:noAutofit/>
           </a:bodyPr>
           <a:lstStyle/>
           <a:p>
@@ -16786,8 +16786,8 @@
         </p:nvSpPr>
         <p:spPr>
           <a:xfrm>
-            <a:off x="987552" y="4108704"/>
-            <a:ext cx="2184908" cy="457200"/>
+            <a:off x="987552" y="4591812"/>
+            <a:ext cx="2033729" cy="457200"/>
           </a:xfrm>
           <a:prstGeom prst="rect">
             <a:avLst/>
@@ -16796,7 +16796,7 @@
         </p:spPr>
         <p:txBody>
           <a:bodyPr wrap="none" lIns="45720" rIns="45720" tIns="18288" bIns="18288" anchor="ctr">
-            <a:spAutoFit/>
+            <a:noAutofit/>
           </a:bodyPr>
           <a:lstStyle/>
           <a:p>
@@ -16815,7 +16815,7 @@
       </p:sp>
       <p:pic>
         <p:nvPicPr>
-          <p:cNvPr id="17" name="Picture 16" descr="917d6015434a0004.png"/>
+          <p:cNvPr id="17" name="Picture 16" descr="5adfb841038764d7.png"/>
           <p:cNvPicPr>
             <a:picLocks noChangeAspect="1"/>
           </p:cNvPicPr>
@@ -16829,8 +16829,8 @@
         </p:blipFill>
         <p:spPr>
           <a:xfrm>
-            <a:off x="3035300" y="4035552"/>
-            <a:ext cx="2767584" cy="603504"/>
+            <a:off x="2884121" y="4413504"/>
+            <a:ext cx="3185160" cy="813816"/>
           </a:xfrm>
           <a:prstGeom prst="rect">
             <a:avLst/>
@@ -16845,8 +16845,8 @@
         </p:nvSpPr>
         <p:spPr>
           <a:xfrm>
-            <a:off x="5802884" y="4108704"/>
-            <a:ext cx="1577340" cy="457200"/>
+            <a:off x="6069281" y="4591812"/>
+            <a:ext cx="1265922" cy="457200"/>
           </a:xfrm>
           <a:prstGeom prst="rect">
             <a:avLst/>
@@ -16855,7 +16855,7 @@
         </p:spPr>
         <p:txBody>
           <a:bodyPr wrap="none" lIns="45720" rIns="45720" tIns="18288" bIns="18288" anchor="ctr">
-            <a:spAutoFit/>
+            <a:noAutofit/>
           </a:bodyPr>
           <a:lstStyle/>
           <a:p>
@@ -16888,7 +16888,7 @@
         </p:blipFill>
         <p:spPr>
           <a:xfrm>
-            <a:off x="7243064" y="4131564"/>
+            <a:off x="7198043" y="4614672"/>
             <a:ext cx="2228088" cy="411480"/>
           </a:xfrm>
           <a:prstGeom prst="rect">
@@ -17744,7 +17744,7 @@
       </p:graphicFrame>
       <p:pic>
         <p:nvPicPr>
-          <p:cNvPr id="11" name="Picture 10" descr="72a47e68e9719c90.png"/>
+          <p:cNvPr id="11" name="Picture 10" descr="62ec99fb62ba2937.png"/>
           <p:cNvPicPr>
             <a:picLocks noChangeAspect="1"/>
           </p:cNvPicPr>
@@ -17758,8 +17758,8 @@
         </p:blipFill>
         <p:spPr>
           <a:xfrm>
-            <a:off x="1213611" y="3337560"/>
-            <a:ext cx="1453896" cy="597408"/>
+            <a:off x="1920933" y="3337560"/>
+            <a:ext cx="1627632" cy="801624"/>
           </a:xfrm>
           <a:prstGeom prst="rect">
             <a:avLst/>
@@ -17774,8 +17774,8 @@
         </p:nvSpPr>
         <p:spPr>
           <a:xfrm>
-            <a:off x="2667507" y="3407664"/>
-            <a:ext cx="2785872" cy="457200"/>
+            <a:off x="3548565" y="3509772"/>
+            <a:ext cx="1987138" cy="457200"/>
           </a:xfrm>
           <a:prstGeom prst="rect">
             <a:avLst/>
@@ -17784,7 +17784,7 @@
         </p:spPr>
         <p:txBody>
           <a:bodyPr wrap="none" lIns="45720" rIns="45720" tIns="18288" bIns="18288" anchor="ctr">
-            <a:spAutoFit/>
+            <a:noAutofit/>
           </a:bodyPr>
           <a:lstStyle/>
           <a:p>
@@ -17803,7 +17803,7 @@
       </p:sp>
       <p:pic>
         <p:nvPicPr>
-          <p:cNvPr id="13" name="Picture 12" descr="7b9bcc028b601237.png"/>
+          <p:cNvPr id="13" name="Picture 12" descr="77ba2923b3d33308.png"/>
           <p:cNvPicPr>
             <a:picLocks noChangeAspect="1"/>
           </p:cNvPicPr>
@@ -17817,8 +17817,8 @@
         </p:blipFill>
         <p:spPr>
           <a:xfrm>
-            <a:off x="5316219" y="3337560"/>
-            <a:ext cx="2237232" cy="597408"/>
+            <a:off x="5398543" y="3337560"/>
+            <a:ext cx="2346960" cy="801624"/>
           </a:xfrm>
           <a:prstGeom prst="rect">
             <a:avLst/>
@@ -17833,8 +17833,8 @@
         </p:nvSpPr>
         <p:spPr>
           <a:xfrm>
-            <a:off x="7553452" y="3407664"/>
-            <a:ext cx="2614168" cy="457200"/>
+            <a:off x="7745503" y="3509772"/>
+            <a:ext cx="1714795" cy="457200"/>
           </a:xfrm>
           <a:prstGeom prst="rect">
             <a:avLst/>
@@ -17843,7 +17843,7 @@
         </p:spPr>
         <p:txBody>
           <a:bodyPr wrap="none" lIns="45720" rIns="45720" tIns="18288" bIns="18288" anchor="ctr">
-            <a:spAutoFit/>
+            <a:noAutofit/>
           </a:bodyPr>
           <a:lstStyle/>
           <a:p>
@@ -17876,7 +17876,7 @@
         </p:blipFill>
         <p:spPr>
           <a:xfrm>
-            <a:off x="10030460" y="3467100"/>
+            <a:off x="9323138" y="3569208"/>
             <a:ext cx="917448" cy="338328"/>
           </a:xfrm>
           <a:prstGeom prst="rect">
@@ -17892,8 +17892,8 @@
         </p:nvSpPr>
         <p:spPr>
           <a:xfrm>
-            <a:off x="987552" y="4232147"/>
-            <a:ext cx="2921000" cy="457200"/>
+            <a:off x="987552" y="4436363"/>
+            <a:ext cx="2787443" cy="457200"/>
           </a:xfrm>
           <a:prstGeom prst="rect">
             <a:avLst/>
@@ -17902,7 +17902,7 @@
         </p:spPr>
         <p:txBody>
           <a:bodyPr wrap="none" lIns="45720" rIns="45720" tIns="18288" bIns="18288" anchor="ctr">
-            <a:spAutoFit/>
+            <a:noAutofit/>
           </a:bodyPr>
           <a:lstStyle/>
           <a:p>
@@ -17935,7 +17935,7 @@
         </p:blipFill>
         <p:spPr>
           <a:xfrm>
-            <a:off x="3771392" y="4290059"/>
+            <a:off x="3637835" y="4494275"/>
             <a:ext cx="938784" cy="341376"/>
           </a:xfrm>
           <a:prstGeom prst="rect">
@@ -17951,8 +17951,8 @@
         </p:nvSpPr>
         <p:spPr>
           <a:xfrm>
-            <a:off x="4710176" y="4232147"/>
-            <a:ext cx="3768089" cy="457200"/>
+            <a:off x="4576619" y="4436363"/>
+            <a:ext cx="3406485" cy="457200"/>
           </a:xfrm>
           <a:prstGeom prst="rect">
             <a:avLst/>
@@ -17961,7 +17961,7 @@
         </p:spPr>
         <p:txBody>
           <a:bodyPr wrap="none" lIns="45720" rIns="45720" tIns="18288" bIns="18288" anchor="ctr">
-            <a:spAutoFit/>
+            <a:noAutofit/>
           </a:bodyPr>
           <a:lstStyle/>
           <a:p>
@@ -17994,7 +17994,7 @@
         </p:blipFill>
         <p:spPr>
           <a:xfrm>
-            <a:off x="8341105" y="4369307"/>
+            <a:off x="7845944" y="4573523"/>
             <a:ext cx="188976" cy="182880"/>
           </a:xfrm>
           <a:prstGeom prst="rect">
@@ -18267,7 +18267,7 @@
       </p:sp>
       <p:pic>
         <p:nvPicPr>
-          <p:cNvPr id="9" name="Picture 8" descr="e21ffa4c9a5cf35c.png"/>
+          <p:cNvPr id="9" name="Picture 8" descr="66659ac1f0ea0461.png"/>
           <p:cNvPicPr>
             <a:picLocks noChangeAspect="1"/>
           </p:cNvPicPr>
@@ -18281,8 +18281,8 @@
         </p:blipFill>
         <p:spPr>
           <a:xfrm>
-            <a:off x="5756148" y="2103120"/>
-            <a:ext cx="649224" cy="701040"/>
+            <a:off x="5618988" y="2103120"/>
+            <a:ext cx="923544" cy="947928"/>
           </a:xfrm>
           <a:prstGeom prst="rect">
             <a:avLst/>
@@ -18297,7 +18297,7 @@
         </p:nvSpPr>
         <p:spPr>
           <a:xfrm>
-            <a:off x="777240" y="3307080"/>
+            <a:off x="777240" y="3553968"/>
             <a:ext cx="10607040" cy="429370"/>
           </a:xfrm>
           <a:prstGeom prst="rect">
@@ -18589,7 +18589,7 @@
       </p:sp>
       <p:pic>
         <p:nvPicPr>
-          <p:cNvPr id="9" name="Picture 8" descr="32684f3bd49925d9.png"/>
+          <p:cNvPr id="9" name="Picture 8" descr="b92fe29e305c868b.png"/>
           <p:cNvPicPr>
             <a:picLocks noChangeAspect="1"/>
           </p:cNvPicPr>
@@ -18604,7 +18604,7 @@
         <p:spPr>
           <a:xfrm>
             <a:off x="1828800" y="1920240"/>
-            <a:ext cx="3706368" cy="701040"/>
+            <a:ext cx="3983736" cy="947928"/>
           </a:xfrm>
           <a:prstGeom prst="rect">
             <a:avLst/>
@@ -18619,8 +18619,8 @@
         </p:nvSpPr>
         <p:spPr>
           <a:xfrm>
-            <a:off x="5992368" y="2042160"/>
-            <a:ext cx="5391911" cy="502920"/>
+            <a:off x="6269736" y="2165604"/>
+            <a:ext cx="5114544" cy="502920"/>
           </a:xfrm>
           <a:prstGeom prst="rect">
             <a:avLst/>
@@ -18662,7 +18662,7 @@
         </p:blipFill>
         <p:spPr>
           <a:xfrm>
-            <a:off x="1828800" y="2895600"/>
+            <a:off x="1828800" y="3142488"/>
             <a:ext cx="1755648" cy="411480"/>
           </a:xfrm>
           <a:prstGeom prst="rect">
@@ -18678,7 +18678,7 @@
         </p:nvSpPr>
         <p:spPr>
           <a:xfrm>
-            <a:off x="4041648" y="2872740"/>
+            <a:off x="4041648" y="3119628"/>
             <a:ext cx="6400800" cy="502920"/>
           </a:xfrm>
           <a:prstGeom prst="rect">
@@ -18721,7 +18721,7 @@
         </p:blipFill>
         <p:spPr>
           <a:xfrm>
-            <a:off x="1828800" y="3581400"/>
+            <a:off x="1828800" y="3828288"/>
             <a:ext cx="2350008" cy="353568"/>
           </a:xfrm>
           <a:prstGeom prst="rect">
@@ -18737,7 +18737,7 @@
         </p:nvSpPr>
         <p:spPr>
           <a:xfrm>
-            <a:off x="4636008" y="3529584"/>
+            <a:off x="4636008" y="3776472"/>
             <a:ext cx="6400800" cy="502920"/>
           </a:xfrm>
           <a:prstGeom prst="rect">
@@ -18772,7 +18772,7 @@
         </p:nvSpPr>
         <p:spPr>
           <a:xfrm>
-            <a:off x="777240" y="4572000"/>
+            <a:off x="777240" y="4639056"/>
             <a:ext cx="10607040" cy="548640"/>
           </a:xfrm>
           <a:prstGeom prst="rect">
@@ -19064,7 +19064,7 @@
       </p:sp>
       <p:pic>
         <p:nvPicPr>
-          <p:cNvPr id="9" name="Picture 8" descr="fbf374ea10315fc9.png"/>
+          <p:cNvPr id="9" name="Picture 8" descr="309fc1c6c87d6fce.png"/>
           <p:cNvPicPr>
             <a:picLocks noChangeAspect="1"/>
           </p:cNvPicPr>
@@ -19078,8 +19078,8 @@
         </p:blipFill>
         <p:spPr>
           <a:xfrm>
-            <a:off x="5916168" y="2194560"/>
-            <a:ext cx="329184" cy="765048"/>
+            <a:off x="5847588" y="2194560"/>
+            <a:ext cx="466344" cy="1021080"/>
           </a:xfrm>
           <a:prstGeom prst="rect">
             <a:avLst/>

--- a/a7/packages/A7 Unit 3 - Exponents and Scientific Notation/Slides/A7 3.02  Slides.pptx
+++ b/a7/packages/A7 Unit 3 - Exponents and Scientific Notation/Slides/A7 3.02  Slides.pptx
@@ -3817,7 +3817,7 @@
       </p:sp>
       <p:pic>
         <p:nvPicPr>
-          <p:cNvPr id="9" name="Picture 8" descr="309fc1c6c87d6fce.png"/>
+          <p:cNvPr id="9" name="Picture 8" descr="12c4018d49220c37.png"/>
           <p:cNvPicPr>
             <a:picLocks noChangeAspect="1"/>
           </p:cNvPicPr>
@@ -3831,8 +3831,8 @@
         </p:blipFill>
         <p:spPr>
           <a:xfrm>
-            <a:off x="5847588" y="2194560"/>
-            <a:ext cx="466344" cy="1021080"/>
+            <a:off x="5839967" y="2194560"/>
+            <a:ext cx="481583" cy="1018032"/>
           </a:xfrm>
           <a:prstGeom prst="rect">
             <a:avLst/>
@@ -3847,7 +3847,7 @@
         </p:nvSpPr>
         <p:spPr>
           <a:xfrm>
-            <a:off x="777240" y="3535680"/>
+            <a:off x="777240" y="3532632"/>
             <a:ext cx="10607040" cy="429370"/>
           </a:xfrm>
           <a:prstGeom prst="rect">
@@ -4523,7 +4523,7 @@
       </p:sp>
       <p:pic>
         <p:nvPicPr>
-          <p:cNvPr id="9" name="Picture 8" descr="b2abf76e10bb59cd.png"/>
+          <p:cNvPr id="9" name="Picture 8" descr="17fb29aeb756b19c.png"/>
           <p:cNvPicPr>
             <a:picLocks noChangeAspect="1"/>
           </p:cNvPicPr>
@@ -4538,7 +4538,7 @@
         <p:spPr>
           <a:xfrm>
             <a:off x="1828800" y="1920240"/>
-            <a:ext cx="3761232" cy="813816"/>
+            <a:ext cx="3764279" cy="813816"/>
           </a:xfrm>
           <a:prstGeom prst="rect">
             <a:avLst/>
@@ -4553,8 +4553,8 @@
         </p:nvSpPr>
         <p:spPr>
           <a:xfrm>
-            <a:off x="6047232" y="2098548"/>
-            <a:ext cx="5337047" cy="502920"/>
+            <a:off x="6050280" y="2098548"/>
+            <a:ext cx="5334000" cy="502920"/>
           </a:xfrm>
           <a:prstGeom prst="rect">
             <a:avLst/>
@@ -4582,7 +4582,7 @@
       </p:sp>
       <p:pic>
         <p:nvPicPr>
-          <p:cNvPr id="11" name="Picture 10" descr="3f31fbcf3f4e439b.png"/>
+          <p:cNvPr id="11" name="Picture 10" descr="29d5e070652e76c2.png"/>
           <p:cNvPicPr>
             <a:picLocks noChangeAspect="1"/>
           </p:cNvPicPr>
@@ -4597,7 +4597,7 @@
         <p:spPr>
           <a:xfrm>
             <a:off x="1828800" y="3008376"/>
-            <a:ext cx="3483864" cy="691896"/>
+            <a:ext cx="3496056" cy="694944"/>
           </a:xfrm>
           <a:prstGeom prst="rect">
             <a:avLst/>
@@ -4612,8 +4612,8 @@
         </p:nvSpPr>
         <p:spPr>
           <a:xfrm>
-            <a:off x="5769864" y="3125724"/>
-            <a:ext cx="5614415" cy="502920"/>
+            <a:off x="5782056" y="3127248"/>
+            <a:ext cx="5602223" cy="502920"/>
           </a:xfrm>
           <a:prstGeom prst="rect">
             <a:avLst/>
@@ -4659,7 +4659,7 @@
       </p:sp>
       <p:pic>
         <p:nvPicPr>
-          <p:cNvPr id="13" name="Picture 12" descr="43184a255a22c70c.png"/>
+          <p:cNvPr id="13" name="Picture 12" descr="2c170b8a20c6abb2.png"/>
           <p:cNvPicPr>
             <a:picLocks noChangeAspect="1"/>
           </p:cNvPicPr>
@@ -4673,7 +4673,7 @@
         </p:blipFill>
         <p:spPr>
           <a:xfrm>
-            <a:off x="1828800" y="3974592"/>
+            <a:off x="1828800" y="3977639"/>
             <a:ext cx="3444240" cy="411480"/>
           </a:xfrm>
           <a:prstGeom prst="rect">
@@ -4689,7 +4689,7 @@
         </p:nvSpPr>
         <p:spPr>
           <a:xfrm>
-            <a:off x="5730240" y="3951731"/>
+            <a:off x="5730240" y="3954779"/>
             <a:ext cx="5654039" cy="502920"/>
           </a:xfrm>
           <a:prstGeom prst="rect">
@@ -4724,7 +4724,7 @@
         </p:nvSpPr>
         <p:spPr>
           <a:xfrm>
-            <a:off x="777240" y="4843272"/>
+            <a:off x="777240" y="4846320"/>
             <a:ext cx="10607040" cy="548640"/>
           </a:xfrm>
           <a:prstGeom prst="rect">
@@ -5303,7 +5303,7 @@
       </p:sp>
       <p:pic>
         <p:nvPicPr>
-          <p:cNvPr id="9" name="Picture 8" descr="e60d4cb6647beeea.png"/>
+          <p:cNvPr id="9" name="Picture 8" descr="fadd35982984b87a.png"/>
           <p:cNvPicPr>
             <a:picLocks noChangeAspect="1"/>
           </p:cNvPicPr>
@@ -5317,8 +5317,8 @@
         </p:blipFill>
         <p:spPr>
           <a:xfrm>
-            <a:off x="5597651" y="2194560"/>
-            <a:ext cx="966216" cy="853440"/>
+            <a:off x="5594604" y="2194560"/>
+            <a:ext cx="972311" cy="859536"/>
           </a:xfrm>
           <a:prstGeom prst="rect">
             <a:avLst/>
@@ -5333,7 +5333,7 @@
         </p:nvSpPr>
         <p:spPr>
           <a:xfrm>
-            <a:off x="777240" y="3368040"/>
+            <a:off x="777240" y="3374136"/>
             <a:ext cx="10607040" cy="429370"/>
           </a:xfrm>
           <a:prstGeom prst="rect">
@@ -6041,7 +6041,7 @@
       </p:sp>
       <p:pic>
         <p:nvPicPr>
-          <p:cNvPr id="9" name="Picture 8" descr="858f7499cc3aa9e8.png"/>
+          <p:cNvPr id="9" name="Picture 8" descr="19204332be55faec.png"/>
           <p:cNvPicPr>
             <a:picLocks noChangeAspect="1"/>
           </p:cNvPicPr>
@@ -6055,8 +6055,8 @@
         </p:blipFill>
         <p:spPr>
           <a:xfrm>
-            <a:off x="5721095" y="2103120"/>
-            <a:ext cx="719328" cy="1014984"/>
+            <a:off x="5713476" y="2103120"/>
+            <a:ext cx="734568" cy="1014984"/>
           </a:xfrm>
           <a:prstGeom prst="rect">
             <a:avLst/>
@@ -7013,7 +7013,7 @@
       </p:sp>
       <p:pic>
         <p:nvPicPr>
-          <p:cNvPr id="10" name="Picture 9" descr="6211579d9db5cb0f.png"/>
+          <p:cNvPr id="10" name="Picture 9" descr="58f046902f2dbd73.png"/>
           <p:cNvPicPr>
             <a:picLocks noChangeAspect="1"/>
           </p:cNvPicPr>
@@ -7027,8 +7027,8 @@
         </p:blipFill>
         <p:spPr>
           <a:xfrm>
-            <a:off x="5020459" y="2136648"/>
-            <a:ext cx="323088" cy="344424"/>
+            <a:off x="5020459" y="2135124"/>
+            <a:ext cx="323088" cy="347472"/>
           </a:xfrm>
           <a:prstGeom prst="rect">
             <a:avLst/>
@@ -7072,7 +7072,7 @@
       </p:sp>
       <p:pic>
         <p:nvPicPr>
-          <p:cNvPr id="12" name="Picture 11" descr="849ea0a036ce867d.png"/>
+          <p:cNvPr id="12" name="Picture 11" descr="35dbe0b6d97f96a4.png"/>
           <p:cNvPicPr>
             <a:picLocks noChangeAspect="1"/>
           </p:cNvPicPr>
@@ -8435,7 +8435,7 @@
       </p:sp>
       <p:pic>
         <p:nvPicPr>
-          <p:cNvPr id="9" name="Picture 8" descr="1252d608a87976a6.png"/>
+          <p:cNvPr id="9" name="Picture 8" descr="6c228046c0fb44f6.png"/>
           <p:cNvPicPr>
             <a:picLocks noChangeAspect="1"/>
           </p:cNvPicPr>
@@ -8449,8 +8449,8 @@
         </p:blipFill>
         <p:spPr>
           <a:xfrm>
-            <a:off x="5504688" y="2103120"/>
-            <a:ext cx="1152144" cy="1197864"/>
+            <a:off x="5497067" y="2103120"/>
+            <a:ext cx="1167384" cy="1194816"/>
           </a:xfrm>
           <a:prstGeom prst="rect">
             <a:avLst/>
@@ -8465,7 +8465,7 @@
         </p:nvSpPr>
         <p:spPr>
           <a:xfrm>
-            <a:off x="1828800" y="3575303"/>
+            <a:off x="1828800" y="3572255"/>
             <a:ext cx="8503920" cy="548640"/>
           </a:xfrm>
           <a:prstGeom prst="rect">
@@ -9158,7 +9158,7 @@
       </p:sp>
       <p:pic>
         <p:nvPicPr>
-          <p:cNvPr id="9" name="Picture 8" descr="615f3e719211e489.png"/>
+          <p:cNvPr id="9" name="Picture 8" descr="ea064d235ef414a6.png"/>
           <p:cNvPicPr>
             <a:picLocks noChangeAspect="1"/>
           </p:cNvPicPr>
@@ -10072,7 +10072,7 @@
       </p:sp>
       <p:pic>
         <p:nvPicPr>
-          <p:cNvPr id="9" name="Picture 8" descr="b00c54b2f2476e9e.png"/>
+          <p:cNvPr id="9" name="Picture 8" descr="eea3c0844d5cda28.png"/>
           <p:cNvPicPr>
             <a:picLocks noChangeAspect="1"/>
           </p:cNvPicPr>
@@ -10086,8 +10086,8 @@
         </p:blipFill>
         <p:spPr>
           <a:xfrm>
-            <a:off x="5873496" y="2103120"/>
-            <a:ext cx="414528" cy="435864"/>
+            <a:off x="5870447" y="2103120"/>
+            <a:ext cx="420624" cy="432816"/>
           </a:xfrm>
           <a:prstGeom prst="rect">
             <a:avLst/>
@@ -10102,7 +10102,7 @@
         </p:nvSpPr>
         <p:spPr>
           <a:xfrm>
-            <a:off x="777240" y="2767583"/>
+            <a:off x="777240" y="2764535"/>
             <a:ext cx="10607040" cy="465151"/>
           </a:xfrm>
           <a:prstGeom prst="rect">
@@ -10137,7 +10137,7 @@
         </p:nvSpPr>
         <p:spPr>
           <a:xfrm>
-            <a:off x="1874519" y="3433903"/>
+            <a:off x="1874519" y="3430855"/>
             <a:ext cx="4572000" cy="548640"/>
           </a:xfrm>
           <a:prstGeom prst="rect">
@@ -10181,7 +10181,7 @@
         </p:nvSpPr>
         <p:spPr>
           <a:xfrm>
-            <a:off x="6629400" y="3433903"/>
+            <a:off x="6629400" y="3430855"/>
             <a:ext cx="4572000" cy="548640"/>
           </a:xfrm>
           <a:prstGeom prst="rect">
@@ -10225,7 +10225,7 @@
         </p:nvSpPr>
         <p:spPr>
           <a:xfrm>
-            <a:off x="1874519" y="4119703"/>
+            <a:off x="1874519" y="4116655"/>
             <a:ext cx="4572000" cy="548640"/>
           </a:xfrm>
           <a:prstGeom prst="rect">
@@ -10269,7 +10269,7 @@
         </p:nvSpPr>
         <p:spPr>
           <a:xfrm>
-            <a:off x="6629400" y="4119703"/>
+            <a:off x="6629400" y="4116655"/>
             <a:ext cx="4572000" cy="548640"/>
           </a:xfrm>
           <a:prstGeom prst="rect">
@@ -10313,7 +10313,7 @@
         </p:nvSpPr>
         <p:spPr>
           <a:xfrm>
-            <a:off x="777240" y="5125543"/>
+            <a:off x="777240" y="5122495"/>
             <a:ext cx="10607040" cy="548640"/>
           </a:xfrm>
           <a:prstGeom prst="rect">
@@ -11174,7 +11174,7 @@
       </p:sp>
       <p:pic>
         <p:nvPicPr>
-          <p:cNvPr id="9" name="Picture 8" descr="ad177fa159bf9adb.png"/>
+          <p:cNvPr id="9" name="Picture 8" descr="68a50808a2a5ffd6.png"/>
           <p:cNvPicPr>
             <a:picLocks noChangeAspect="1"/>
           </p:cNvPicPr>
@@ -11188,8 +11188,8 @@
         </p:blipFill>
         <p:spPr>
           <a:xfrm>
-            <a:off x="5847588" y="2103120"/>
-            <a:ext cx="466344" cy="1002792"/>
+            <a:off x="5839967" y="2103120"/>
+            <a:ext cx="481583" cy="999743"/>
           </a:xfrm>
           <a:prstGeom prst="rect">
             <a:avLst/>
@@ -11204,7 +11204,7 @@
         </p:nvSpPr>
         <p:spPr>
           <a:xfrm>
-            <a:off x="777240" y="3334512"/>
+            <a:off x="777240" y="3331464"/>
             <a:ext cx="10607040" cy="465151"/>
           </a:xfrm>
           <a:prstGeom prst="rect">
@@ -11239,7 +11239,7 @@
         </p:nvSpPr>
         <p:spPr>
           <a:xfrm>
-            <a:off x="1874519" y="4000831"/>
+            <a:off x="1874519" y="3997783"/>
             <a:ext cx="4572000" cy="548640"/>
           </a:xfrm>
           <a:prstGeom prst="rect">
@@ -11292,7 +11292,7 @@
         </p:nvSpPr>
         <p:spPr>
           <a:xfrm>
-            <a:off x="6629400" y="4000831"/>
+            <a:off x="6629400" y="3997783"/>
             <a:ext cx="4572000" cy="548640"/>
           </a:xfrm>
           <a:prstGeom prst="rect">
@@ -11345,7 +11345,7 @@
         </p:nvSpPr>
         <p:spPr>
           <a:xfrm>
-            <a:off x="1874519" y="4686631"/>
+            <a:off x="1874519" y="4683583"/>
             <a:ext cx="4572000" cy="548640"/>
           </a:xfrm>
           <a:prstGeom prst="rect">
@@ -11398,7 +11398,7 @@
         </p:nvSpPr>
         <p:spPr>
           <a:xfrm>
-            <a:off x="6629400" y="4686631"/>
+            <a:off x="6629400" y="4683583"/>
             <a:ext cx="4572000" cy="548640"/>
           </a:xfrm>
           <a:prstGeom prst="rect">
@@ -12109,7 +12109,7 @@
       </p:sp>
       <p:pic>
         <p:nvPicPr>
-          <p:cNvPr id="9" name="Picture 8" descr="7fd8a7336ddfafc1.png"/>
+          <p:cNvPr id="9" name="Picture 8" descr="9e83a17182180955.png"/>
           <p:cNvPicPr>
             <a:picLocks noChangeAspect="1"/>
           </p:cNvPicPr>
@@ -12123,8 +12123,8 @@
         </p:blipFill>
         <p:spPr>
           <a:xfrm>
-            <a:off x="5657088" y="2103120"/>
-            <a:ext cx="847344" cy="1021080"/>
+            <a:off x="5649467" y="2103120"/>
+            <a:ext cx="862584" cy="1014984"/>
           </a:xfrm>
           <a:prstGeom prst="rect">
             <a:avLst/>
@@ -12139,7 +12139,7 @@
         </p:nvSpPr>
         <p:spPr>
           <a:xfrm>
-            <a:off x="1828800" y="3398519"/>
+            <a:off x="1828800" y="3392424"/>
             <a:ext cx="8503920" cy="548640"/>
           </a:xfrm>
           <a:prstGeom prst="rect">
@@ -13460,7 +13460,7 @@
       </p:sp>
       <p:pic>
         <p:nvPicPr>
-          <p:cNvPr id="9" name="Picture 8" descr="41e42a07b25976eb.png"/>
+          <p:cNvPr id="9" name="Picture 8" descr="1683127c1501744e.png"/>
           <p:cNvPicPr>
             <a:picLocks noChangeAspect="1"/>
           </p:cNvPicPr>
@@ -13474,8 +13474,8 @@
         </p:blipFill>
         <p:spPr>
           <a:xfrm>
-            <a:off x="5460491" y="2103120"/>
-            <a:ext cx="1240536" cy="859536"/>
+            <a:off x="5458968" y="2103120"/>
+            <a:ext cx="1243584" cy="862584"/>
           </a:xfrm>
           <a:prstGeom prst="rect">
             <a:avLst/>
@@ -13490,7 +13490,7 @@
         </p:nvSpPr>
         <p:spPr>
           <a:xfrm>
-            <a:off x="1828800" y="3236975"/>
+            <a:off x="1828800" y="3240023"/>
             <a:ext cx="8503920" cy="548640"/>
           </a:xfrm>
           <a:prstGeom prst="rect">
@@ -14362,7 +14362,7 @@
         </p:nvSpPr>
         <p:spPr>
           <a:xfrm>
-            <a:off x="1146338" y="2275332"/>
+            <a:off x="1134146" y="2273807"/>
             <a:ext cx="3088445" cy="457200"/>
           </a:xfrm>
           <a:prstGeom prst="rect">
@@ -14391,7 +14391,7 @@
       </p:sp>
       <p:pic>
         <p:nvPicPr>
-          <p:cNvPr id="10" name="Picture 9" descr="62ec99fb62ba2937.png"/>
+          <p:cNvPr id="10" name="Picture 9" descr="86af6beffc833326.png"/>
           <p:cNvPicPr>
             <a:picLocks noChangeAspect="1"/>
           </p:cNvPicPr>
@@ -14405,8 +14405,8 @@
         </p:blipFill>
         <p:spPr>
           <a:xfrm>
-            <a:off x="4097624" y="2103120"/>
-            <a:ext cx="1627632" cy="801624"/>
+            <a:off x="4085432" y="2103120"/>
+            <a:ext cx="1639824" cy="798576"/>
           </a:xfrm>
           <a:prstGeom prst="rect">
             <a:avLst/>
@@ -14421,7 +14421,7 @@
         </p:nvSpPr>
         <p:spPr>
           <a:xfrm>
-            <a:off x="5725256" y="2275332"/>
+            <a:off x="5725256" y="2273807"/>
             <a:ext cx="4095361" cy="457200"/>
           </a:xfrm>
           <a:prstGeom prst="rect">
@@ -14450,7 +14450,7 @@
       </p:sp>
       <p:pic>
         <p:nvPicPr>
-          <p:cNvPr id="12" name="Picture 11" descr="814e799b3c3f0420.png"/>
+          <p:cNvPr id="12" name="Picture 11" descr="3c79892a0ac739bd.png"/>
           <p:cNvPicPr>
             <a:picLocks noChangeAspect="1"/>
           </p:cNvPicPr>
@@ -14465,7 +14465,7 @@
         <p:spPr>
           <a:xfrm>
             <a:off x="9683457" y="2103120"/>
-            <a:ext cx="1161288" cy="801624"/>
+            <a:ext cx="1173480" cy="798576"/>
           </a:xfrm>
           <a:prstGeom prst="rect">
             <a:avLst/>
@@ -14480,7 +14480,7 @@
         </p:nvSpPr>
         <p:spPr>
           <a:xfrm>
-            <a:off x="10844745" y="2275332"/>
+            <a:off x="10856937" y="2273807"/>
             <a:ext cx="307595" cy="457200"/>
           </a:xfrm>
           <a:prstGeom prst="rect">
@@ -14515,7 +14515,7 @@
         </p:nvSpPr>
         <p:spPr>
           <a:xfrm>
-            <a:off x="777240" y="3179064"/>
+            <a:off x="777240" y="3176015"/>
             <a:ext cx="10607040" cy="465151"/>
           </a:xfrm>
           <a:prstGeom prst="rect">
@@ -14550,7 +14550,7 @@
         </p:nvSpPr>
         <p:spPr>
           <a:xfrm>
-            <a:off x="1828800" y="3799663"/>
+            <a:off x="1828800" y="3796615"/>
             <a:ext cx="8503920" cy="548640"/>
           </a:xfrm>
           <a:prstGeom prst="rect">
@@ -16069,7 +16069,7 @@
       </p:cxnSp>
       <p:pic>
         <p:nvPicPr>
-          <p:cNvPr id="11" name="Picture 10" descr="2af4721831e6626f.png"/>
+          <p:cNvPr id="11" name="Picture 10" descr="9415792fd44314bd.png"/>
           <p:cNvPicPr>
             <a:picLocks noChangeAspect="1"/>
           </p:cNvPicPr>
@@ -16083,8 +16083,8 @@
         </p:blipFill>
         <p:spPr>
           <a:xfrm>
-            <a:off x="3352800" y="2340864"/>
-            <a:ext cx="5455920" cy="813816"/>
+            <a:off x="3346703" y="2340864"/>
+            <a:ext cx="5468112" cy="816864"/>
           </a:xfrm>
           <a:prstGeom prst="rect">
             <a:avLst/>
@@ -16099,7 +16099,7 @@
         </p:nvSpPr>
         <p:spPr>
           <a:xfrm>
-            <a:off x="987552" y="3581400"/>
+            <a:off x="987552" y="3584447"/>
             <a:ext cx="3534479" cy="457200"/>
           </a:xfrm>
           <a:prstGeom prst="rect">
@@ -16128,7 +16128,7 @@
       </p:sp>
       <p:pic>
         <p:nvPicPr>
-          <p:cNvPr id="13" name="Picture 12" descr="c7bc6a26eec98598.png"/>
+          <p:cNvPr id="13" name="Picture 12" descr="caa5aae58594f04d.png"/>
           <p:cNvPicPr>
             <a:picLocks noChangeAspect="1"/>
           </p:cNvPicPr>
@@ -16142,8 +16142,8 @@
         </p:blipFill>
         <p:spPr>
           <a:xfrm>
-            <a:off x="4384871" y="3474720"/>
-            <a:ext cx="1746504" cy="670560"/>
+            <a:off x="4384871" y="3477767"/>
+            <a:ext cx="1758696" cy="670560"/>
           </a:xfrm>
           <a:prstGeom prst="rect">
             <a:avLst/>
@@ -16158,7 +16158,7 @@
         </p:nvSpPr>
         <p:spPr>
           <a:xfrm>
-            <a:off x="6131375" y="3581400"/>
+            <a:off x="6143567" y="3584447"/>
             <a:ext cx="597344" cy="457200"/>
           </a:xfrm>
           <a:prstGeom prst="rect">
@@ -16187,7 +16187,7 @@
       </p:sp>
       <p:pic>
         <p:nvPicPr>
-          <p:cNvPr id="15" name="Picture 14" descr="1556166feb118f41.png"/>
+          <p:cNvPr id="15" name="Picture 14" descr="e9238f2ad6182a0d.png"/>
           <p:cNvPicPr>
             <a:picLocks noChangeAspect="1"/>
           </p:cNvPicPr>
@@ -16201,7 +16201,7 @@
         </p:blipFill>
         <p:spPr>
           <a:xfrm>
-            <a:off x="6591559" y="3640836"/>
+            <a:off x="6603751" y="3643883"/>
             <a:ext cx="786384" cy="338328"/>
           </a:xfrm>
           <a:prstGeom prst="rect">
@@ -16217,7 +16217,7 @@
         </p:nvSpPr>
         <p:spPr>
           <a:xfrm>
-            <a:off x="7377943" y="3581400"/>
+            <a:off x="7390135" y="3584447"/>
             <a:ext cx="330733" cy="457200"/>
           </a:xfrm>
           <a:prstGeom prst="rect">
@@ -16252,7 +16252,7 @@
         </p:nvSpPr>
         <p:spPr>
           <a:xfrm>
-            <a:off x="987552" y="4579620"/>
+            <a:off x="987552" y="4584191"/>
             <a:ext cx="3088445" cy="457200"/>
           </a:xfrm>
           <a:prstGeom prst="rect">
@@ -16281,7 +16281,7 @@
       </p:sp>
       <p:pic>
         <p:nvPicPr>
-          <p:cNvPr id="18" name="Picture 17" descr="3eb7fb5dc9071c18.png"/>
+          <p:cNvPr id="18" name="Picture 17" descr="b00c7f4311e4c71a.png"/>
           <p:cNvPicPr>
             <a:picLocks noChangeAspect="1"/>
           </p:cNvPicPr>
@@ -16295,8 +16295,8 @@
         </p:blipFill>
         <p:spPr>
           <a:xfrm>
-            <a:off x="3938837" y="4401312"/>
-            <a:ext cx="3617976" cy="813816"/>
+            <a:off x="3938837" y="4404360"/>
+            <a:ext cx="3630168" cy="816864"/>
           </a:xfrm>
           <a:prstGeom prst="rect">
             <a:avLst/>
@@ -16603,7 +16603,7 @@
       </p:cxnSp>
       <p:pic>
         <p:nvPicPr>
-          <p:cNvPr id="10" name="Picture 9" descr="def758e4f359f543.png"/>
+          <p:cNvPr id="10" name="Picture 9" descr="ca3e08171df6b530.png"/>
           <p:cNvPicPr>
             <a:picLocks noChangeAspect="1"/>
           </p:cNvPicPr>
@@ -16617,8 +16617,8 @@
         </p:blipFill>
         <p:spPr>
           <a:xfrm>
-            <a:off x="2900172" y="2340864"/>
-            <a:ext cx="6361176" cy="813816"/>
+            <a:off x="2898648" y="2340864"/>
+            <a:ext cx="6364224" cy="810768"/>
           </a:xfrm>
           <a:prstGeom prst="rect">
             <a:avLst/>
@@ -16633,7 +16633,7 @@
         </p:nvSpPr>
         <p:spPr>
           <a:xfrm>
-            <a:off x="987552" y="3587496"/>
+            <a:off x="987552" y="3585972"/>
             <a:ext cx="3613463" cy="457200"/>
           </a:xfrm>
           <a:prstGeom prst="rect">
@@ -16662,7 +16662,7 @@
       </p:sp>
       <p:pic>
         <p:nvPicPr>
-          <p:cNvPr id="12" name="Picture 11" descr="5b18a1628e69d3d2.png"/>
+          <p:cNvPr id="12" name="Picture 11" descr="5fe28a02304572ea.png"/>
           <p:cNvPicPr>
             <a:picLocks noChangeAspect="1"/>
           </p:cNvPicPr>
@@ -16676,8 +16676,8 @@
         </p:blipFill>
         <p:spPr>
           <a:xfrm>
-            <a:off x="4463855" y="3474720"/>
-            <a:ext cx="1700784" cy="682752"/>
+            <a:off x="4463855" y="3471672"/>
+            <a:ext cx="1700784" cy="685800"/>
           </a:xfrm>
           <a:prstGeom prst="rect">
             <a:avLst/>
@@ -16692,7 +16692,7 @@
         </p:nvSpPr>
         <p:spPr>
           <a:xfrm>
-            <a:off x="6164639" y="3587496"/>
+            <a:off x="6164639" y="3585972"/>
             <a:ext cx="597344" cy="457200"/>
           </a:xfrm>
           <a:prstGeom prst="rect">
@@ -16721,7 +16721,7 @@
       </p:sp>
       <p:pic>
         <p:nvPicPr>
-          <p:cNvPr id="14" name="Picture 13" descr="077651efb4d1ec32.png"/>
+          <p:cNvPr id="14" name="Picture 13" descr="9747b1c84bea2b78.png"/>
           <p:cNvPicPr>
             <a:picLocks noChangeAspect="1"/>
           </p:cNvPicPr>
@@ -16735,8 +16735,8 @@
         </p:blipFill>
         <p:spPr>
           <a:xfrm>
-            <a:off x="6624824" y="3645407"/>
-            <a:ext cx="783336" cy="341376"/>
+            <a:off x="6624824" y="3643884"/>
+            <a:ext cx="786384" cy="341376"/>
           </a:xfrm>
           <a:prstGeom prst="rect">
             <a:avLst/>
@@ -16751,7 +16751,7 @@
         </p:nvSpPr>
         <p:spPr>
           <a:xfrm>
-            <a:off x="7408160" y="3587496"/>
+            <a:off x="7411208" y="3585972"/>
             <a:ext cx="330733" cy="457200"/>
           </a:xfrm>
           <a:prstGeom prst="rect">
@@ -16786,7 +16786,7 @@
         </p:nvSpPr>
         <p:spPr>
           <a:xfrm>
-            <a:off x="987552" y="4591812"/>
+            <a:off x="987552" y="4590288"/>
             <a:ext cx="2033729" cy="457200"/>
           </a:xfrm>
           <a:prstGeom prst="rect">
@@ -16815,7 +16815,7 @@
       </p:sp>
       <p:pic>
         <p:nvPicPr>
-          <p:cNvPr id="17" name="Picture 16" descr="5adfb841038764d7.png"/>
+          <p:cNvPr id="17" name="Picture 16" descr="bf6d891ffc7ec268.png"/>
           <p:cNvPicPr>
             <a:picLocks noChangeAspect="1"/>
           </p:cNvPicPr>
@@ -16830,7 +16830,7 @@
         <p:spPr>
           <a:xfrm>
             <a:off x="2884121" y="4413504"/>
-            <a:ext cx="3185160" cy="813816"/>
+            <a:ext cx="3197352" cy="810768"/>
           </a:xfrm>
           <a:prstGeom prst="rect">
             <a:avLst/>
@@ -16845,7 +16845,7 @@
         </p:nvSpPr>
         <p:spPr>
           <a:xfrm>
-            <a:off x="6069281" y="4591812"/>
+            <a:off x="6081473" y="4590288"/>
             <a:ext cx="1265922" cy="457200"/>
           </a:xfrm>
           <a:prstGeom prst="rect">
@@ -16874,7 +16874,7 @@
       </p:sp>
       <p:pic>
         <p:nvPicPr>
-          <p:cNvPr id="19" name="Picture 18" descr="85b4c3a7149613b4.png"/>
+          <p:cNvPr id="19" name="Picture 18" descr="0e96d85d3f75c27d.png"/>
           <p:cNvPicPr>
             <a:picLocks noChangeAspect="1"/>
           </p:cNvPicPr>
@@ -16888,7 +16888,7 @@
         </p:blipFill>
         <p:spPr>
           <a:xfrm>
-            <a:off x="7198043" y="4614672"/>
+            <a:off x="7210235" y="4613148"/>
             <a:ext cx="2228088" cy="411480"/>
           </a:xfrm>
           <a:prstGeom prst="rect">
@@ -17744,7 +17744,7 @@
       </p:graphicFrame>
       <p:pic>
         <p:nvPicPr>
-          <p:cNvPr id="11" name="Picture 10" descr="62ec99fb62ba2937.png"/>
+          <p:cNvPr id="11" name="Picture 10" descr="86af6beffc833326.png"/>
           <p:cNvPicPr>
             <a:picLocks noChangeAspect="1"/>
           </p:cNvPicPr>
@@ -17758,8 +17758,8 @@
         </p:blipFill>
         <p:spPr>
           <a:xfrm>
-            <a:off x="1920933" y="3337560"/>
-            <a:ext cx="1627632" cy="801624"/>
+            <a:off x="1908741" y="3337560"/>
+            <a:ext cx="1639824" cy="798576"/>
           </a:xfrm>
           <a:prstGeom prst="rect">
             <a:avLst/>
@@ -17774,7 +17774,7 @@
         </p:nvSpPr>
         <p:spPr>
           <a:xfrm>
-            <a:off x="3548565" y="3509772"/>
+            <a:off x="3548565" y="3508248"/>
             <a:ext cx="1987138" cy="457200"/>
           </a:xfrm>
           <a:prstGeom prst="rect">
@@ -17803,7 +17803,7 @@
       </p:sp>
       <p:pic>
         <p:nvPicPr>
-          <p:cNvPr id="13" name="Picture 12" descr="77ba2923b3d33308.png"/>
+          <p:cNvPr id="13" name="Picture 12" descr="048259f86d8f170a.png"/>
           <p:cNvPicPr>
             <a:picLocks noChangeAspect="1"/>
           </p:cNvPicPr>
@@ -17818,7 +17818,7 @@
         <p:spPr>
           <a:xfrm>
             <a:off x="5398543" y="3337560"/>
-            <a:ext cx="2346960" cy="801624"/>
+            <a:ext cx="2359152" cy="798576"/>
           </a:xfrm>
           <a:prstGeom prst="rect">
             <a:avLst/>
@@ -17833,7 +17833,7 @@
         </p:nvSpPr>
         <p:spPr>
           <a:xfrm>
-            <a:off x="7745503" y="3509772"/>
+            <a:off x="7757695" y="3508248"/>
             <a:ext cx="1714795" cy="457200"/>
           </a:xfrm>
           <a:prstGeom prst="rect">
@@ -17862,7 +17862,7 @@
       </p:sp>
       <p:pic>
         <p:nvPicPr>
-          <p:cNvPr id="15" name="Picture 14" descr="d4454095d2619e7e.png"/>
+          <p:cNvPr id="15" name="Picture 14" descr="61848e244d08c521.png"/>
           <p:cNvPicPr>
             <a:picLocks noChangeAspect="1"/>
           </p:cNvPicPr>
@@ -17876,7 +17876,7 @@
         </p:blipFill>
         <p:spPr>
           <a:xfrm>
-            <a:off x="9323138" y="3569208"/>
+            <a:off x="9335330" y="3567683"/>
             <a:ext cx="917448" cy="338328"/>
           </a:xfrm>
           <a:prstGeom prst="rect">
@@ -17892,7 +17892,7 @@
         </p:nvSpPr>
         <p:spPr>
           <a:xfrm>
-            <a:off x="987552" y="4436363"/>
+            <a:off x="987552" y="4433315"/>
             <a:ext cx="2787443" cy="457200"/>
           </a:xfrm>
           <a:prstGeom prst="rect">
@@ -17921,7 +17921,7 @@
       </p:sp>
       <p:pic>
         <p:nvPicPr>
-          <p:cNvPr id="17" name="Picture 16" descr="d4820dc08b2ea30b.png"/>
+          <p:cNvPr id="17" name="Picture 16" descr="62b15dcf7a505345.png"/>
           <p:cNvPicPr>
             <a:picLocks noChangeAspect="1"/>
           </p:cNvPicPr>
@@ -17935,8 +17935,8 @@
         </p:blipFill>
         <p:spPr>
           <a:xfrm>
-            <a:off x="3637835" y="4494275"/>
-            <a:ext cx="938784" cy="341376"/>
+            <a:off x="3637835" y="4491228"/>
+            <a:ext cx="941832" cy="341376"/>
           </a:xfrm>
           <a:prstGeom prst="rect">
             <a:avLst/>
@@ -17951,7 +17951,7 @@
         </p:nvSpPr>
         <p:spPr>
           <a:xfrm>
-            <a:off x="4576619" y="4436363"/>
+            <a:off x="4579667" y="4433315"/>
             <a:ext cx="3406485" cy="457200"/>
           </a:xfrm>
           <a:prstGeom prst="rect">
@@ -17980,7 +17980,7 @@
       </p:sp>
       <p:pic>
         <p:nvPicPr>
-          <p:cNvPr id="19" name="Picture 18" descr="19069146cae9620c.png"/>
+          <p:cNvPr id="19" name="Picture 18" descr="1e04812740d92fa8.png"/>
           <p:cNvPicPr>
             <a:picLocks noChangeAspect="1"/>
           </p:cNvPicPr>
@@ -17994,7 +17994,7 @@
         </p:blipFill>
         <p:spPr>
           <a:xfrm>
-            <a:off x="7845944" y="4573523"/>
+            <a:off x="7848992" y="4570476"/>
             <a:ext cx="188976" cy="182880"/>
           </a:xfrm>
           <a:prstGeom prst="rect">
@@ -18589,7 +18589,7 @@
       </p:sp>
       <p:pic>
         <p:nvPicPr>
-          <p:cNvPr id="9" name="Picture 8" descr="b92fe29e305c868b.png"/>
+          <p:cNvPr id="9" name="Picture 8" descr="3b017d83f1787b8d.png"/>
           <p:cNvPicPr>
             <a:picLocks noChangeAspect="1"/>
           </p:cNvPicPr>
@@ -18604,7 +18604,7 @@
         <p:spPr>
           <a:xfrm>
             <a:off x="1828800" y="1920240"/>
-            <a:ext cx="3983736" cy="947928"/>
+            <a:ext cx="3995928" cy="947928"/>
           </a:xfrm>
           <a:prstGeom prst="rect">
             <a:avLst/>
@@ -18619,8 +18619,8 @@
         </p:nvSpPr>
         <p:spPr>
           <a:xfrm>
-            <a:off x="6269736" y="2165604"/>
-            <a:ext cx="5114544" cy="502920"/>
+            <a:off x="6281928" y="2165604"/>
+            <a:ext cx="5102351" cy="502920"/>
           </a:xfrm>
           <a:prstGeom prst="rect">
             <a:avLst/>
@@ -18648,7 +18648,7 @@
       </p:sp>
       <p:pic>
         <p:nvPicPr>
-          <p:cNvPr id="11" name="Picture 10" descr="a45f65a041e9519e.png"/>
+          <p:cNvPr id="11" name="Picture 10" descr="bd5827372e35342f.png"/>
           <p:cNvPicPr>
             <a:picLocks noChangeAspect="1"/>
           </p:cNvPicPr>
@@ -18707,7 +18707,7 @@
       </p:sp>
       <p:pic>
         <p:nvPicPr>
-          <p:cNvPr id="13" name="Picture 12" descr="322d685306cd6195.png"/>
+          <p:cNvPr id="13" name="Picture 12" descr="90139498d34b0b81.png"/>
           <p:cNvPicPr>
             <a:picLocks noChangeAspect="1"/>
           </p:cNvPicPr>
@@ -18722,7 +18722,7 @@
         <p:spPr>
           <a:xfrm>
             <a:off x="1828800" y="3828288"/>
-            <a:ext cx="2350008" cy="353568"/>
+            <a:ext cx="2350008" cy="350520"/>
           </a:xfrm>
           <a:prstGeom prst="rect">
             <a:avLst/>
@@ -18737,7 +18737,7 @@
         </p:nvSpPr>
         <p:spPr>
           <a:xfrm>
-            <a:off x="4636008" y="3776472"/>
+            <a:off x="4636008" y="3774947"/>
             <a:ext cx="6400800" cy="502920"/>
           </a:xfrm>
           <a:prstGeom prst="rect">
@@ -18772,7 +18772,7 @@
         </p:nvSpPr>
         <p:spPr>
           <a:xfrm>
-            <a:off x="777240" y="4639056"/>
+            <a:off x="777240" y="4636008"/>
             <a:ext cx="10607040" cy="548640"/>
           </a:xfrm>
           <a:prstGeom prst="rect">

--- a/a7/packages/A7 Unit 3 - Exponents and Scientific Notation/Slides/A7 3.02  Slides.pptx
+++ b/a7/packages/A7 Unit 3 - Exponents and Scientific Notation/Slides/A7 3.02  Slides.pptx
@@ -3817,7 +3817,7 @@
       </p:sp>
       <p:pic>
         <p:nvPicPr>
-          <p:cNvPr id="9" name="Picture 8" descr="12c4018d49220c37.png"/>
+          <p:cNvPr id="9" name="Picture 8" descr="b0a43ae0750e3ab4.png"/>
           <p:cNvPicPr>
             <a:picLocks noChangeAspect="1"/>
           </p:cNvPicPr>
@@ -3831,8 +3831,8 @@
         </p:blipFill>
         <p:spPr>
           <a:xfrm>
-            <a:off x="5839967" y="2194560"/>
-            <a:ext cx="481583" cy="1018032"/>
+            <a:off x="5849112" y="2194560"/>
+            <a:ext cx="463296" cy="1018032"/>
           </a:xfrm>
           <a:prstGeom prst="rect">
             <a:avLst/>
@@ -4523,7 +4523,7 @@
       </p:sp>
       <p:pic>
         <p:nvPicPr>
-          <p:cNvPr id="9" name="Picture 8" descr="17fb29aeb756b19c.png"/>
+          <p:cNvPr id="9" name="Picture 8" descr="7ab80e4044f30348.png"/>
           <p:cNvPicPr>
             <a:picLocks noChangeAspect="1"/>
           </p:cNvPicPr>
@@ -4538,7 +4538,7 @@
         <p:spPr>
           <a:xfrm>
             <a:off x="1828800" y="1920240"/>
-            <a:ext cx="3764279" cy="813816"/>
+            <a:ext cx="3755136" cy="813816"/>
           </a:xfrm>
           <a:prstGeom prst="rect">
             <a:avLst/>
@@ -4553,8 +4553,8 @@
         </p:nvSpPr>
         <p:spPr>
           <a:xfrm>
-            <a:off x="6050280" y="2098548"/>
-            <a:ext cx="5334000" cy="502920"/>
+            <a:off x="6041136" y="2098548"/>
+            <a:ext cx="5343144" cy="502920"/>
           </a:xfrm>
           <a:prstGeom prst="rect">
             <a:avLst/>
@@ -4582,7 +4582,7 @@
       </p:sp>
       <p:pic>
         <p:nvPicPr>
-          <p:cNvPr id="11" name="Picture 10" descr="29d5e070652e76c2.png"/>
+          <p:cNvPr id="11" name="Picture 10" descr="e1269a6bd0483359.png"/>
           <p:cNvPicPr>
             <a:picLocks noChangeAspect="1"/>
           </p:cNvPicPr>
@@ -4597,7 +4597,7 @@
         <p:spPr>
           <a:xfrm>
             <a:off x="1828800" y="3008376"/>
-            <a:ext cx="3496056" cy="694944"/>
+            <a:ext cx="3486912" cy="691896"/>
           </a:xfrm>
           <a:prstGeom prst="rect">
             <a:avLst/>
@@ -4612,8 +4612,8 @@
         </p:nvSpPr>
         <p:spPr>
           <a:xfrm>
-            <a:off x="5782056" y="3127248"/>
-            <a:ext cx="5602223" cy="502920"/>
+            <a:off x="5772912" y="3125724"/>
+            <a:ext cx="5611367" cy="502920"/>
           </a:xfrm>
           <a:prstGeom prst="rect">
             <a:avLst/>
@@ -4659,7 +4659,7 @@
       </p:sp>
       <p:pic>
         <p:nvPicPr>
-          <p:cNvPr id="13" name="Picture 12" descr="2c170b8a20c6abb2.png"/>
+          <p:cNvPr id="13" name="Picture 12" descr="ac2b58a90d22f614.png"/>
           <p:cNvPicPr>
             <a:picLocks noChangeAspect="1"/>
           </p:cNvPicPr>
@@ -4673,8 +4673,8 @@
         </p:blipFill>
         <p:spPr>
           <a:xfrm>
-            <a:off x="1828800" y="3977639"/>
-            <a:ext cx="3444240" cy="411480"/>
+            <a:off x="1828800" y="3974592"/>
+            <a:ext cx="3447288" cy="411480"/>
           </a:xfrm>
           <a:prstGeom prst="rect">
             <a:avLst/>
@@ -4689,8 +4689,8 @@
         </p:nvSpPr>
         <p:spPr>
           <a:xfrm>
-            <a:off x="5730240" y="3954779"/>
-            <a:ext cx="5654039" cy="502920"/>
+            <a:off x="5733288" y="3951731"/>
+            <a:ext cx="5650992" cy="502920"/>
           </a:xfrm>
           <a:prstGeom prst="rect">
             <a:avLst/>
@@ -4724,7 +4724,7 @@
         </p:nvSpPr>
         <p:spPr>
           <a:xfrm>
-            <a:off x="777240" y="4846320"/>
+            <a:off x="777240" y="4843272"/>
             <a:ext cx="10607040" cy="548640"/>
           </a:xfrm>
           <a:prstGeom prst="rect">
@@ -5303,7 +5303,7 @@
       </p:sp>
       <p:pic>
         <p:nvPicPr>
-          <p:cNvPr id="9" name="Picture 8" descr="fadd35982984b87a.png"/>
+          <p:cNvPr id="9" name="Picture 8" descr="74bc3eff5c14b1ec.png"/>
           <p:cNvPicPr>
             <a:picLocks noChangeAspect="1"/>
           </p:cNvPicPr>
@@ -5318,7 +5318,7 @@
         <p:spPr>
           <a:xfrm>
             <a:off x="5594604" y="2194560"/>
-            <a:ext cx="972311" cy="859536"/>
+            <a:ext cx="972311" cy="856488"/>
           </a:xfrm>
           <a:prstGeom prst="rect">
             <a:avLst/>
@@ -5333,7 +5333,7 @@
         </p:nvSpPr>
         <p:spPr>
           <a:xfrm>
-            <a:off x="777240" y="3374136"/>
+            <a:off x="777240" y="3371088"/>
             <a:ext cx="10607040" cy="429370"/>
           </a:xfrm>
           <a:prstGeom prst="rect">
@@ -6041,7 +6041,7 @@
       </p:sp>
       <p:pic>
         <p:nvPicPr>
-          <p:cNvPr id="9" name="Picture 8" descr="19204332be55faec.png"/>
+          <p:cNvPr id="9" name="Picture 8" descr="b0b61f7be1f45fff.png"/>
           <p:cNvPicPr>
             <a:picLocks noChangeAspect="1"/>
           </p:cNvPicPr>
@@ -6055,8 +6055,8 @@
         </p:blipFill>
         <p:spPr>
           <a:xfrm>
-            <a:off x="5713476" y="2103120"/>
-            <a:ext cx="734568" cy="1014984"/>
+            <a:off x="5722620" y="2103120"/>
+            <a:ext cx="716280" cy="1018032"/>
           </a:xfrm>
           <a:prstGeom prst="rect">
             <a:avLst/>
@@ -6071,7 +6071,7 @@
         </p:nvSpPr>
         <p:spPr>
           <a:xfrm>
-            <a:off x="1828800" y="3392424"/>
+            <a:off x="1828800" y="3395471"/>
             <a:ext cx="8503920" cy="548640"/>
           </a:xfrm>
           <a:prstGeom prst="rect">
@@ -7013,7 +7013,7 @@
       </p:sp>
       <p:pic>
         <p:nvPicPr>
-          <p:cNvPr id="10" name="Picture 9" descr="58f046902f2dbd73.png"/>
+          <p:cNvPr id="10" name="Picture 9" descr="2b0ddd72bd8ed32a.png"/>
           <p:cNvPicPr>
             <a:picLocks noChangeAspect="1"/>
           </p:cNvPicPr>
@@ -7072,7 +7072,7 @@
       </p:sp>
       <p:pic>
         <p:nvPicPr>
-          <p:cNvPr id="12" name="Picture 11" descr="35dbe0b6d97f96a4.png"/>
+          <p:cNvPr id="12" name="Picture 11" descr="58e1a0d62eaf3338.png"/>
           <p:cNvPicPr>
             <a:picLocks noChangeAspect="1"/>
           </p:cNvPicPr>
@@ -8435,7 +8435,7 @@
       </p:sp>
       <p:pic>
         <p:nvPicPr>
-          <p:cNvPr id="9" name="Picture 8" descr="6c228046c0fb44f6.png"/>
+          <p:cNvPr id="9" name="Picture 8" descr="e97669c0d54b74f0.png"/>
           <p:cNvPicPr>
             <a:picLocks noChangeAspect="1"/>
           </p:cNvPicPr>
@@ -8449,8 +8449,8 @@
         </p:blipFill>
         <p:spPr>
           <a:xfrm>
-            <a:off x="5497067" y="2103120"/>
-            <a:ext cx="1167384" cy="1194816"/>
+            <a:off x="5506212" y="2103120"/>
+            <a:ext cx="1149096" cy="1191768"/>
           </a:xfrm>
           <a:prstGeom prst="rect">
             <a:avLst/>
@@ -8465,7 +8465,7 @@
         </p:nvSpPr>
         <p:spPr>
           <a:xfrm>
-            <a:off x="1828800" y="3572255"/>
+            <a:off x="1828800" y="3569207"/>
             <a:ext cx="8503920" cy="548640"/>
           </a:xfrm>
           <a:prstGeom prst="rect">
@@ -9158,7 +9158,7 @@
       </p:sp>
       <p:pic>
         <p:nvPicPr>
-          <p:cNvPr id="9" name="Picture 8" descr="ea064d235ef414a6.png"/>
+          <p:cNvPr id="9" name="Picture 8" descr="260e9dabd7b640fb.png"/>
           <p:cNvPicPr>
             <a:picLocks noChangeAspect="1"/>
           </p:cNvPicPr>
@@ -10072,7 +10072,7 @@
       </p:sp>
       <p:pic>
         <p:nvPicPr>
-          <p:cNvPr id="9" name="Picture 8" descr="eea3c0844d5cda28.png"/>
+          <p:cNvPr id="9" name="Picture 8" descr="17e435e9fa7e4f09.png"/>
           <p:cNvPicPr>
             <a:picLocks noChangeAspect="1"/>
           </p:cNvPicPr>
@@ -10087,7 +10087,7 @@
         <p:spPr>
           <a:xfrm>
             <a:off x="5870447" y="2103120"/>
-            <a:ext cx="420624" cy="432816"/>
+            <a:ext cx="420624" cy="429768"/>
           </a:xfrm>
           <a:prstGeom prst="rect">
             <a:avLst/>
@@ -10102,7 +10102,7 @@
         </p:nvSpPr>
         <p:spPr>
           <a:xfrm>
-            <a:off x="777240" y="2764535"/>
+            <a:off x="777240" y="2761487"/>
             <a:ext cx="10607040" cy="465151"/>
           </a:xfrm>
           <a:prstGeom prst="rect">
@@ -10137,7 +10137,7 @@
         </p:nvSpPr>
         <p:spPr>
           <a:xfrm>
-            <a:off x="1874519" y="3430855"/>
+            <a:off x="1874519" y="3427807"/>
             <a:ext cx="4572000" cy="548640"/>
           </a:xfrm>
           <a:prstGeom prst="rect">
@@ -10181,7 +10181,7 @@
         </p:nvSpPr>
         <p:spPr>
           <a:xfrm>
-            <a:off x="6629400" y="3430855"/>
+            <a:off x="6629400" y="3427807"/>
             <a:ext cx="4572000" cy="548640"/>
           </a:xfrm>
           <a:prstGeom prst="rect">
@@ -10225,7 +10225,7 @@
         </p:nvSpPr>
         <p:spPr>
           <a:xfrm>
-            <a:off x="1874519" y="4116655"/>
+            <a:off x="1874519" y="4113607"/>
             <a:ext cx="4572000" cy="548640"/>
           </a:xfrm>
           <a:prstGeom prst="rect">
@@ -10269,7 +10269,7 @@
         </p:nvSpPr>
         <p:spPr>
           <a:xfrm>
-            <a:off x="6629400" y="4116655"/>
+            <a:off x="6629400" y="4113607"/>
             <a:ext cx="4572000" cy="548640"/>
           </a:xfrm>
           <a:prstGeom prst="rect">
@@ -10313,7 +10313,7 @@
         </p:nvSpPr>
         <p:spPr>
           <a:xfrm>
-            <a:off x="777240" y="5122495"/>
+            <a:off x="777240" y="5119447"/>
             <a:ext cx="10607040" cy="548640"/>
           </a:xfrm>
           <a:prstGeom prst="rect">
@@ -11174,7 +11174,7 @@
       </p:sp>
       <p:pic>
         <p:nvPicPr>
-          <p:cNvPr id="9" name="Picture 8" descr="68a50808a2a5ffd6.png"/>
+          <p:cNvPr id="9" name="Picture 8" descr="a899e53ebcbfa2dd.png"/>
           <p:cNvPicPr>
             <a:picLocks noChangeAspect="1"/>
           </p:cNvPicPr>
@@ -11188,8 +11188,8 @@
         </p:blipFill>
         <p:spPr>
           <a:xfrm>
-            <a:off x="5839967" y="2103120"/>
-            <a:ext cx="481583" cy="999743"/>
+            <a:off x="5849112" y="2103120"/>
+            <a:ext cx="463296" cy="999743"/>
           </a:xfrm>
           <a:prstGeom prst="rect">
             <a:avLst/>
@@ -12109,7 +12109,7 @@
       </p:sp>
       <p:pic>
         <p:nvPicPr>
-          <p:cNvPr id="9" name="Picture 8" descr="9e83a17182180955.png"/>
+          <p:cNvPr id="9" name="Picture 8" descr="73bf2466d9323c91.png"/>
           <p:cNvPicPr>
             <a:picLocks noChangeAspect="1"/>
           </p:cNvPicPr>
@@ -12123,8 +12123,8 @@
         </p:blipFill>
         <p:spPr>
           <a:xfrm>
-            <a:off x="5649467" y="2103120"/>
-            <a:ext cx="862584" cy="1014984"/>
+            <a:off x="5658611" y="2103120"/>
+            <a:ext cx="844296" cy="1018032"/>
           </a:xfrm>
           <a:prstGeom prst="rect">
             <a:avLst/>
@@ -12139,7 +12139,7 @@
         </p:nvSpPr>
         <p:spPr>
           <a:xfrm>
-            <a:off x="1828800" y="3392424"/>
+            <a:off x="1828800" y="3395471"/>
             <a:ext cx="8503920" cy="548640"/>
           </a:xfrm>
           <a:prstGeom prst="rect">
@@ -13460,7 +13460,7 @@
       </p:sp>
       <p:pic>
         <p:nvPicPr>
-          <p:cNvPr id="9" name="Picture 8" descr="1683127c1501744e.png"/>
+          <p:cNvPr id="9" name="Picture 8" descr="262fa2692961318a.png"/>
           <p:cNvPicPr>
             <a:picLocks noChangeAspect="1"/>
           </p:cNvPicPr>
@@ -13474,8 +13474,8 @@
         </p:blipFill>
         <p:spPr>
           <a:xfrm>
-            <a:off x="5458968" y="2103120"/>
-            <a:ext cx="1243584" cy="862584"/>
+            <a:off x="5460491" y="2103120"/>
+            <a:ext cx="1240536" cy="859536"/>
           </a:xfrm>
           <a:prstGeom prst="rect">
             <a:avLst/>
@@ -13490,7 +13490,7 @@
         </p:nvSpPr>
         <p:spPr>
           <a:xfrm>
-            <a:off x="1828800" y="3240023"/>
+            <a:off x="1828800" y="3236975"/>
             <a:ext cx="8503920" cy="548640"/>
           </a:xfrm>
           <a:prstGeom prst="rect">
@@ -14362,7 +14362,7 @@
         </p:nvSpPr>
         <p:spPr>
           <a:xfrm>
-            <a:off x="1134146" y="2273807"/>
+            <a:off x="1143290" y="2273807"/>
             <a:ext cx="3088445" cy="457200"/>
           </a:xfrm>
           <a:prstGeom prst="rect">
@@ -14391,7 +14391,7 @@
       </p:sp>
       <p:pic>
         <p:nvPicPr>
-          <p:cNvPr id="10" name="Picture 9" descr="86af6beffc833326.png"/>
+          <p:cNvPr id="10" name="Picture 9" descr="3c353a5052ea24b7.png"/>
           <p:cNvPicPr>
             <a:picLocks noChangeAspect="1"/>
           </p:cNvPicPr>
@@ -14405,8 +14405,8 @@
         </p:blipFill>
         <p:spPr>
           <a:xfrm>
-            <a:off x="4085432" y="2103120"/>
-            <a:ext cx="1639824" cy="798576"/>
+            <a:off x="4094576" y="2103120"/>
+            <a:ext cx="1630680" cy="798576"/>
           </a:xfrm>
           <a:prstGeom prst="rect">
             <a:avLst/>
@@ -14450,7 +14450,7 @@
       </p:sp>
       <p:pic>
         <p:nvPicPr>
-          <p:cNvPr id="12" name="Picture 11" descr="3c79892a0ac739bd.png"/>
+          <p:cNvPr id="12" name="Picture 11" descr="1b1a2270832c817b.png"/>
           <p:cNvPicPr>
             <a:picLocks noChangeAspect="1"/>
           </p:cNvPicPr>
@@ -14465,7 +14465,7 @@
         <p:spPr>
           <a:xfrm>
             <a:off x="9683457" y="2103120"/>
-            <a:ext cx="1173480" cy="798576"/>
+            <a:ext cx="1164336" cy="798576"/>
           </a:xfrm>
           <a:prstGeom prst="rect">
             <a:avLst/>
@@ -14480,7 +14480,7 @@
         </p:nvSpPr>
         <p:spPr>
           <a:xfrm>
-            <a:off x="10856937" y="2273807"/>
+            <a:off x="10847793" y="2273807"/>
             <a:ext cx="307595" cy="457200"/>
           </a:xfrm>
           <a:prstGeom prst="rect">
@@ -16069,7 +16069,7 @@
       </p:cxnSp>
       <p:pic>
         <p:nvPicPr>
-          <p:cNvPr id="11" name="Picture 10" descr="9415792fd44314bd.png"/>
+          <p:cNvPr id="11" name="Picture 10" descr="0fc742bc47e6f651.png"/>
           <p:cNvPicPr>
             <a:picLocks noChangeAspect="1"/>
           </p:cNvPicPr>
@@ -16083,8 +16083,8 @@
         </p:blipFill>
         <p:spPr>
           <a:xfrm>
-            <a:off x="3346703" y="2340864"/>
-            <a:ext cx="5468112" cy="816864"/>
+            <a:off x="3349752" y="2340864"/>
+            <a:ext cx="5462016" cy="813816"/>
           </a:xfrm>
           <a:prstGeom prst="rect">
             <a:avLst/>
@@ -16099,7 +16099,7 @@
         </p:nvSpPr>
         <p:spPr>
           <a:xfrm>
-            <a:off x="987552" y="3584447"/>
+            <a:off x="987552" y="3581400"/>
             <a:ext cx="3534479" cy="457200"/>
           </a:xfrm>
           <a:prstGeom prst="rect">
@@ -16128,7 +16128,7 @@
       </p:sp>
       <p:pic>
         <p:nvPicPr>
-          <p:cNvPr id="13" name="Picture 12" descr="caa5aae58594f04d.png"/>
+          <p:cNvPr id="13" name="Picture 12" descr="99376a582dd7223c.png"/>
           <p:cNvPicPr>
             <a:picLocks noChangeAspect="1"/>
           </p:cNvPicPr>
@@ -16142,8 +16142,8 @@
         </p:blipFill>
         <p:spPr>
           <a:xfrm>
-            <a:off x="4384871" y="3477767"/>
-            <a:ext cx="1758696" cy="670560"/>
+            <a:off x="4384871" y="3474720"/>
+            <a:ext cx="1749552" cy="670560"/>
           </a:xfrm>
           <a:prstGeom prst="rect">
             <a:avLst/>
@@ -16158,7 +16158,7 @@
         </p:nvSpPr>
         <p:spPr>
           <a:xfrm>
-            <a:off x="6143567" y="3584447"/>
+            <a:off x="6134423" y="3581400"/>
             <a:ext cx="597344" cy="457200"/>
           </a:xfrm>
           <a:prstGeom prst="rect">
@@ -16187,7 +16187,7 @@
       </p:sp>
       <p:pic>
         <p:nvPicPr>
-          <p:cNvPr id="15" name="Picture 14" descr="e9238f2ad6182a0d.png"/>
+          <p:cNvPr id="15" name="Picture 14" descr="6a9975e145b437dd.png"/>
           <p:cNvPicPr>
             <a:picLocks noChangeAspect="1"/>
           </p:cNvPicPr>
@@ -16201,8 +16201,8 @@
         </p:blipFill>
         <p:spPr>
           <a:xfrm>
-            <a:off x="6603751" y="3643883"/>
-            <a:ext cx="786384" cy="338328"/>
+            <a:off x="6594607" y="3640836"/>
+            <a:ext cx="789432" cy="338328"/>
           </a:xfrm>
           <a:prstGeom prst="rect">
             <a:avLst/>
@@ -16217,7 +16217,7 @@
         </p:nvSpPr>
         <p:spPr>
           <a:xfrm>
-            <a:off x="7390135" y="3584447"/>
+            <a:off x="7384039" y="3581400"/>
             <a:ext cx="330733" cy="457200"/>
           </a:xfrm>
           <a:prstGeom prst="rect">
@@ -16252,7 +16252,7 @@
         </p:nvSpPr>
         <p:spPr>
           <a:xfrm>
-            <a:off x="987552" y="4584191"/>
+            <a:off x="987552" y="4579620"/>
             <a:ext cx="3088445" cy="457200"/>
           </a:xfrm>
           <a:prstGeom prst="rect">
@@ -16281,7 +16281,7 @@
       </p:sp>
       <p:pic>
         <p:nvPicPr>
-          <p:cNvPr id="18" name="Picture 17" descr="b00c7f4311e4c71a.png"/>
+          <p:cNvPr id="18" name="Picture 17" descr="74344545705a48f9.png"/>
           <p:cNvPicPr>
             <a:picLocks noChangeAspect="1"/>
           </p:cNvPicPr>
@@ -16295,8 +16295,8 @@
         </p:blipFill>
         <p:spPr>
           <a:xfrm>
-            <a:off x="3938837" y="4404360"/>
-            <a:ext cx="3630168" cy="816864"/>
+            <a:off x="3938837" y="4401312"/>
+            <a:ext cx="3621024" cy="813816"/>
           </a:xfrm>
           <a:prstGeom prst="rect">
             <a:avLst/>
@@ -16603,7 +16603,7 @@
       </p:cxnSp>
       <p:pic>
         <p:nvPicPr>
-          <p:cNvPr id="10" name="Picture 9" descr="ca3e08171df6b530.png"/>
+          <p:cNvPr id="10" name="Picture 9" descr="e72c69fb4c92c91a.png"/>
           <p:cNvPicPr>
             <a:picLocks noChangeAspect="1"/>
           </p:cNvPicPr>
@@ -16617,8 +16617,8 @@
         </p:blipFill>
         <p:spPr>
           <a:xfrm>
-            <a:off x="2898648" y="2340864"/>
-            <a:ext cx="6364224" cy="810768"/>
+            <a:off x="2903220" y="2340864"/>
+            <a:ext cx="6355080" cy="810768"/>
           </a:xfrm>
           <a:prstGeom prst="rect">
             <a:avLst/>
@@ -16633,7 +16633,7 @@
         </p:nvSpPr>
         <p:spPr>
           <a:xfrm>
-            <a:off x="987552" y="3585972"/>
+            <a:off x="987552" y="3584448"/>
             <a:ext cx="3613463" cy="457200"/>
           </a:xfrm>
           <a:prstGeom prst="rect">
@@ -16662,7 +16662,7 @@
       </p:sp>
       <p:pic>
         <p:nvPicPr>
-          <p:cNvPr id="12" name="Picture 11" descr="5fe28a02304572ea.png"/>
+          <p:cNvPr id="12" name="Picture 11" descr="669ee74891112a84.png"/>
           <p:cNvPicPr>
             <a:picLocks noChangeAspect="1"/>
           </p:cNvPicPr>
@@ -16677,7 +16677,7 @@
         <p:spPr>
           <a:xfrm>
             <a:off x="4463855" y="3471672"/>
-            <a:ext cx="1700784" cy="685800"/>
+            <a:ext cx="1691640" cy="682752"/>
           </a:xfrm>
           <a:prstGeom prst="rect">
             <a:avLst/>
@@ -16692,7 +16692,7 @@
         </p:nvSpPr>
         <p:spPr>
           <a:xfrm>
-            <a:off x="6164639" y="3585972"/>
+            <a:off x="6155495" y="3584448"/>
             <a:ext cx="597344" cy="457200"/>
           </a:xfrm>
           <a:prstGeom prst="rect">
@@ -16721,7 +16721,7 @@
       </p:sp>
       <p:pic>
         <p:nvPicPr>
-          <p:cNvPr id="14" name="Picture 13" descr="9747b1c84bea2b78.png"/>
+          <p:cNvPr id="14" name="Picture 13" descr="a22d74845d9bf155.png"/>
           <p:cNvPicPr>
             <a:picLocks noChangeAspect="1"/>
           </p:cNvPicPr>
@@ -16735,7 +16735,7 @@
         </p:blipFill>
         <p:spPr>
           <a:xfrm>
-            <a:off x="6624824" y="3643884"/>
+            <a:off x="6615680" y="3642359"/>
             <a:ext cx="786384" cy="341376"/>
           </a:xfrm>
           <a:prstGeom prst="rect">
@@ -16751,7 +16751,7 @@
         </p:nvSpPr>
         <p:spPr>
           <a:xfrm>
-            <a:off x="7411208" y="3585972"/>
+            <a:off x="7402064" y="3584448"/>
             <a:ext cx="330733" cy="457200"/>
           </a:xfrm>
           <a:prstGeom prst="rect">
@@ -16786,7 +16786,7 @@
         </p:nvSpPr>
         <p:spPr>
           <a:xfrm>
-            <a:off x="987552" y="4590288"/>
+            <a:off x="987552" y="4587240"/>
             <a:ext cx="2033729" cy="457200"/>
           </a:xfrm>
           <a:prstGeom prst="rect">
@@ -16815,7 +16815,7 @@
       </p:sp>
       <p:pic>
         <p:nvPicPr>
-          <p:cNvPr id="17" name="Picture 16" descr="bf6d891ffc7ec268.png"/>
+          <p:cNvPr id="17" name="Picture 16" descr="efb58e8ff7264b81.png"/>
           <p:cNvPicPr>
             <a:picLocks noChangeAspect="1"/>
           </p:cNvPicPr>
@@ -16829,8 +16829,8 @@
         </p:blipFill>
         <p:spPr>
           <a:xfrm>
-            <a:off x="2884121" y="4413504"/>
-            <a:ext cx="3197352" cy="810768"/>
+            <a:off x="2884121" y="4410456"/>
+            <a:ext cx="3188208" cy="810768"/>
           </a:xfrm>
           <a:prstGeom prst="rect">
             <a:avLst/>
@@ -16845,7 +16845,7 @@
         </p:nvSpPr>
         <p:spPr>
           <a:xfrm>
-            <a:off x="6081473" y="4590288"/>
+            <a:off x="6072329" y="4587240"/>
             <a:ext cx="1265922" cy="457200"/>
           </a:xfrm>
           <a:prstGeom prst="rect">
@@ -16874,7 +16874,7 @@
       </p:sp>
       <p:pic>
         <p:nvPicPr>
-          <p:cNvPr id="19" name="Picture 18" descr="0e96d85d3f75c27d.png"/>
+          <p:cNvPr id="19" name="Picture 18" descr="1d8df7a17576def5.png"/>
           <p:cNvPicPr>
             <a:picLocks noChangeAspect="1"/>
           </p:cNvPicPr>
@@ -16888,8 +16888,8 @@
         </p:blipFill>
         <p:spPr>
           <a:xfrm>
-            <a:off x="7210235" y="4613148"/>
-            <a:ext cx="2228088" cy="411480"/>
+            <a:off x="7201091" y="4611624"/>
+            <a:ext cx="2231136" cy="408432"/>
           </a:xfrm>
           <a:prstGeom prst="rect">
             <a:avLst/>
@@ -17744,7 +17744,7 @@
       </p:graphicFrame>
       <p:pic>
         <p:nvPicPr>
-          <p:cNvPr id="11" name="Picture 10" descr="86af6beffc833326.png"/>
+          <p:cNvPr id="11" name="Picture 10" descr="3c353a5052ea24b7.png"/>
           <p:cNvPicPr>
             <a:picLocks noChangeAspect="1"/>
           </p:cNvPicPr>
@@ -17758,8 +17758,8 @@
         </p:blipFill>
         <p:spPr>
           <a:xfrm>
-            <a:off x="1908741" y="3337560"/>
-            <a:ext cx="1639824" cy="798576"/>
+            <a:off x="1917885" y="3337560"/>
+            <a:ext cx="1630680" cy="798576"/>
           </a:xfrm>
           <a:prstGeom prst="rect">
             <a:avLst/>
@@ -17803,7 +17803,7 @@
       </p:sp>
       <p:pic>
         <p:nvPicPr>
-          <p:cNvPr id="13" name="Picture 12" descr="048259f86d8f170a.png"/>
+          <p:cNvPr id="13" name="Picture 12" descr="3484dae0b8b01f22.png"/>
           <p:cNvPicPr>
             <a:picLocks noChangeAspect="1"/>
           </p:cNvPicPr>
@@ -17818,7 +17818,7 @@
         <p:spPr>
           <a:xfrm>
             <a:off x="5398543" y="3337560"/>
-            <a:ext cx="2359152" cy="798576"/>
+            <a:ext cx="2350008" cy="798576"/>
           </a:xfrm>
           <a:prstGeom prst="rect">
             <a:avLst/>
@@ -17833,7 +17833,7 @@
         </p:nvSpPr>
         <p:spPr>
           <a:xfrm>
-            <a:off x="7757695" y="3508248"/>
+            <a:off x="7748551" y="3508248"/>
             <a:ext cx="1714795" cy="457200"/>
           </a:xfrm>
           <a:prstGeom prst="rect">
@@ -17862,7 +17862,7 @@
       </p:sp>
       <p:pic>
         <p:nvPicPr>
-          <p:cNvPr id="15" name="Picture 14" descr="61848e244d08c521.png"/>
+          <p:cNvPr id="15" name="Picture 14" descr="7798067ac7529857.png"/>
           <p:cNvPicPr>
             <a:picLocks noChangeAspect="1"/>
           </p:cNvPicPr>
@@ -17876,7 +17876,7 @@
         </p:blipFill>
         <p:spPr>
           <a:xfrm>
-            <a:off x="9335330" y="3567683"/>
+            <a:off x="9326186" y="3567683"/>
             <a:ext cx="917448" cy="338328"/>
           </a:xfrm>
           <a:prstGeom prst="rect">
@@ -17921,7 +17921,7 @@
       </p:sp>
       <p:pic>
         <p:nvPicPr>
-          <p:cNvPr id="17" name="Picture 16" descr="62b15dcf7a505345.png"/>
+          <p:cNvPr id="17" name="Picture 16" descr="d591c8ddcc96ae96.png"/>
           <p:cNvPicPr>
             <a:picLocks noChangeAspect="1"/>
           </p:cNvPicPr>
@@ -17980,7 +17980,7 @@
       </p:sp>
       <p:pic>
         <p:nvPicPr>
-          <p:cNvPr id="19" name="Picture 18" descr="1e04812740d92fa8.png"/>
+          <p:cNvPr id="19" name="Picture 18" descr="c030b8e94fe02ffe.png"/>
           <p:cNvPicPr>
             <a:picLocks noChangeAspect="1"/>
           </p:cNvPicPr>
@@ -18589,7 +18589,7 @@
       </p:sp>
       <p:pic>
         <p:nvPicPr>
-          <p:cNvPr id="9" name="Picture 8" descr="3b017d83f1787b8d.png"/>
+          <p:cNvPr id="9" name="Picture 8" descr="8665e93b2158cddb.png"/>
           <p:cNvPicPr>
             <a:picLocks noChangeAspect="1"/>
           </p:cNvPicPr>
@@ -18604,7 +18604,7 @@
         <p:spPr>
           <a:xfrm>
             <a:off x="1828800" y="1920240"/>
-            <a:ext cx="3995928" cy="947928"/>
+            <a:ext cx="3986784" cy="944880"/>
           </a:xfrm>
           <a:prstGeom prst="rect">
             <a:avLst/>
@@ -18619,8 +18619,8 @@
         </p:nvSpPr>
         <p:spPr>
           <a:xfrm>
-            <a:off x="6281928" y="2165604"/>
-            <a:ext cx="5102351" cy="502920"/>
+            <a:off x="6272784" y="2164080"/>
+            <a:ext cx="5111495" cy="502920"/>
           </a:xfrm>
           <a:prstGeom prst="rect">
             <a:avLst/>
@@ -18648,7 +18648,7 @@
       </p:sp>
       <p:pic>
         <p:nvPicPr>
-          <p:cNvPr id="11" name="Picture 10" descr="bd5827372e35342f.png"/>
+          <p:cNvPr id="11" name="Picture 10" descr="a6bb031371915f0d.png"/>
           <p:cNvPicPr>
             <a:picLocks noChangeAspect="1"/>
           </p:cNvPicPr>
@@ -18662,8 +18662,8 @@
         </p:blipFill>
         <p:spPr>
           <a:xfrm>
-            <a:off x="1828800" y="3142488"/>
-            <a:ext cx="1755648" cy="411480"/>
+            <a:off x="1828800" y="3139440"/>
+            <a:ext cx="1758696" cy="408432"/>
           </a:xfrm>
           <a:prstGeom prst="rect">
             <a:avLst/>
@@ -18678,7 +18678,7 @@
         </p:nvSpPr>
         <p:spPr>
           <a:xfrm>
-            <a:off x="4041648" y="3119628"/>
+            <a:off x="4044696" y="3115056"/>
             <a:ext cx="6400800" cy="502920"/>
           </a:xfrm>
           <a:prstGeom prst="rect">
@@ -18707,7 +18707,7 @@
       </p:sp>
       <p:pic>
         <p:nvPicPr>
-          <p:cNvPr id="13" name="Picture 12" descr="90139498d34b0b81.png"/>
+          <p:cNvPr id="13" name="Picture 12" descr="1a7fe49e913d88f6.png"/>
           <p:cNvPicPr>
             <a:picLocks noChangeAspect="1"/>
           </p:cNvPicPr>
@@ -18721,8 +18721,8 @@
         </p:blipFill>
         <p:spPr>
           <a:xfrm>
-            <a:off x="1828800" y="3828288"/>
-            <a:ext cx="2350008" cy="350520"/>
+            <a:off x="1828800" y="3822192"/>
+            <a:ext cx="2353056" cy="350520"/>
           </a:xfrm>
           <a:prstGeom prst="rect">
             <a:avLst/>
@@ -18737,7 +18737,7 @@
         </p:nvSpPr>
         <p:spPr>
           <a:xfrm>
-            <a:off x="4636008" y="3774947"/>
+            <a:off x="4639056" y="3768852"/>
             <a:ext cx="6400800" cy="502920"/>
           </a:xfrm>
           <a:prstGeom prst="rect">
@@ -18772,7 +18772,7 @@
         </p:nvSpPr>
         <p:spPr>
           <a:xfrm>
-            <a:off x="777240" y="4636008"/>
+            <a:off x="777240" y="4629912"/>
             <a:ext cx="10607040" cy="548640"/>
           </a:xfrm>
           <a:prstGeom prst="rect">

--- a/a7/packages/A7 Unit 3 - Exponents and Scientific Notation/Slides/A7 3.02  Slides.pptx
+++ b/a7/packages/A7 Unit 3 - Exponents and Scientific Notation/Slides/A7 3.02  Slides.pptx
@@ -9679,7 +9679,7 @@
                 </a:solidFill>
                 <a:latin typeface="Century Schoolbook"/>
               </a:rPr>
-              <a:t>0</a:t>
+              <a:t>9</a:t>
             </a:r>
           </a:p>
         </p:txBody>
@@ -9723,7 +9723,7 @@
                 </a:solidFill>
                 <a:latin typeface="Century Schoolbook"/>
               </a:rPr>
-              <a:t>9</a:t>
+              <a:t>1/9</a:t>
             </a:r>
           </a:p>
         </p:txBody>
@@ -9767,7 +9767,7 @@
                 </a:solidFill>
                 <a:latin typeface="Century Schoolbook"/>
               </a:rPr>
-              <a:t>1/9</a:t>
+              <a:t>0</a:t>
             </a:r>
           </a:p>
         </p:txBody>
@@ -10212,7 +10212,7 @@
                 </a:solidFill>
                 <a:latin typeface="Century Schoolbook"/>
               </a:rPr>
-              <a:t>0</a:t>
+              <a:t>9</a:t>
             </a:r>
           </a:p>
         </p:txBody>
@@ -10256,7 +10256,7 @@
                 </a:solidFill>
                 <a:latin typeface="Century Schoolbook"/>
               </a:rPr>
-              <a:t>9</a:t>
+              <a:t>1/9</a:t>
             </a:r>
           </a:p>
         </p:txBody>
@@ -10300,7 +10300,7 @@
                 </a:solidFill>
                 <a:latin typeface="Century Schoolbook"/>
               </a:rPr>
-              <a:t>1/9</a:t>
+              <a:t>0</a:t>
             </a:r>
           </a:p>
         </p:txBody>
@@ -10701,7 +10701,7 @@
                 </a:solidFill>
                 <a:latin typeface="Century Schoolbook"/>
               </a:rPr>
-              <a:t>4</a:t>
+              <a:t>1</a:t>
             </a:r>
             <a:r>
               <a:rPr sz="2400" b="0" i="0" baseline="30000">
@@ -10763,7 +10763,7 @@
                 </a:solidFill>
                 <a:latin typeface="Century Schoolbook"/>
               </a:rPr>
-              <a:t>4</a:t>
+              <a:t>10</a:t>
             </a:r>
           </a:p>
         </p:txBody>
@@ -10807,7 +10807,7 @@
                 </a:solidFill>
                 <a:latin typeface="Century Schoolbook"/>
               </a:rPr>
-              <a:t>1</a:t>
+              <a:t>4</a:t>
             </a:r>
             <a:r>
               <a:rPr sz="2400" b="0" i="0" baseline="30000">
@@ -10869,7 +10869,7 @@
                 </a:solidFill>
                 <a:latin typeface="Century Schoolbook"/>
               </a:rPr>
-              <a:t>10</a:t>
+              <a:t>4</a:t>
             </a:r>
           </a:p>
         </p:txBody>
@@ -11257,25 +11257,25 @@
             <a:r>
               <a:rPr sz="2400" b="1" i="0">
                 <a:solidFill>
-                  <a:srgbClr val="9E1B32"/>
+                  <a:srgbClr val="1A1A1A"/>
                 </a:solidFill>
                 <a:latin typeface="Century Schoolbook"/>
               </a:rPr>
               <a:t>A.   </a:t>
             </a:r>
             <a:r>
-              <a:rPr sz="2400" b="1" i="0">
-                <a:solidFill>
-                  <a:srgbClr val="9E1B32"/>
-                </a:solidFill>
-                <a:latin typeface="Century Schoolbook"/>
-              </a:rPr>
-              <a:t>4</a:t>
-            </a:r>
-            <a:r>
-              <a:rPr sz="2400" b="1" i="0" baseline="30000">
-                <a:solidFill>
-                  <a:srgbClr val="9E1B32"/>
+              <a:rPr sz="2400" b="0" i="0">
+                <a:solidFill>
+                  <a:srgbClr val="1A1A1A"/>
+                </a:solidFill>
+                <a:latin typeface="Century Schoolbook"/>
+              </a:rPr>
+              <a:t>1</a:t>
+            </a:r>
+            <a:r>
+              <a:rPr sz="2400" b="0" i="0" baseline="30000">
+                <a:solidFill>
+                  <a:srgbClr val="1A1A1A"/>
                 </a:solidFill>
                 <a:latin typeface="Century Schoolbook"/>
               </a:rPr>
@@ -11332,7 +11332,7 @@
                 </a:solidFill>
                 <a:latin typeface="Century Schoolbook"/>
               </a:rPr>
-              <a:t>4</a:t>
+              <a:t>10</a:t>
             </a:r>
           </a:p>
         </p:txBody>
@@ -11363,25 +11363,25 @@
             <a:r>
               <a:rPr sz="2400" b="1" i="0">
                 <a:solidFill>
-                  <a:srgbClr val="1A1A1A"/>
+                  <a:srgbClr val="9E1B32"/>
                 </a:solidFill>
                 <a:latin typeface="Century Schoolbook"/>
               </a:rPr>
               <a:t>C.   </a:t>
             </a:r>
             <a:r>
-              <a:rPr sz="2400" b="0" i="0">
-                <a:solidFill>
-                  <a:srgbClr val="1A1A1A"/>
-                </a:solidFill>
-                <a:latin typeface="Century Schoolbook"/>
-              </a:rPr>
-              <a:t>1</a:t>
-            </a:r>
-            <a:r>
-              <a:rPr sz="2400" b="0" i="0" baseline="30000">
-                <a:solidFill>
-                  <a:srgbClr val="1A1A1A"/>
+              <a:rPr sz="2400" b="1" i="0">
+                <a:solidFill>
+                  <a:srgbClr val="9E1B32"/>
+                </a:solidFill>
+                <a:latin typeface="Century Schoolbook"/>
+              </a:rPr>
+              <a:t>4</a:t>
+            </a:r>
+            <a:r>
+              <a:rPr sz="2400" b="1" i="0" baseline="30000">
+                <a:solidFill>
+                  <a:srgbClr val="9E1B32"/>
                 </a:solidFill>
                 <a:latin typeface="Century Schoolbook"/>
               </a:rPr>
@@ -11438,7 +11438,7 @@
                 </a:solidFill>
                 <a:latin typeface="Century Schoolbook"/>
               </a:rPr>
-              <a:t>10</a:t>
+              <a:t>4</a:t>
             </a:r>
           </a:p>
         </p:txBody>
@@ -11473,7 +11473,7 @@
                 </a:solidFill>
                 <a:latin typeface="Century Schoolbook"/>
               </a:rPr>
-              <a:t>Answer:   A — 4</a:t>
+              <a:t>Answer:   C — 4</a:t>
             </a:r>
             <a:r>
               <a:rPr sz="3200" b="1" i="0" baseline="30000">

--- a/a7/packages/A7 Unit 3 - Exponents and Scientific Notation/Slides/A7 3.02  Slides.pptx
+++ b/a7/packages/A7 Unit 3 - Exponents and Scientific Notation/Slides/A7 3.02  Slides.pptx
@@ -6428,8 +6428,8 @@
         </p:nvSpPr>
         <p:spPr>
           <a:xfrm>
-            <a:off x="2330736" y="2171700"/>
-            <a:ext cx="2826883" cy="457200"/>
+            <a:off x="1234440" y="1851660"/>
+            <a:ext cx="2584093" cy="457200"/>
           </a:xfrm>
           <a:prstGeom prst="rect">
             <a:avLst/>
@@ -6444,20 +6444,20 @@
           <a:p>
             <a:pPr algn="l"/>
             <a:r>
-              <a:rPr sz="2600" b="0" i="0">
+              <a:rPr sz="2400" b="0" i="0">
                 <a:solidFill>
                   <a:srgbClr val="1A1A1A"/>
                 </a:solidFill>
                 <a:latin typeface="Century Schoolbook"/>
               </a:rPr>
-              <a:t>A server stores  </a:t>
+              <a:t>A website puts  </a:t>
             </a:r>
           </a:p>
         </p:txBody>
       </p:sp>
       <p:pic>
         <p:nvPicPr>
-          <p:cNvPr id="10" name="Picture 9" descr="6211579d9db5cb0f.png"/>
+          <p:cNvPr id="10" name="Picture 9" descr="138fda7418465782.png"/>
           <p:cNvPicPr>
             <a:picLocks noChangeAspect="1"/>
           </p:cNvPicPr>
@@ -6471,8 +6471,8 @@
         </p:blipFill>
         <p:spPr>
           <a:xfrm>
-            <a:off x="5020459" y="2228088"/>
-            <a:ext cx="323088" cy="344424"/>
+            <a:off x="3681373" y="1938527"/>
+            <a:ext cx="259080" cy="283464"/>
           </a:xfrm>
           <a:prstGeom prst="rect">
             <a:avLst/>
@@ -6487,8 +6487,8 @@
         </p:nvSpPr>
         <p:spPr>
           <a:xfrm>
-            <a:off x="5343547" y="2171700"/>
-            <a:ext cx="1682087" cy="457200"/>
+            <a:off x="3940453" y="1851660"/>
+            <a:ext cx="4495119" cy="457200"/>
           </a:xfrm>
           <a:prstGeom prst="rect">
             <a:avLst/>
@@ -6503,41 +6503,52 @@
           <a:p>
             <a:pPr algn="l"/>
             <a:r>
-              <a:rPr sz="2600" b="0" i="0">
+              <a:rPr sz="2400" b="0" i="0">
                 <a:solidFill>
                   <a:srgbClr val="1A1A1A"/>
                 </a:solidFill>
                 <a:latin typeface="Century Schoolbook"/>
               </a:rPr>
-              <a:t>  files in  </a:t>
-            </a:r>
-          </a:p>
-        </p:txBody>
-      </p:sp>
-      <p:pic>
-        <p:nvPicPr>
-          <p:cNvPr id="12" name="Picture 11" descr="849ea0a036ce867d.png"/>
-          <p:cNvPicPr>
-            <a:picLocks noChangeAspect="1"/>
-          </p:cNvPicPr>
-          <p:nvPr/>
-        </p:nvPicPr>
-        <p:blipFill>
-          <a:blip r:embed="rId3"/>
-          <a:stretch>
-            <a:fillRect/>
-          </a:stretch>
-        </p:blipFill>
-        <p:spPr>
-          <a:xfrm>
-            <a:off x="6888474" y="2228088"/>
-            <a:ext cx="298704" cy="344424"/>
-          </a:xfrm>
-          <a:prstGeom prst="rect">
-            <a:avLst/>
-          </a:prstGeom>
-        </p:spPr>
-      </p:pic>
+              <a:t>  photos into 8 equal albums.</a:t>
+            </a:r>
+          </a:p>
+        </p:txBody>
+      </p:sp>
+      <p:sp>
+        <p:nvSpPr>
+          <p:cNvPr id="12" name="TextBox 11"/>
+          <p:cNvSpPr txBox="1"/>
+          <p:nvPr/>
+        </p:nvSpPr>
+        <p:spPr>
+          <a:xfrm>
+            <a:off x="1234440" y="2487168"/>
+            <a:ext cx="10058400" cy="429370"/>
+          </a:xfrm>
+          <a:prstGeom prst="rect">
+            <a:avLst/>
+          </a:prstGeom>
+          <a:noFill/>
+        </p:spPr>
+        <p:txBody>
+          <a:bodyPr wrap="square" lIns="45720" rIns="45720" tIns="18288" bIns="18288" anchor="t">
+            <a:spAutoFit/>
+          </a:bodyPr>
+          <a:lstStyle/>
+          <a:p>
+            <a:pPr algn="l"/>
+            <a:r>
+              <a:rPr sz="2400" b="0" i="0">
+                <a:solidFill>
+                  <a:srgbClr val="1A1A1A"/>
+                </a:solidFill>
+                <a:latin typeface="Century Schoolbook"/>
+              </a:rPr>
+              <a:t>The site is 30 days old.</a:t>
+            </a:r>
+          </a:p>
+        </p:txBody>
+      </p:sp>
       <p:sp>
         <p:nvSpPr>
           <p:cNvPr id="13" name="TextBox 12"/>
@@ -6546,29 +6557,29 @@
         </p:nvSpPr>
         <p:spPr>
           <a:xfrm>
-            <a:off x="7187178" y="2171700"/>
-            <a:ext cx="2780765" cy="457200"/>
-          </a:xfrm>
-          <a:prstGeom prst="rect">
-            <a:avLst/>
-          </a:prstGeom>
-          <a:noFill/>
-        </p:spPr>
-        <p:txBody>
-          <a:bodyPr wrap="none" lIns="45720" rIns="45720" tIns="18288" bIns="18288" anchor="ctr">
-            <a:noAutofit/>
+            <a:off x="1234440" y="3026266"/>
+            <a:ext cx="10058400" cy="429370"/>
+          </a:xfrm>
+          <a:prstGeom prst="rect">
+            <a:avLst/>
+          </a:prstGeom>
+          <a:noFill/>
+        </p:spPr>
+        <p:txBody>
+          <a:bodyPr wrap="square" lIns="45720" rIns="45720" tIns="18288" bIns="18288" anchor="t">
+            <a:spAutoFit/>
           </a:bodyPr>
           <a:lstStyle/>
           <a:p>
             <a:pPr algn="l"/>
             <a:r>
-              <a:rPr sz="2600" b="0" i="0">
+              <a:rPr sz="2400" b="1" i="0">
                 <a:solidFill>
                   <a:srgbClr val="1A1A1A"/>
                 </a:solidFill>
                 <a:latin typeface="Century Schoolbook"/>
               </a:rPr>
-              <a:t>  folders, evenly.</a:t>
+              <a:t>How many photos are in each album?</a:t>
             </a:r>
           </a:p>
         </p:txBody>
@@ -6576,76 +6587,6 @@
       <p:sp>
         <p:nvSpPr>
           <p:cNvPr id="14" name="TextBox 13"/>
-          <p:cNvSpPr txBox="1"/>
-          <p:nvPr/>
-        </p:nvSpPr>
-        <p:spPr>
-          <a:xfrm>
-            <a:off x="777240" y="2880360"/>
-            <a:ext cx="10607040" cy="465151"/>
-          </a:xfrm>
-          <a:prstGeom prst="rect">
-            <a:avLst/>
-          </a:prstGeom>
-          <a:noFill/>
-        </p:spPr>
-        <p:txBody>
-          <a:bodyPr wrap="square" lIns="45720" rIns="45720" tIns="18288" bIns="18288" anchor="t">
-            <a:spAutoFit/>
-          </a:bodyPr>
-          <a:lstStyle/>
-          <a:p>
-            <a:pPr algn="ctr"/>
-            <a:r>
-              <a:rPr sz="2600" b="0" i="0">
-                <a:solidFill>
-                  <a:srgbClr val="1A1A1A"/>
-                </a:solidFill>
-                <a:latin typeface="Century Schoolbook"/>
-              </a:rPr>
-              <a:t>It has been running for 30 days.</a:t>
-            </a:r>
-          </a:p>
-        </p:txBody>
-      </p:sp>
-      <p:sp>
-        <p:nvSpPr>
-          <p:cNvPr id="15" name="TextBox 14"/>
-          <p:cNvSpPr txBox="1"/>
-          <p:nvPr/>
-        </p:nvSpPr>
-        <p:spPr>
-          <a:xfrm>
-            <a:off x="777240" y="3455239"/>
-            <a:ext cx="10607040" cy="465151"/>
-          </a:xfrm>
-          <a:prstGeom prst="rect">
-            <a:avLst/>
-          </a:prstGeom>
-          <a:noFill/>
-        </p:spPr>
-        <p:txBody>
-          <a:bodyPr wrap="square" lIns="45720" rIns="45720" tIns="18288" bIns="18288" anchor="t">
-            <a:spAutoFit/>
-          </a:bodyPr>
-          <a:lstStyle/>
-          <a:p>
-            <a:pPr algn="ctr"/>
-            <a:r>
-              <a:rPr sz="2600" b="0" i="0">
-                <a:solidFill>
-                  <a:srgbClr val="1A1A1A"/>
-                </a:solidFill>
-                <a:latin typeface="Century Schoolbook"/>
-              </a:rPr>
-              <a:t>How many files are in each folder?</a:t>
-            </a:r>
-          </a:p>
-        </p:txBody>
-      </p:sp>
-      <p:sp>
-        <p:nvSpPr>
-          <p:cNvPr id="16" name="TextBox 15"/>
           <p:cNvSpPr txBox="1"/>
           <p:nvPr/>
         </p:nvSpPr>
@@ -6674,41 +6615,6 @@
                 <a:latin typeface="Century Schoolbook"/>
               </a:rPr>
               <a:t>Answer it.</a:t>
-            </a:r>
-          </a:p>
-        </p:txBody>
-      </p:sp>
-      <p:sp>
-        <p:nvSpPr>
-          <p:cNvPr id="17" name="TextBox 16"/>
-          <p:cNvSpPr txBox="1"/>
-          <p:nvPr/>
-        </p:nvSpPr>
-        <p:spPr>
-          <a:xfrm>
-            <a:off x="777240" y="4828032"/>
-            <a:ext cx="10607040" cy="365760"/>
-          </a:xfrm>
-          <a:prstGeom prst="rect">
-            <a:avLst/>
-          </a:prstGeom>
-          <a:noFill/>
-        </p:spPr>
-        <p:txBody>
-          <a:bodyPr wrap="square" lIns="45720" rIns="45720" tIns="18288" bIns="18288" anchor="t">
-            <a:spAutoFit/>
-          </a:bodyPr>
-          <a:lstStyle/>
-          <a:p>
-            <a:pPr algn="ctr"/>
-            <a:r>
-              <a:rPr sz="1900" b="0" i="1">
-                <a:solidFill>
-                  <a:srgbClr val="6B6B6B"/>
-                </a:solidFill>
-                <a:latin typeface="Century Schoolbook"/>
-              </a:rPr>
-              <a:t>Find the value.</a:t>
             </a:r>
           </a:p>
         </p:txBody>
@@ -6984,8 +6890,8 @@
         </p:nvSpPr>
         <p:spPr>
           <a:xfrm>
-            <a:off x="2330736" y="2080260"/>
-            <a:ext cx="2826883" cy="457200"/>
+            <a:off x="1234440" y="1851660"/>
+            <a:ext cx="2584093" cy="457200"/>
           </a:xfrm>
           <a:prstGeom prst="rect">
             <a:avLst/>
@@ -7000,20 +6906,20 @@
           <a:p>
             <a:pPr algn="l"/>
             <a:r>
-              <a:rPr sz="2600" b="0" i="0">
+              <a:rPr sz="2400" b="0" i="0">
                 <a:solidFill>
                   <a:srgbClr val="1A1A1A"/>
                 </a:solidFill>
                 <a:latin typeface="Century Schoolbook"/>
               </a:rPr>
-              <a:t>A server stores  </a:t>
+              <a:t>A website puts  </a:t>
             </a:r>
           </a:p>
         </p:txBody>
       </p:sp>
       <p:pic>
         <p:nvPicPr>
-          <p:cNvPr id="10" name="Picture 9" descr="2b0ddd72bd8ed32a.png"/>
+          <p:cNvPr id="10" name="Picture 9" descr="7c23c9fd82d9d425.png"/>
           <p:cNvPicPr>
             <a:picLocks noChangeAspect="1"/>
           </p:cNvPicPr>
@@ -7027,8 +6933,8 @@
         </p:blipFill>
         <p:spPr>
           <a:xfrm>
-            <a:off x="5020459" y="2135124"/>
-            <a:ext cx="323088" cy="347472"/>
+            <a:off x="3681373" y="1940052"/>
+            <a:ext cx="265176" cy="280416"/>
           </a:xfrm>
           <a:prstGeom prst="rect">
             <a:avLst/>
@@ -7043,8 +6949,8 @@
         </p:nvSpPr>
         <p:spPr>
           <a:xfrm>
-            <a:off x="5343547" y="2080260"/>
-            <a:ext cx="1682087" cy="457200"/>
+            <a:off x="3946549" y="1851660"/>
+            <a:ext cx="4495119" cy="457200"/>
           </a:xfrm>
           <a:prstGeom prst="rect">
             <a:avLst/>
@@ -7059,41 +6965,52 @@
           <a:p>
             <a:pPr algn="l"/>
             <a:r>
-              <a:rPr sz="2600" b="0" i="0">
+              <a:rPr sz="2400" b="0" i="0">
                 <a:solidFill>
                   <a:srgbClr val="1A1A1A"/>
                 </a:solidFill>
                 <a:latin typeface="Century Schoolbook"/>
               </a:rPr>
-              <a:t>  files in  </a:t>
-            </a:r>
-          </a:p>
-        </p:txBody>
-      </p:sp>
-      <p:pic>
-        <p:nvPicPr>
-          <p:cNvPr id="12" name="Picture 11" descr="58e1a0d62eaf3338.png"/>
-          <p:cNvPicPr>
-            <a:picLocks noChangeAspect="1"/>
-          </p:cNvPicPr>
-          <p:nvPr/>
-        </p:nvPicPr>
-        <p:blipFill>
-          <a:blip r:embed="rId3"/>
-          <a:stretch>
-            <a:fillRect/>
-          </a:stretch>
-        </p:blipFill>
-        <p:spPr>
-          <a:xfrm>
-            <a:off x="6888474" y="2136648"/>
-            <a:ext cx="298704" cy="344424"/>
-          </a:xfrm>
-          <a:prstGeom prst="rect">
-            <a:avLst/>
-          </a:prstGeom>
-        </p:spPr>
-      </p:pic>
+              <a:t>  photos into 8 equal albums.</a:t>
+            </a:r>
+          </a:p>
+        </p:txBody>
+      </p:sp>
+      <p:sp>
+        <p:nvSpPr>
+          <p:cNvPr id="12" name="TextBox 11"/>
+          <p:cNvSpPr txBox="1"/>
+          <p:nvPr/>
+        </p:nvSpPr>
+        <p:spPr>
+          <a:xfrm>
+            <a:off x="1234440" y="2487168"/>
+            <a:ext cx="10058400" cy="429370"/>
+          </a:xfrm>
+          <a:prstGeom prst="rect">
+            <a:avLst/>
+          </a:prstGeom>
+          <a:noFill/>
+        </p:spPr>
+        <p:txBody>
+          <a:bodyPr wrap="square" lIns="45720" rIns="45720" tIns="18288" bIns="18288" anchor="t">
+            <a:spAutoFit/>
+          </a:bodyPr>
+          <a:lstStyle/>
+          <a:p>
+            <a:pPr algn="l"/>
+            <a:r>
+              <a:rPr sz="2400" b="0" i="0">
+                <a:solidFill>
+                  <a:srgbClr val="1A1A1A"/>
+                </a:solidFill>
+                <a:latin typeface="Century Schoolbook"/>
+              </a:rPr>
+              <a:t>The site is 30 days old.</a:t>
+            </a:r>
+          </a:p>
+        </p:txBody>
+      </p:sp>
       <p:sp>
         <p:nvSpPr>
           <p:cNvPr id="13" name="TextBox 12"/>
@@ -7102,29 +7019,29 @@
         </p:nvSpPr>
         <p:spPr>
           <a:xfrm>
-            <a:off x="7187178" y="2080260"/>
-            <a:ext cx="2780765" cy="457200"/>
-          </a:xfrm>
-          <a:prstGeom prst="rect">
-            <a:avLst/>
-          </a:prstGeom>
-          <a:noFill/>
-        </p:spPr>
-        <p:txBody>
-          <a:bodyPr wrap="none" lIns="45720" rIns="45720" tIns="18288" bIns="18288" anchor="ctr">
-            <a:noAutofit/>
+            <a:off x="1234440" y="3026266"/>
+            <a:ext cx="10058400" cy="429370"/>
+          </a:xfrm>
+          <a:prstGeom prst="rect">
+            <a:avLst/>
+          </a:prstGeom>
+          <a:noFill/>
+        </p:spPr>
+        <p:txBody>
+          <a:bodyPr wrap="square" lIns="45720" rIns="45720" tIns="18288" bIns="18288" anchor="t">
+            <a:spAutoFit/>
           </a:bodyPr>
           <a:lstStyle/>
           <a:p>
             <a:pPr algn="l"/>
             <a:r>
-              <a:rPr sz="2600" b="0" i="0">
+              <a:rPr sz="2400" b="1" i="0">
                 <a:solidFill>
                   <a:srgbClr val="1A1A1A"/>
                 </a:solidFill>
                 <a:latin typeface="Century Schoolbook"/>
               </a:rPr>
-              <a:t>  folders, evenly.</a:t>
+              <a:t>How many photos are in each album?</a:t>
             </a:r>
           </a:p>
         </p:txBody>
@@ -7137,8 +7054,8 @@
         </p:nvSpPr>
         <p:spPr>
           <a:xfrm>
-            <a:off x="777240" y="2788920"/>
-            <a:ext cx="10607040" cy="465151"/>
+            <a:off x="1828800" y="3656804"/>
+            <a:ext cx="8503920" cy="548640"/>
           </a:xfrm>
           <a:prstGeom prst="rect">
             <a:avLst/>
@@ -7153,13 +7070,58 @@
           <a:p>
             <a:pPr algn="ctr"/>
             <a:r>
-              <a:rPr sz="2600" b="0" i="0">
-                <a:solidFill>
-                  <a:srgbClr val="1A1A1A"/>
-                </a:solidFill>
-                <a:latin typeface="Century Schoolbook"/>
-              </a:rPr>
-              <a:t>It has been running for 30 days.</a:t>
+              <a:rPr sz="2400" b="0" i="0">
+                <a:solidFill>
+                  <a:srgbClr val="6B6B6B"/>
+                </a:solidFill>
+                <a:latin typeface="Century Schoolbook"/>
+              </a:rPr>
+              <a:t>8</a:t>
+            </a:r>
+            <a:r>
+              <a:rPr sz="2400" b="0" i="0" baseline="30000">
+                <a:solidFill>
+                  <a:srgbClr val="6B6B6B"/>
+                </a:solidFill>
+                <a:latin typeface="Century Schoolbook"/>
+              </a:rPr>
+              <a:t>4</a:t>
+            </a:r>
+            <a:r>
+              <a:rPr sz="2400" b="0" i="0">
+                <a:solidFill>
+                  <a:srgbClr val="6B6B6B"/>
+                </a:solidFill>
+                <a:latin typeface="Century Schoolbook"/>
+              </a:rPr>
+              <a:t> ÷ 8</a:t>
+            </a:r>
+            <a:r>
+              <a:rPr sz="2400" b="0" i="0" baseline="30000">
+                <a:solidFill>
+                  <a:srgbClr val="6B6B6B"/>
+                </a:solidFill>
+                <a:latin typeface="Century Schoolbook"/>
+              </a:rPr>
+              <a:t>1</a:t>
+            </a:r>
+            <a:r>
+              <a:rPr sz="2400" b="0" i="0">
+                <a:solidFill>
+                  <a:srgbClr val="6B6B6B"/>
+                </a:solidFill>
+                <a:latin typeface="Century Schoolbook"/>
+              </a:rPr>
+              <a:t> = 8</a:t>
+            </a:r>
+            <a:r>
+              <a:rPr sz="2400" b="0" i="0" baseline="30000">
+                <a:solidFill>
+                  <a:srgbClr val="6B6B6B"/>
+                </a:solidFill>
+                <a:latin typeface="Century Schoolbook"/>
+              </a:rPr>
+              <a:t>3</a:t>
             </a:r>
           </a:p>
         </p:txBody>
@@ -7172,122 +7134,7 @@
         </p:nvSpPr>
         <p:spPr>
           <a:xfrm>
-            <a:off x="777240" y="3363799"/>
-            <a:ext cx="10607040" cy="465151"/>
-          </a:xfrm>
-          <a:prstGeom prst="rect">
-            <a:avLst/>
-          </a:prstGeom>
-          <a:noFill/>
-        </p:spPr>
-        <p:txBody>
-          <a:bodyPr wrap="square" lIns="45720" rIns="45720" tIns="18288" bIns="18288" anchor="t">
-            <a:spAutoFit/>
-          </a:bodyPr>
-          <a:lstStyle/>
-          <a:p>
-            <a:pPr algn="ctr"/>
-            <a:r>
-              <a:rPr sz="2600" b="0" i="0">
-                <a:solidFill>
-                  <a:srgbClr val="1A1A1A"/>
-                </a:solidFill>
-                <a:latin typeface="Century Schoolbook"/>
-              </a:rPr>
-              <a:t>How many files are in each folder?</a:t>
-            </a:r>
-          </a:p>
-        </p:txBody>
-      </p:sp>
-      <p:sp>
-        <p:nvSpPr>
-          <p:cNvPr id="16" name="TextBox 15"/>
-          <p:cNvSpPr txBox="1"/>
-          <p:nvPr/>
-        </p:nvSpPr>
-        <p:spPr>
-          <a:xfrm>
-            <a:off x="1828800" y="3984398"/>
-            <a:ext cx="8503920" cy="548640"/>
-          </a:xfrm>
-          <a:prstGeom prst="rect">
-            <a:avLst/>
-          </a:prstGeom>
-          <a:noFill/>
-        </p:spPr>
-        <p:txBody>
-          <a:bodyPr wrap="square" lIns="45720" rIns="45720" tIns="18288" bIns="18288" anchor="t">
-            <a:spAutoFit/>
-          </a:bodyPr>
-          <a:lstStyle/>
-          <a:p>
-            <a:pPr algn="ctr"/>
-            <a:r>
-              <a:rPr sz="2400" b="0" i="0">
-                <a:solidFill>
-                  <a:srgbClr val="6B6B6B"/>
-                </a:solidFill>
-                <a:latin typeface="Century Schoolbook"/>
-              </a:rPr>
-              <a:t>8</a:t>
-            </a:r>
-            <a:r>
-              <a:rPr sz="2400" b="0" i="0" baseline="30000">
-                <a:solidFill>
-                  <a:srgbClr val="6B6B6B"/>
-                </a:solidFill>
-                <a:latin typeface="Century Schoolbook"/>
-              </a:rPr>
-              <a:t>4</a:t>
-            </a:r>
-            <a:r>
-              <a:rPr sz="2400" b="0" i="0">
-                <a:solidFill>
-                  <a:srgbClr val="6B6B6B"/>
-                </a:solidFill>
-                <a:latin typeface="Century Schoolbook"/>
-              </a:rPr>
-              <a:t> ÷ 8</a:t>
-            </a:r>
-            <a:r>
-              <a:rPr sz="2400" b="0" i="0" baseline="30000">
-                <a:solidFill>
-                  <a:srgbClr val="6B6B6B"/>
-                </a:solidFill>
-                <a:latin typeface="Century Schoolbook"/>
-              </a:rPr>
-              <a:t>1</a:t>
-            </a:r>
-            <a:r>
-              <a:rPr sz="2400" b="0" i="0">
-                <a:solidFill>
-                  <a:srgbClr val="6B6B6B"/>
-                </a:solidFill>
-                <a:latin typeface="Century Schoolbook"/>
-              </a:rPr>
-              <a:t> = 8</a:t>
-            </a:r>
-            <a:r>
-              <a:rPr sz="2400" b="0" i="0" baseline="30000">
-                <a:solidFill>
-                  <a:srgbClr val="6B6B6B"/>
-                </a:solidFill>
-                <a:latin typeface="Century Schoolbook"/>
-              </a:rPr>
-              <a:t>3</a:t>
-            </a:r>
-          </a:p>
-        </p:txBody>
-      </p:sp>
-      <p:sp>
-        <p:nvSpPr>
-          <p:cNvPr id="17" name="TextBox 16"/>
-          <p:cNvSpPr txBox="1"/>
-          <p:nvPr/>
-        </p:nvSpPr>
-        <p:spPr>
-          <a:xfrm>
-            <a:off x="777240" y="4715918"/>
+            <a:off x="777240" y="4663440"/>
             <a:ext cx="10607040" cy="548640"/>
           </a:xfrm>
           <a:prstGeom prst="rect">
